--- a/docs/part2-deck/Part2-Agentic-Development.pptx
+++ b/docs/part2-deck/Part2-Agentic-Development.pptx
@@ -3120,10 +3120,10 @@
                 <a:srgbClr val="FFFFFF"/>
               </a:gs>
               <a:gs pos="100000">
-                <a:srgbClr val="E8F4FC"/>
+                <a:srgbClr val="F1F7FB"/>
               </a:gs>
             </a:gsLst>
-            <a:lin scaled="0" ang="15000000"/>
+            <a:lin scaled="0" ang="14700000"/>
           </a:gradFill>
           <a:ln>
             <a:noFill/>
@@ -3153,29 +3153,21 @@
       </p:sp>
       <p:sp>
         <p:nvSpPr>
-          <p:cNvPr id="3" name="Rectangle 2"/>
-          <p:cNvSpPr/>
-          <p:nvPr/>
-        </p:nvSpPr>
-        <p:spPr>
-          <a:xfrm>
-            <a:off x="0" y="5303520"/>
-            <a:ext cx="12191695" cy="1554480"/>
-          </a:xfrm>
-          <a:prstGeom prst="rect">
+          <p:cNvPr id="3" name="Oval 2"/>
+          <p:cNvSpPr/>
+          <p:nvPr/>
+        </p:nvSpPr>
+        <p:spPr>
+          <a:xfrm>
+            <a:off x="9692640" y="4480560"/>
+            <a:ext cx="4754880" cy="4754880"/>
+          </a:xfrm>
+          <a:prstGeom prst="ellipse">
             <a:avLst/>
           </a:prstGeom>
-          <a:gradFill rotWithShape="1">
-            <a:gsLst>
-              <a:gs pos="0">
-                <a:srgbClr val="90E0EF"/>
-              </a:gs>
-              <a:gs pos="100000">
-                <a:srgbClr val="E8F4FC"/>
-              </a:gs>
-            </a:gsLst>
-            <a:lin scaled="0" ang="0"/>
-          </a:gradFill>
+          <a:solidFill>
+            <a:srgbClr val="90E0EF"/>
+          </a:solidFill>
           <a:ln>
             <a:noFill/>
           </a:ln>
@@ -3211,7 +3203,7 @@
         <p:spPr>
           <a:xfrm>
             <a:off x="0" y="0"/>
-            <a:ext cx="12191695" cy="109728"/>
+            <a:ext cx="12191695" cy="73152"/>
           </a:xfrm>
           <a:prstGeom prst="rect">
             <a:avLst/>
@@ -3255,32 +3247,41 @@
       </p:sp>
       <p:sp>
         <p:nvSpPr>
-          <p:cNvPr id="5" name="Rectangle 4"/>
-          <p:cNvSpPr/>
-          <p:nvPr/>
-        </p:nvSpPr>
-        <p:spPr>
-          <a:xfrm>
-            <a:off x="0" y="1828800"/>
-            <a:ext cx="12191695" cy="2926080"/>
-          </a:xfrm>
-          <a:prstGeom prst="rect">
-            <a:avLst/>
+          <p:cNvPr id="5" name="Rounded Rectangle 4"/>
+          <p:cNvSpPr/>
+          <p:nvPr/>
+        </p:nvSpPr>
+        <p:spPr>
+          <a:xfrm>
+            <a:off x="640080" y="1691640"/>
+            <a:ext cx="10911535" cy="3337560"/>
+          </a:xfrm>
+          <a:prstGeom prst="roundRect">
+            <a:avLst>
+              <a:gd name="adj" fmla="val 7000"/>
+            </a:avLst>
           </a:prstGeom>
           <a:gradFill rotWithShape="1">
             <a:gsLst>
               <a:gs pos="0">
-                <a:srgbClr val="005F8C"/>
+                <a:srgbClr val="004C73"/>
               </a:gs>
               <a:gs pos="100000">
                 <a:srgbClr val="0096C7"/>
               </a:gs>
             </a:gsLst>
-            <a:lin scaled="0" ang="20700000"/>
+            <a:lin scaled="0" ang="20400000"/>
           </a:gradFill>
           <a:ln>
             <a:noFill/>
           </a:ln>
+          <a:effectLst>
+            <a:outerShdw blurRad="201168" dist="73152" dir="5400000" rotWithShape="0">
+              <a:srgbClr val="1B3A4B">
+                <a:alpha val="30000"/>
+              </a:srgbClr>
+            </a:outerShdw>
+          </a:effectLst>
         </p:spPr>
         <p:style>
           <a:lnRef idx="1">
@@ -3312,8 +3313,8 @@
         </p:nvSpPr>
         <p:spPr>
           <a:xfrm>
-            <a:off x="822960" y="2148840"/>
-            <a:ext cx="10515600" cy="1280160"/>
+            <a:off x="1051560" y="1965960"/>
+            <a:ext cx="8229600" cy="365760"/>
           </a:xfrm>
           <a:prstGeom prst="rect">
             <a:avLst/>
@@ -3327,13 +3328,13 @@
           <a:lstStyle/>
           <a:p>
             <a:r>
-              <a:rPr sz="4000" b="1">
-                <a:solidFill>
-                  <a:srgbClr val="0A3D5C"/>
-                </a:solidFill>
-                <a:latin typeface="Calibri"/>
-              </a:rPr>
-              <a:t>Enabling Agentic Development</a:t>
+              <a:rPr sz="1300" b="1">
+                <a:solidFill>
+                  <a:srgbClr val="FF7A45"/>
+                </a:solidFill>
+                <a:latin typeface="Segoe UI Semibold"/>
+              </a:rPr>
+              <a:t>PRINCIPAL ENGINEER CASE STUDY</a:t>
             </a:r>
           </a:p>
         </p:txBody>
@@ -3346,8 +3347,8 @@
         </p:nvSpPr>
         <p:spPr>
           <a:xfrm>
-            <a:off x="822960" y="3246120"/>
-            <a:ext cx="10515600" cy="914400"/>
+            <a:off x="1005840" y="2331720"/>
+            <a:ext cx="9875520" cy="1234440"/>
           </a:xfrm>
           <a:prstGeom prst="rect">
             <a:avLst/>
@@ -3360,14 +3361,19 @@
           </a:bodyPr>
           <a:lstStyle/>
           <a:p>
-            <a:r>
-              <a:rPr sz="2000" b="0">
-                <a:solidFill>
-                  <a:srgbClr val="005F8C"/>
-                </a:solidFill>
-                <a:latin typeface="Calibri"/>
-              </a:rPr>
-              <a:t>30 / 60 / 90 roadmap · SOX-regulated e-commerce engineering</a:t>
+            <a:pPr>
+              <a:lnSpc>
+                <a:spcPct val="102000"/>
+              </a:lnSpc>
+            </a:pPr>
+            <a:r>
+              <a:rPr sz="4200" b="1">
+                <a:solidFill>
+                  <a:srgbClr val="FFFFFF"/>
+                </a:solidFill>
+                <a:latin typeface="Segoe UI Semibold"/>
+              </a:rPr>
+              <a:t>Enabling Agentic Development</a:t>
             </a:r>
           </a:p>
         </p:txBody>
@@ -3380,8 +3386,8 @@
         </p:nvSpPr>
         <p:spPr>
           <a:xfrm>
-            <a:off x="822960" y="3977639"/>
-            <a:ext cx="10515600" cy="548640"/>
+            <a:off x="1005840" y="3520440"/>
+            <a:ext cx="9875520" cy="548640"/>
           </a:xfrm>
           <a:prstGeom prst="rect">
             <a:avLst/>
@@ -3395,13 +3401,209 @@
           <a:lstStyle/>
           <a:p>
             <a:r>
+              <a:rPr sz="1800" b="0">
+                <a:solidFill>
+                  <a:srgbClr val="E8F4FC"/>
+                </a:solidFill>
+                <a:latin typeface="Segoe UI"/>
+              </a:rPr>
+              <a:t>30 / 60 / 90 roadmap for a SOX-regulated e-commerce engineering org</a:t>
+            </a:r>
+          </a:p>
+        </p:txBody>
+      </p:sp>
+      <p:sp>
+        <p:nvSpPr>
+          <p:cNvPr id="9" name="Rounded Rectangle 8"/>
+          <p:cNvSpPr/>
+          <p:nvPr/>
+        </p:nvSpPr>
+        <p:spPr>
+          <a:xfrm>
+            <a:off x="1051560" y="4160520"/>
+            <a:ext cx="1554480" cy="402336"/>
+          </a:xfrm>
+          <a:prstGeom prst="roundRect">
+            <a:avLst>
+              <a:gd name="adj" fmla="val 50000"/>
+            </a:avLst>
+          </a:prstGeom>
+          <a:solidFill>
+            <a:srgbClr val="FFFFFF"/>
+          </a:solidFill>
+          <a:ln>
+            <a:noFill/>
+          </a:ln>
+        </p:spPr>
+        <p:style>
+          <a:lnRef idx="1">
+            <a:schemeClr val="accent1"/>
+          </a:lnRef>
+          <a:fillRef idx="3">
+            <a:schemeClr val="accent1"/>
+          </a:fillRef>
+          <a:effectRef idx="2">
+            <a:schemeClr val="accent1"/>
+          </a:effectRef>
+          <a:fontRef idx="minor">
+            <a:schemeClr val="lt1"/>
+          </a:fontRef>
+        </p:style>
+        <p:txBody>
+          <a:bodyPr rtlCol="0" anchor="ctr" lIns="0" rIns="0" tIns="0" bIns="0"/>
+          <a:lstStyle/>
+          <a:p>
+            <a:pPr algn="ctr"/>
+            <a:r>
+              <a:rPr sz="1100" b="1">
+                <a:solidFill>
+                  <a:srgbClr val="004C73"/>
+                </a:solidFill>
+                <a:latin typeface="Segoe UI"/>
+              </a:rPr>
+              <a:t>12 slides</a:t>
+            </a:r>
+          </a:p>
+        </p:txBody>
+      </p:sp>
+      <p:sp>
+        <p:nvSpPr>
+          <p:cNvPr id="10" name="Rounded Rectangle 9"/>
+          <p:cNvSpPr/>
+          <p:nvPr/>
+        </p:nvSpPr>
+        <p:spPr>
+          <a:xfrm>
+            <a:off x="2743200" y="4160520"/>
+            <a:ext cx="1554480" cy="402336"/>
+          </a:xfrm>
+          <a:prstGeom prst="roundRect">
+            <a:avLst>
+              <a:gd name="adj" fmla="val 50000"/>
+            </a:avLst>
+          </a:prstGeom>
+          <a:solidFill>
+            <a:srgbClr val="FFFFFF"/>
+          </a:solidFill>
+          <a:ln>
+            <a:noFill/>
+          </a:ln>
+        </p:spPr>
+        <p:style>
+          <a:lnRef idx="1">
+            <a:schemeClr val="accent1"/>
+          </a:lnRef>
+          <a:fillRef idx="3">
+            <a:schemeClr val="accent1"/>
+          </a:fillRef>
+          <a:effectRef idx="2">
+            <a:schemeClr val="accent1"/>
+          </a:effectRef>
+          <a:fontRef idx="minor">
+            <a:schemeClr val="lt1"/>
+          </a:fontRef>
+        </p:style>
+        <p:txBody>
+          <a:bodyPr rtlCol="0" anchor="ctr" lIns="0" rIns="0" tIns="0" bIns="0"/>
+          <a:lstStyle/>
+          <a:p>
+            <a:pPr algn="ctr"/>
+            <a:r>
+              <a:rPr sz="1100" b="1">
+                <a:solidFill>
+                  <a:srgbClr val="004C73"/>
+                </a:solidFill>
+                <a:latin typeface="Segoe UI"/>
+              </a:rPr>
+              <a:t>Live demo</a:t>
+            </a:r>
+          </a:p>
+        </p:txBody>
+      </p:sp>
+      <p:sp>
+        <p:nvSpPr>
+          <p:cNvPr id="11" name="Rounded Rectangle 10"/>
+          <p:cNvSpPr/>
+          <p:nvPr/>
+        </p:nvSpPr>
+        <p:spPr>
+          <a:xfrm>
+            <a:off x="4434840" y="4160520"/>
+            <a:ext cx="1554480" cy="402336"/>
+          </a:xfrm>
+          <a:prstGeom prst="roundRect">
+            <a:avLst>
+              <a:gd name="adj" fmla="val 50000"/>
+            </a:avLst>
+          </a:prstGeom>
+          <a:solidFill>
+            <a:srgbClr val="FFFFFF"/>
+          </a:solidFill>
+          <a:ln>
+            <a:noFill/>
+          </a:ln>
+        </p:spPr>
+        <p:style>
+          <a:lnRef idx="1">
+            <a:schemeClr val="accent1"/>
+          </a:lnRef>
+          <a:fillRef idx="3">
+            <a:schemeClr val="accent1"/>
+          </a:fillRef>
+          <a:effectRef idx="2">
+            <a:schemeClr val="accent1"/>
+          </a:effectRef>
+          <a:fontRef idx="minor">
+            <a:schemeClr val="lt1"/>
+          </a:fontRef>
+        </p:style>
+        <p:txBody>
+          <a:bodyPr rtlCol="0" anchor="ctr" lIns="0" rIns="0" tIns="0" bIns="0"/>
+          <a:lstStyle/>
+          <a:p>
+            <a:pPr algn="ctr"/>
+            <a:r>
+              <a:rPr sz="1100" b="1">
+                <a:solidFill>
+                  <a:srgbClr val="004C73"/>
+                </a:solidFill>
+                <a:latin typeface="Segoe UI"/>
+              </a:rPr>
+              <a:t>SOX evidence gate</a:t>
+            </a:r>
+          </a:p>
+        </p:txBody>
+      </p:sp>
+      <p:sp>
+        <p:nvSpPr>
+          <p:cNvPr id="12" name="TextBox 11"/>
+          <p:cNvSpPr txBox="1"/>
+          <p:nvPr/>
+        </p:nvSpPr>
+        <p:spPr>
+          <a:xfrm>
+            <a:off x="640080" y="5349240"/>
+            <a:ext cx="10881360" cy="457200"/>
+          </a:xfrm>
+          <a:prstGeom prst="rect">
+            <a:avLst/>
+          </a:prstGeom>
+          <a:noFill/>
+        </p:spPr>
+        <p:txBody>
+          <a:bodyPr wrap="none">
+            <a:spAutoFit/>
+          </a:bodyPr>
+          <a:lstStyle/>
+          <a:p>
+            <a:r>
               <a:rPr sz="1400" b="0">
                 <a:solidFill>
                   <a:srgbClr val="64748B"/>
                 </a:solidFill>
-                <a:latin typeface="Calibri"/>
-              </a:rPr>
-              <a:t>Principal Engineer case study · Royal Caribbean Group</a:t>
+                <a:latin typeface="Segoe UI Semibold"/>
+              </a:rPr>
+              <a:t>Royal Caribbean Group  ·  Manoj Pammina</a:t>
             </a:r>
           </a:p>
         </p:txBody>
@@ -3444,10 +3646,10 @@
                 <a:srgbClr val="FFFFFF"/>
               </a:gs>
               <a:gs pos="100000">
-                <a:srgbClr val="E8F4FC"/>
+                <a:srgbClr val="F1F7FB"/>
               </a:gs>
             </a:gsLst>
-            <a:lin scaled="0" ang="15000000"/>
+            <a:lin scaled="0" ang="14700000"/>
           </a:gradFill>
           <a:ln>
             <a:noFill/>
@@ -3477,29 +3679,21 @@
       </p:sp>
       <p:sp>
         <p:nvSpPr>
-          <p:cNvPr id="3" name="Rectangle 2"/>
-          <p:cNvSpPr/>
-          <p:nvPr/>
-        </p:nvSpPr>
-        <p:spPr>
-          <a:xfrm>
-            <a:off x="0" y="5303520"/>
-            <a:ext cx="12191695" cy="1554480"/>
-          </a:xfrm>
-          <a:prstGeom prst="rect">
+          <p:cNvPr id="3" name="Oval 2"/>
+          <p:cNvSpPr/>
+          <p:nvPr/>
+        </p:nvSpPr>
+        <p:spPr>
+          <a:xfrm>
+            <a:off x="9692640" y="4480560"/>
+            <a:ext cx="4754880" cy="4754880"/>
+          </a:xfrm>
+          <a:prstGeom prst="ellipse">
             <a:avLst/>
           </a:prstGeom>
-          <a:gradFill rotWithShape="1">
-            <a:gsLst>
-              <a:gs pos="0">
-                <a:srgbClr val="90E0EF"/>
-              </a:gs>
-              <a:gs pos="100000">
-                <a:srgbClr val="E8F4FC"/>
-              </a:gs>
-            </a:gsLst>
-            <a:lin scaled="0" ang="0"/>
-          </a:gradFill>
+          <a:solidFill>
+            <a:srgbClr val="90E0EF"/>
+          </a:solidFill>
           <a:ln>
             <a:noFill/>
           </a:ln>
@@ -3535,7 +3729,7 @@
         <p:spPr>
           <a:xfrm>
             <a:off x="0" y="0"/>
-            <a:ext cx="12191695" cy="109728"/>
+            <a:ext cx="12191695" cy="73152"/>
           </a:xfrm>
           <a:prstGeom prst="rect">
             <a:avLst/>
@@ -3579,32 +3773,41 @@
       </p:sp>
       <p:sp>
         <p:nvSpPr>
-          <p:cNvPr id="5" name="Rectangle 4"/>
-          <p:cNvSpPr/>
-          <p:nvPr/>
-        </p:nvSpPr>
-        <p:spPr>
-          <a:xfrm>
-            <a:off x="0" y="109728"/>
-            <a:ext cx="12191695" cy="960120"/>
-          </a:xfrm>
-          <a:prstGeom prst="rect">
-            <a:avLst/>
+          <p:cNvPr id="5" name="Rounded Rectangle 4"/>
+          <p:cNvSpPr/>
+          <p:nvPr/>
+        </p:nvSpPr>
+        <p:spPr>
+          <a:xfrm>
+            <a:off x="365760" y="292608"/>
+            <a:ext cx="11460175" cy="932688"/>
+          </a:xfrm>
+          <a:prstGeom prst="roundRect">
+            <a:avLst>
+              <a:gd name="adj" fmla="val 12000"/>
+            </a:avLst>
           </a:prstGeom>
           <a:gradFill rotWithShape="1">
             <a:gsLst>
               <a:gs pos="0">
-                <a:srgbClr val="005F8C"/>
+                <a:srgbClr val="004C73"/>
               </a:gs>
               <a:gs pos="100000">
                 <a:srgbClr val="0096C7"/>
               </a:gs>
             </a:gsLst>
-            <a:lin scaled="0" ang="0"/>
+            <a:lin scaled="0" ang="21120000"/>
           </a:gradFill>
           <a:ln>
             <a:noFill/>
           </a:ln>
+          <a:effectLst>
+            <a:outerShdw blurRad="128016" dist="45720" dir="5400000" rotWithShape="0">
+              <a:srgbClr val="1B3A4B">
+                <a:alpha val="26000"/>
+              </a:srgbClr>
+            </a:outerShdw>
+          </a:effectLst>
         </p:spPr>
         <p:style>
           <a:lnRef idx="1">
@@ -3630,14 +3833,66 @@
       </p:sp>
       <p:sp>
         <p:nvSpPr>
-          <p:cNvPr id="6" name="TextBox 5"/>
+          <p:cNvPr id="6" name="Oval 5"/>
+          <p:cNvSpPr/>
+          <p:nvPr/>
+        </p:nvSpPr>
+        <p:spPr>
+          <a:xfrm>
+            <a:off x="566928" y="438912"/>
+            <a:ext cx="658368" cy="658368"/>
+          </a:xfrm>
+          <a:prstGeom prst="ellipse">
+            <a:avLst/>
+          </a:prstGeom>
+          <a:solidFill>
+            <a:srgbClr val="FF7A45"/>
+          </a:solidFill>
+          <a:ln>
+            <a:noFill/>
+          </a:ln>
+        </p:spPr>
+        <p:style>
+          <a:lnRef idx="1">
+            <a:schemeClr val="accent1"/>
+          </a:lnRef>
+          <a:fillRef idx="3">
+            <a:schemeClr val="accent1"/>
+          </a:fillRef>
+          <a:effectRef idx="2">
+            <a:schemeClr val="accent1"/>
+          </a:effectRef>
+          <a:fontRef idx="minor">
+            <a:schemeClr val="lt1"/>
+          </a:fontRef>
+        </p:style>
+        <p:txBody>
+          <a:bodyPr rtlCol="0" anchor="ctr" wrap="none" lIns="0" rIns="0" tIns="0" bIns="0"/>
+          <a:lstStyle/>
+          <a:p>
+            <a:pPr algn="ctr"/>
+            <a:r>
+              <a:rPr sz="2000" b="1">
+                <a:solidFill>
+                  <a:srgbClr val="FFFFFF"/>
+                </a:solidFill>
+                <a:latin typeface="Segoe UI"/>
+              </a:rPr>
+              <a:t>9</a:t>
+            </a:r>
+          </a:p>
+        </p:txBody>
+      </p:sp>
+      <p:sp>
+        <p:nvSpPr>
+          <p:cNvPr id="7" name="TextBox 6"/>
           <p:cNvSpPr txBox="1"/>
           <p:nvPr/>
         </p:nvSpPr>
         <p:spPr>
           <a:xfrm>
-            <a:off x="502920" y="256032"/>
-            <a:ext cx="9601200" cy="685800"/>
+            <a:off x="1444752" y="384048"/>
+            <a:ext cx="9052560" cy="777240"/>
           </a:xfrm>
           <a:prstGeom prst="rect">
             <a:avLst/>
@@ -3645,17 +3900,17 @@
           <a:noFill/>
         </p:spPr>
         <p:txBody>
-          <a:bodyPr wrap="square">
+          <a:bodyPr wrap="square" anchor="ctr">
             <a:spAutoFit/>
           </a:bodyPr>
           <a:lstStyle/>
           <a:p>
             <a:r>
-              <a:rPr sz="2800" b="1">
+              <a:rPr sz="2500" b="1">
                 <a:solidFill>
                   <a:srgbClr val="FFFFFF"/>
                 </a:solidFill>
-                <a:latin typeface="Calibri"/>
+                <a:latin typeface="Segoe UI Semibold"/>
               </a:rPr>
               <a:t>Evaluate and operate — gate, not report</a:t>
             </a:r>
@@ -3664,17 +3919,19 @@
       </p:sp>
       <p:sp>
         <p:nvSpPr>
-          <p:cNvPr id="7" name="Rounded Rectangle 6"/>
-          <p:cNvSpPr/>
-          <p:nvPr/>
-        </p:nvSpPr>
-        <p:spPr>
-          <a:xfrm>
-            <a:off x="10835640" y="320040"/>
-            <a:ext cx="960120" cy="411480"/>
+          <p:cNvPr id="8" name="Rounded Rectangle 7"/>
+          <p:cNvSpPr/>
+          <p:nvPr/>
+        </p:nvSpPr>
+        <p:spPr>
+          <a:xfrm>
+            <a:off x="10561320" y="457200"/>
+            <a:ext cx="1051560" cy="384048"/>
           </a:xfrm>
           <a:prstGeom prst="roundRect">
-            <a:avLst/>
+            <a:avLst>
+              <a:gd name="adj" fmla="val 50000"/>
+            </a:avLst>
           </a:prstGeom>
           <a:solidFill>
             <a:srgbClr val="FFFFFF"/>
@@ -3698,32 +3955,77 @@
           </a:fontRef>
         </p:style>
         <p:txBody>
+          <a:bodyPr rtlCol="0" anchor="ctr" lIns="0" rIns="0" tIns="0" bIns="0"/>
+          <a:lstStyle/>
+          <a:p>
+            <a:pPr algn="ctr"/>
+            <a:r>
+              <a:rPr sz="1200" b="1">
+                <a:solidFill>
+                  <a:srgbClr val="004C73"/>
+                </a:solidFill>
+                <a:latin typeface="Segoe UI"/>
+              </a:rPr>
+              <a:t>9 / 12</a:t>
+            </a:r>
+          </a:p>
+        </p:txBody>
+      </p:sp>
+      <p:sp>
+        <p:nvSpPr>
+          <p:cNvPr id="9" name="Rounded Rectangle 8"/>
+          <p:cNvSpPr/>
+          <p:nvPr/>
+        </p:nvSpPr>
+        <p:spPr>
+          <a:xfrm>
+            <a:off x="502920" y="1481328"/>
+            <a:ext cx="54864" cy="4709160"/>
+          </a:xfrm>
+          <a:prstGeom prst="roundRect">
+            <a:avLst>
+              <a:gd name="adj" fmla="val 50000"/>
+            </a:avLst>
+          </a:prstGeom>
+          <a:solidFill>
+            <a:srgbClr val="FF7A45"/>
+          </a:solidFill>
+          <a:ln>
+            <a:noFill/>
+          </a:ln>
+        </p:spPr>
+        <p:style>
+          <a:lnRef idx="1">
+            <a:schemeClr val="accent1"/>
+          </a:lnRef>
+          <a:fillRef idx="3">
+            <a:schemeClr val="accent1"/>
+          </a:fillRef>
+          <a:effectRef idx="2">
+            <a:schemeClr val="accent1"/>
+          </a:effectRef>
+          <a:fontRef idx="minor">
+            <a:schemeClr val="lt1"/>
+          </a:fontRef>
+        </p:style>
+        <p:txBody>
           <a:bodyPr rtlCol="0" anchor="ctr"/>
           <a:lstStyle/>
           <a:p>
             <a:pPr algn="ctr"/>
-            <a:r>
-              <a:rPr sz="1100" b="1">
-                <a:solidFill>
-                  <a:srgbClr val="FFFFFF"/>
-                </a:solidFill>
-                <a:latin typeface="Calibri"/>
-              </a:rPr>
-              <a:t>9/12</a:t>
-            </a:r>
-          </a:p>
-        </p:txBody>
-      </p:sp>
-      <p:sp>
-        <p:nvSpPr>
-          <p:cNvPr id="8" name="TextBox 7"/>
+          </a:p>
+        </p:txBody>
+      </p:sp>
+      <p:sp>
+        <p:nvSpPr>
+          <p:cNvPr id="10" name="TextBox 9"/>
           <p:cNvSpPr txBox="1"/>
           <p:nvPr/>
         </p:nvSpPr>
         <p:spPr>
           <a:xfrm>
-            <a:off x="502920" y="1325880"/>
-            <a:ext cx="3977639" cy="5120640"/>
+            <a:off x="749808" y="1417320"/>
+            <a:ext cx="3703320" cy="4892040"/>
           </a:xfrm>
           <a:prstGeom prst="rect">
             <a:avLst/>
@@ -3738,10 +4040,10 @@
           <a:p>
             <a:pPr>
               <a:lnSpc>
-                <a:spcPct val="115000"/>
+                <a:spcPct val="118000"/>
               </a:lnSpc>
               <a:spcAft>
-                <a:spcPts val="1400"/>
+                <a:spcPts val="1600"/>
               </a:spcAft>
             </a:pPr>
             <a:r>
@@ -3749,16 +4051,16 @@
                 <a:solidFill>
                   <a:srgbClr val="0096C7"/>
                 </a:solidFill>
-                <a:latin typeface="Calibri"/>
-              </a:rPr>
-              <a:t>●  </a:t>
+                <a:latin typeface="Segoe UI Semibold"/>
+              </a:rPr>
+              <a:t>01  </a:t>
             </a:r>
             <a:r>
               <a:rPr sz="1500" b="0">
                 <a:solidFill>
                   <a:srgbClr val="334155"/>
                 </a:solidFill>
-                <a:latin typeface="Calibri"/>
+                <a:latin typeface="Segoe UI"/>
               </a:rPr>
               <a:t>10 golden + 8 red-team cases — non-zero exit blocks merge</a:t>
             </a:r>
@@ -3766,10 +4068,10 @@
           <a:p>
             <a:pPr>
               <a:lnSpc>
-                <a:spcPct val="115000"/>
+                <a:spcPct val="118000"/>
               </a:lnSpc>
               <a:spcAft>
-                <a:spcPts val="1400"/>
+                <a:spcPts val="1600"/>
               </a:spcAft>
             </a:pPr>
             <a:r>
@@ -3777,16 +4079,16 @@
                 <a:solidFill>
                   <a:srgbClr val="0096C7"/>
                 </a:solidFill>
-                <a:latin typeface="Calibri"/>
-              </a:rPr>
-              <a:t>●  </a:t>
+                <a:latin typeface="Segoe UI Semibold"/>
+              </a:rPr>
+              <a:t>02  </a:t>
             </a:r>
             <a:r>
               <a:rPr sz="1500" b="0">
                 <a:solidFill>
                   <a:srgbClr val="334155"/>
                 </a:solidFill>
-                <a:latin typeface="Calibri"/>
+                <a:latin typeface="Segoe UI"/>
               </a:rPr>
               <a:t>Model off → same options (degraded, not down)</a:t>
             </a:r>
@@ -3794,10 +4096,10 @@
           <a:p>
             <a:pPr>
               <a:lnSpc>
-                <a:spcPct val="115000"/>
+                <a:spcPct val="118000"/>
               </a:lnSpc>
               <a:spcAft>
-                <a:spcPts val="1400"/>
+                <a:spcPts val="1600"/>
               </a:spcAft>
             </a:pPr>
             <a:r>
@@ -3805,16 +4107,16 @@
                 <a:solidFill>
                   <a:srgbClr val="0096C7"/>
                 </a:solidFill>
-                <a:latin typeface="Calibri"/>
-              </a:rPr>
-              <a:t>●  </a:t>
+                <a:latin typeface="Segoe UI Semibold"/>
+              </a:rPr>
+              <a:t>03  </a:t>
             </a:r>
             <a:r>
               <a:rPr sz="1500" b="0">
                 <a:solidFill>
                   <a:srgbClr val="334155"/>
                 </a:solidFill>
-                <a:latin typeface="Calibri"/>
+                <a:latin typeface="Segoe UI"/>
               </a:rPr>
               <a:t>Concurrent holds cannot oversell finite inventory</a:t>
             </a:r>
@@ -3823,14 +4125,57 @@
       </p:sp>
       <p:sp>
         <p:nvSpPr>
-          <p:cNvPr id="9" name="TextBox 8"/>
+          <p:cNvPr id="11" name="Rectangle 10"/>
+          <p:cNvSpPr/>
+          <p:nvPr/>
+        </p:nvSpPr>
+        <p:spPr>
+          <a:xfrm>
+            <a:off x="502920" y="6382512"/>
+            <a:ext cx="11183112" cy="12700"/>
+          </a:xfrm>
+          <a:prstGeom prst="rect">
+            <a:avLst/>
+          </a:prstGeom>
+          <a:solidFill>
+            <a:srgbClr val="D8ECF7"/>
+          </a:solidFill>
+          <a:ln>
+            <a:noFill/>
+          </a:ln>
+        </p:spPr>
+        <p:style>
+          <a:lnRef idx="1">
+            <a:schemeClr val="accent1"/>
+          </a:lnRef>
+          <a:fillRef idx="3">
+            <a:schemeClr val="accent1"/>
+          </a:fillRef>
+          <a:effectRef idx="2">
+            <a:schemeClr val="accent1"/>
+          </a:effectRef>
+          <a:fontRef idx="minor">
+            <a:schemeClr val="lt1"/>
+          </a:fontRef>
+        </p:style>
+        <p:txBody>
+          <a:bodyPr rtlCol="0" anchor="ctr"/>
+          <a:lstStyle/>
+          <a:p>
+            <a:pPr algn="ctr"/>
+          </a:p>
+        </p:txBody>
+      </p:sp>
+      <p:sp>
+        <p:nvSpPr>
+          <p:cNvPr id="12" name="TextBox 11"/>
           <p:cNvSpPr txBox="1"/>
           <p:nvPr/>
         </p:nvSpPr>
         <p:spPr>
           <a:xfrm>
-            <a:off x="502920" y="6446520"/>
-            <a:ext cx="7315200" cy="320040"/>
+            <a:off x="502920" y="6455664"/>
+            <a:ext cx="10652760" cy="292608"/>
           </a:xfrm>
           <a:prstGeom prst="rect">
             <a:avLst/>
@@ -3848,35 +4193,44 @@
                 <a:solidFill>
                   <a:srgbClr val="64748B"/>
                 </a:solidFill>
-                <a:latin typeface="Calibri"/>
-              </a:rPr>
-              <a:t>RCG Principal Engineer · Part 2 · Agentic Development Strategy</a:t>
-            </a:r>
-          </a:p>
-        </p:txBody>
-      </p:sp>
-      <p:sp>
-        <p:nvSpPr>
-          <p:cNvPr id="10" name="Rounded Rectangle 9"/>
-          <p:cNvSpPr/>
-          <p:nvPr/>
-        </p:nvSpPr>
-        <p:spPr>
-          <a:xfrm>
-            <a:off x="4709160" y="1325880"/>
-            <a:ext cx="7178040" cy="4892040"/>
+                <a:latin typeface="Segoe UI"/>
+              </a:rPr>
+              <a:t>RCG Principal Engineer  ·  Part 2  ·  Agentic Development Strategy</a:t>
+            </a:r>
+          </a:p>
+        </p:txBody>
+      </p:sp>
+      <p:sp>
+        <p:nvSpPr>
+          <p:cNvPr id="13" name="Rounded Rectangle 12"/>
+          <p:cNvSpPr/>
+          <p:nvPr/>
+        </p:nvSpPr>
+        <p:spPr>
+          <a:xfrm>
+            <a:off x="4709160" y="1536192"/>
+            <a:ext cx="7178040" cy="4709160"/>
           </a:xfrm>
           <a:prstGeom prst="roundRect">
-            <a:avLst/>
+            <a:avLst>
+              <a:gd name="adj" fmla="val 4500"/>
+            </a:avLst>
           </a:prstGeom>
           <a:solidFill>
             <a:srgbClr val="FFFFFF"/>
           </a:solidFill>
-          <a:ln w="15875">
+          <a:ln w="12700">
             <a:solidFill>
-              <a:srgbClr val="CBE8F5"/>
+              <a:srgbClr val="D8ECF7"/>
             </a:solidFill>
           </a:ln>
+          <a:effectLst>
+            <a:outerShdw blurRad="146304" dist="54864" dir="5400000" rotWithShape="0">
+              <a:srgbClr val="1B3A4B">
+                <a:alpha val="22000"/>
+              </a:srgbClr>
+            </a:outerShdw>
+          </a:effectLst>
         </p:spPr>
         <p:style>
           <a:lnRef idx="1">
@@ -3902,7 +4256,7 @@
       </p:sp>
       <p:pic>
         <p:nvPicPr>
-          <p:cNvPr id="11" name="Picture 10" descr="slide-09-eval-gate.png"/>
+          <p:cNvPr id="14" name="Picture 13" descr="slide-09-eval-gate.png"/>
           <p:cNvPicPr>
             <a:picLocks noChangeAspect="1"/>
           </p:cNvPicPr>
@@ -3916,14 +4270,68 @@
         </p:blipFill>
         <p:spPr>
           <a:xfrm>
-            <a:off x="4782312" y="1399032"/>
-            <a:ext cx="7031736" cy="4745736"/>
+            <a:off x="4791456" y="1618488"/>
+            <a:ext cx="7013448" cy="4544568"/>
           </a:xfrm>
           <a:prstGeom prst="rect">
             <a:avLst/>
           </a:prstGeom>
         </p:spPr>
       </p:pic>
+      <p:sp>
+        <p:nvSpPr>
+          <p:cNvPr id="15" name="Rounded Rectangle 14"/>
+          <p:cNvSpPr/>
+          <p:nvPr/>
+        </p:nvSpPr>
+        <p:spPr>
+          <a:xfrm>
+            <a:off x="4873752" y="1353312"/>
+            <a:ext cx="1554480" cy="365760"/>
+          </a:xfrm>
+          <a:prstGeom prst="roundRect">
+            <a:avLst>
+              <a:gd name="adj" fmla="val 50000"/>
+            </a:avLst>
+          </a:prstGeom>
+          <a:solidFill>
+            <a:srgbClr val="004C73"/>
+          </a:solidFill>
+          <a:ln>
+            <a:noFill/>
+          </a:ln>
+        </p:spPr>
+        <p:style>
+          <a:lnRef idx="1">
+            <a:schemeClr val="accent1"/>
+          </a:lnRef>
+          <a:fillRef idx="3">
+            <a:schemeClr val="accent1"/>
+          </a:fillRef>
+          <a:effectRef idx="2">
+            <a:schemeClr val="accent1"/>
+          </a:effectRef>
+          <a:fontRef idx="minor">
+            <a:schemeClr val="lt1"/>
+          </a:fontRef>
+        </p:style>
+        <p:txBody>
+          <a:bodyPr rtlCol="0" anchor="ctr" lIns="0" rIns="0" tIns="0" bIns="0"/>
+          <a:lstStyle/>
+          <a:p>
+            <a:pPr algn="ctr"/>
+            <a:r>
+              <a:rPr sz="1000" b="1">
+                <a:solidFill>
+                  <a:srgbClr val="FFFFFF"/>
+                </a:solidFill>
+                <a:latin typeface="Segoe UI"/>
+              </a:rPr>
+              <a:t>LIVE OUTPUT</a:t>
+            </a:r>
+          </a:p>
+        </p:txBody>
+      </p:sp>
     </p:spTree>
   </p:cSld>
   <p:clrMapOvr>
@@ -3962,10 +4370,10 @@
                 <a:srgbClr val="FFFFFF"/>
               </a:gs>
               <a:gs pos="100000">
-                <a:srgbClr val="E8F4FC"/>
+                <a:srgbClr val="F1F7FB"/>
               </a:gs>
             </a:gsLst>
-            <a:lin scaled="0" ang="15000000"/>
+            <a:lin scaled="0" ang="14700000"/>
           </a:gradFill>
           <a:ln>
             <a:noFill/>
@@ -3995,29 +4403,21 @@
       </p:sp>
       <p:sp>
         <p:nvSpPr>
-          <p:cNvPr id="3" name="Rectangle 2"/>
-          <p:cNvSpPr/>
-          <p:nvPr/>
-        </p:nvSpPr>
-        <p:spPr>
-          <a:xfrm>
-            <a:off x="0" y="5303520"/>
-            <a:ext cx="12191695" cy="1554480"/>
-          </a:xfrm>
-          <a:prstGeom prst="rect">
+          <p:cNvPr id="3" name="Oval 2"/>
+          <p:cNvSpPr/>
+          <p:nvPr/>
+        </p:nvSpPr>
+        <p:spPr>
+          <a:xfrm>
+            <a:off x="9692640" y="4480560"/>
+            <a:ext cx="4754880" cy="4754880"/>
+          </a:xfrm>
+          <a:prstGeom prst="ellipse">
             <a:avLst/>
           </a:prstGeom>
-          <a:gradFill rotWithShape="1">
-            <a:gsLst>
-              <a:gs pos="0">
-                <a:srgbClr val="90E0EF"/>
-              </a:gs>
-              <a:gs pos="100000">
-                <a:srgbClr val="E8F4FC"/>
-              </a:gs>
-            </a:gsLst>
-            <a:lin scaled="0" ang="0"/>
-          </a:gradFill>
+          <a:solidFill>
+            <a:srgbClr val="90E0EF"/>
+          </a:solidFill>
           <a:ln>
             <a:noFill/>
           </a:ln>
@@ -4053,7 +4453,7 @@
         <p:spPr>
           <a:xfrm>
             <a:off x="0" y="0"/>
-            <a:ext cx="12191695" cy="109728"/>
+            <a:ext cx="12191695" cy="73152"/>
           </a:xfrm>
           <a:prstGeom prst="rect">
             <a:avLst/>
@@ -4097,32 +4497,41 @@
       </p:sp>
       <p:sp>
         <p:nvSpPr>
-          <p:cNvPr id="5" name="Rectangle 4"/>
-          <p:cNvSpPr/>
-          <p:nvPr/>
-        </p:nvSpPr>
-        <p:spPr>
-          <a:xfrm>
-            <a:off x="0" y="109728"/>
-            <a:ext cx="12191695" cy="960120"/>
-          </a:xfrm>
-          <a:prstGeom prst="rect">
-            <a:avLst/>
+          <p:cNvPr id="5" name="Rounded Rectangle 4"/>
+          <p:cNvSpPr/>
+          <p:nvPr/>
+        </p:nvSpPr>
+        <p:spPr>
+          <a:xfrm>
+            <a:off x="365760" y="292608"/>
+            <a:ext cx="11460175" cy="932688"/>
+          </a:xfrm>
+          <a:prstGeom prst="roundRect">
+            <a:avLst>
+              <a:gd name="adj" fmla="val 12000"/>
+            </a:avLst>
           </a:prstGeom>
           <a:gradFill rotWithShape="1">
             <a:gsLst>
               <a:gs pos="0">
-                <a:srgbClr val="005F8C"/>
+                <a:srgbClr val="004C73"/>
               </a:gs>
               <a:gs pos="100000">
                 <a:srgbClr val="0096C7"/>
               </a:gs>
             </a:gsLst>
-            <a:lin scaled="0" ang="0"/>
+            <a:lin scaled="0" ang="21120000"/>
           </a:gradFill>
           <a:ln>
             <a:noFill/>
           </a:ln>
+          <a:effectLst>
+            <a:outerShdw blurRad="128016" dist="45720" dir="5400000" rotWithShape="0">
+              <a:srgbClr val="1B3A4B">
+                <a:alpha val="26000"/>
+              </a:srgbClr>
+            </a:outerShdw>
+          </a:effectLst>
         </p:spPr>
         <p:style>
           <a:lnRef idx="1">
@@ -4148,14 +4557,66 @@
       </p:sp>
       <p:sp>
         <p:nvSpPr>
-          <p:cNvPr id="6" name="TextBox 5"/>
+          <p:cNvPr id="6" name="Oval 5"/>
+          <p:cNvSpPr/>
+          <p:nvPr/>
+        </p:nvSpPr>
+        <p:spPr>
+          <a:xfrm>
+            <a:off x="566928" y="438912"/>
+            <a:ext cx="658368" cy="658368"/>
+          </a:xfrm>
+          <a:prstGeom prst="ellipse">
+            <a:avLst/>
+          </a:prstGeom>
+          <a:solidFill>
+            <a:srgbClr val="FF7A45"/>
+          </a:solidFill>
+          <a:ln>
+            <a:noFill/>
+          </a:ln>
+        </p:spPr>
+        <p:style>
+          <a:lnRef idx="1">
+            <a:schemeClr val="accent1"/>
+          </a:lnRef>
+          <a:fillRef idx="3">
+            <a:schemeClr val="accent1"/>
+          </a:fillRef>
+          <a:effectRef idx="2">
+            <a:schemeClr val="accent1"/>
+          </a:effectRef>
+          <a:fontRef idx="minor">
+            <a:schemeClr val="lt1"/>
+          </a:fontRef>
+        </p:style>
+        <p:txBody>
+          <a:bodyPr rtlCol="0" anchor="ctr" wrap="none" lIns="0" rIns="0" tIns="0" bIns="0"/>
+          <a:lstStyle/>
+          <a:p>
+            <a:pPr algn="ctr"/>
+            <a:r>
+              <a:rPr sz="1700" b="1">
+                <a:solidFill>
+                  <a:srgbClr val="FFFFFF"/>
+                </a:solidFill>
+                <a:latin typeface="Segoe UI"/>
+              </a:rPr>
+              <a:t>10</a:t>
+            </a:r>
+          </a:p>
+        </p:txBody>
+      </p:sp>
+      <p:sp>
+        <p:nvSpPr>
+          <p:cNvPr id="7" name="TextBox 6"/>
           <p:cNvSpPr txBox="1"/>
           <p:nvPr/>
         </p:nvSpPr>
         <p:spPr>
           <a:xfrm>
-            <a:off x="502920" y="256032"/>
-            <a:ext cx="9601200" cy="685800"/>
+            <a:off x="1444752" y="384048"/>
+            <a:ext cx="9052560" cy="777240"/>
           </a:xfrm>
           <a:prstGeom prst="rect">
             <a:avLst/>
@@ -4163,17 +4624,17 @@
           <a:noFill/>
         </p:spPr>
         <p:txBody>
-          <a:bodyPr wrap="square">
+          <a:bodyPr wrap="square" anchor="ctr">
             <a:spAutoFit/>
           </a:bodyPr>
           <a:lstStyle/>
           <a:p>
             <a:r>
-              <a:rPr sz="2800" b="1">
+              <a:rPr sz="2500" b="1">
                 <a:solidFill>
                   <a:srgbClr val="FFFFFF"/>
                 </a:solidFill>
-                <a:latin typeface="Calibri"/>
+                <a:latin typeface="Segoe UI Semibold"/>
               </a:rPr>
               <a:t>Enablement — policy and pairing</a:t>
             </a:r>
@@ -4182,17 +4643,19 @@
       </p:sp>
       <p:sp>
         <p:nvSpPr>
-          <p:cNvPr id="7" name="Rounded Rectangle 6"/>
-          <p:cNvSpPr/>
-          <p:nvPr/>
-        </p:nvSpPr>
-        <p:spPr>
-          <a:xfrm>
-            <a:off x="10835640" y="320040"/>
-            <a:ext cx="960120" cy="411480"/>
+          <p:cNvPr id="8" name="Rounded Rectangle 7"/>
+          <p:cNvSpPr/>
+          <p:nvPr/>
+        </p:nvSpPr>
+        <p:spPr>
+          <a:xfrm>
+            <a:off x="10561320" y="457200"/>
+            <a:ext cx="1051560" cy="384048"/>
           </a:xfrm>
           <a:prstGeom prst="roundRect">
-            <a:avLst/>
+            <a:avLst>
+              <a:gd name="adj" fmla="val 50000"/>
+            </a:avLst>
           </a:prstGeom>
           <a:solidFill>
             <a:srgbClr val="FFFFFF"/>
@@ -4216,32 +4679,77 @@
           </a:fontRef>
         </p:style>
         <p:txBody>
+          <a:bodyPr rtlCol="0" anchor="ctr" lIns="0" rIns="0" tIns="0" bIns="0"/>
+          <a:lstStyle/>
+          <a:p>
+            <a:pPr algn="ctr"/>
+            <a:r>
+              <a:rPr sz="1200" b="1">
+                <a:solidFill>
+                  <a:srgbClr val="004C73"/>
+                </a:solidFill>
+                <a:latin typeface="Segoe UI"/>
+              </a:rPr>
+              <a:t>10 / 12</a:t>
+            </a:r>
+          </a:p>
+        </p:txBody>
+      </p:sp>
+      <p:sp>
+        <p:nvSpPr>
+          <p:cNvPr id="9" name="Rounded Rectangle 8"/>
+          <p:cNvSpPr/>
+          <p:nvPr/>
+        </p:nvSpPr>
+        <p:spPr>
+          <a:xfrm>
+            <a:off x="502920" y="1481328"/>
+            <a:ext cx="54864" cy="4709160"/>
+          </a:xfrm>
+          <a:prstGeom prst="roundRect">
+            <a:avLst>
+              <a:gd name="adj" fmla="val 50000"/>
+            </a:avLst>
+          </a:prstGeom>
+          <a:solidFill>
+            <a:srgbClr val="FF7A45"/>
+          </a:solidFill>
+          <a:ln>
+            <a:noFill/>
+          </a:ln>
+        </p:spPr>
+        <p:style>
+          <a:lnRef idx="1">
+            <a:schemeClr val="accent1"/>
+          </a:lnRef>
+          <a:fillRef idx="3">
+            <a:schemeClr val="accent1"/>
+          </a:fillRef>
+          <a:effectRef idx="2">
+            <a:schemeClr val="accent1"/>
+          </a:effectRef>
+          <a:fontRef idx="minor">
+            <a:schemeClr val="lt1"/>
+          </a:fontRef>
+        </p:style>
+        <p:txBody>
           <a:bodyPr rtlCol="0" anchor="ctr"/>
           <a:lstStyle/>
           <a:p>
             <a:pPr algn="ctr"/>
-            <a:r>
-              <a:rPr sz="1100" b="1">
-                <a:solidFill>
-                  <a:srgbClr val="FFFFFF"/>
-                </a:solidFill>
-                <a:latin typeface="Calibri"/>
-              </a:rPr>
-              <a:t>10/12</a:t>
-            </a:r>
-          </a:p>
-        </p:txBody>
-      </p:sp>
-      <p:sp>
-        <p:nvSpPr>
-          <p:cNvPr id="8" name="TextBox 7"/>
+          </a:p>
+        </p:txBody>
+      </p:sp>
+      <p:sp>
+        <p:nvSpPr>
+          <p:cNvPr id="10" name="TextBox 9"/>
           <p:cNvSpPr txBox="1"/>
           <p:nvPr/>
         </p:nvSpPr>
         <p:spPr>
           <a:xfrm>
-            <a:off x="502920" y="1325880"/>
-            <a:ext cx="3977639" cy="5120640"/>
+            <a:off x="749808" y="1417320"/>
+            <a:ext cx="3703320" cy="4892040"/>
           </a:xfrm>
           <a:prstGeom prst="rect">
             <a:avLst/>
@@ -4256,10 +4764,10 @@
           <a:p>
             <a:pPr>
               <a:lnSpc>
-                <a:spcPct val="115000"/>
+                <a:spcPct val="118000"/>
               </a:lnSpc>
               <a:spcAft>
-                <a:spcPts val="1400"/>
+                <a:spcPts val="1600"/>
               </a:spcAft>
             </a:pPr>
             <a:r>
@@ -4267,16 +4775,16 @@
                 <a:solidFill>
                   <a:srgbClr val="0096C7"/>
                 </a:solidFill>
-                <a:latin typeface="Calibri"/>
-              </a:rPr>
-              <a:t>●  </a:t>
+                <a:latin typeface="Segoe UI Semibold"/>
+              </a:rPr>
+              <a:t>01  </a:t>
             </a:r>
             <a:r>
               <a:rPr sz="1500" b="0">
                 <a:solidFill>
                   <a:srgbClr val="334155"/>
                 </a:solidFill>
-                <a:latin typeface="Calibri"/>
+                <a:latin typeface="Segoe UI"/>
               </a:rPr>
               <a:t>Champions pair with skeptics; skeptics own guardrails</a:t>
             </a:r>
@@ -4284,10 +4792,10 @@
           <a:p>
             <a:pPr>
               <a:lnSpc>
-                <a:spcPct val="115000"/>
+                <a:spcPct val="118000"/>
               </a:lnSpc>
               <a:spcAft>
-                <a:spcPts val="1400"/>
+                <a:spcPts val="1600"/>
               </a:spcAft>
             </a:pPr>
             <a:r>
@@ -4295,16 +4803,16 @@
                 <a:solidFill>
                   <a:srgbClr val="0096C7"/>
                 </a:solidFill>
-                <a:latin typeface="Calibri"/>
-              </a:rPr>
-              <a:t>●  </a:t>
+                <a:latin typeface="Segoe UI Semibold"/>
+              </a:rPr>
+              <a:t>02  </a:t>
             </a:r>
             <a:r>
               <a:rPr sz="1500" b="0">
                 <a:solidFill>
                   <a:srgbClr val="334155"/>
                 </a:solidFill>
-                <a:latin typeface="Calibri"/>
+                <a:latin typeface="Segoe UI"/>
               </a:rPr>
               <a:t>EMs get leadership view — is the investment sticking?</a:t>
             </a:r>
@@ -4312,10 +4820,10 @@
           <a:p>
             <a:pPr>
               <a:lnSpc>
-                <a:spcPct val="115000"/>
+                <a:spcPct val="118000"/>
               </a:lnSpc>
               <a:spcAft>
-                <a:spcPts val="1400"/>
+                <a:spcPts val="1600"/>
               </a:spcAft>
             </a:pPr>
             <a:r>
@@ -4323,16 +4831,16 @@
                 <a:solidFill>
                   <a:srgbClr val="0096C7"/>
                 </a:solidFill>
-                <a:latin typeface="Calibri"/>
-              </a:rPr>
-              <a:t>●  </a:t>
+                <a:latin typeface="Segoe UI Semibold"/>
+              </a:rPr>
+              <a:t>03  </a:t>
             </a:r>
             <a:r>
               <a:rPr sz="1500" b="0">
                 <a:solidFill>
                   <a:srgbClr val="334155"/>
                 </a:solidFill>
-                <a:latin typeface="Calibri"/>
+                <a:latin typeface="Segoe UI"/>
               </a:rPr>
               <a:t>Open with blocked secrets and rework cost, not a model bake-off</a:t>
             </a:r>
@@ -4341,14 +4849,57 @@
       </p:sp>
       <p:sp>
         <p:nvSpPr>
-          <p:cNvPr id="9" name="TextBox 8"/>
+          <p:cNvPr id="11" name="Rectangle 10"/>
+          <p:cNvSpPr/>
+          <p:nvPr/>
+        </p:nvSpPr>
+        <p:spPr>
+          <a:xfrm>
+            <a:off x="502920" y="6382512"/>
+            <a:ext cx="11183112" cy="12700"/>
+          </a:xfrm>
+          <a:prstGeom prst="rect">
+            <a:avLst/>
+          </a:prstGeom>
+          <a:solidFill>
+            <a:srgbClr val="D8ECF7"/>
+          </a:solidFill>
+          <a:ln>
+            <a:noFill/>
+          </a:ln>
+        </p:spPr>
+        <p:style>
+          <a:lnRef idx="1">
+            <a:schemeClr val="accent1"/>
+          </a:lnRef>
+          <a:fillRef idx="3">
+            <a:schemeClr val="accent1"/>
+          </a:fillRef>
+          <a:effectRef idx="2">
+            <a:schemeClr val="accent1"/>
+          </a:effectRef>
+          <a:fontRef idx="minor">
+            <a:schemeClr val="lt1"/>
+          </a:fontRef>
+        </p:style>
+        <p:txBody>
+          <a:bodyPr rtlCol="0" anchor="ctr"/>
+          <a:lstStyle/>
+          <a:p>
+            <a:pPr algn="ctr"/>
+          </a:p>
+        </p:txBody>
+      </p:sp>
+      <p:sp>
+        <p:nvSpPr>
+          <p:cNvPr id="12" name="TextBox 11"/>
           <p:cNvSpPr txBox="1"/>
           <p:nvPr/>
         </p:nvSpPr>
         <p:spPr>
           <a:xfrm>
-            <a:off x="502920" y="6446520"/>
-            <a:ext cx="7315200" cy="320040"/>
+            <a:off x="502920" y="6455664"/>
+            <a:ext cx="10652760" cy="292608"/>
           </a:xfrm>
           <a:prstGeom prst="rect">
             <a:avLst/>
@@ -4366,35 +4917,44 @@
                 <a:solidFill>
                   <a:srgbClr val="64748B"/>
                 </a:solidFill>
-                <a:latin typeface="Calibri"/>
-              </a:rPr>
-              <a:t>RCG Principal Engineer · Part 2 · Agentic Development Strategy</a:t>
-            </a:r>
-          </a:p>
-        </p:txBody>
-      </p:sp>
-      <p:sp>
-        <p:nvSpPr>
-          <p:cNvPr id="10" name="Rounded Rectangle 9"/>
-          <p:cNvSpPr/>
-          <p:nvPr/>
-        </p:nvSpPr>
-        <p:spPr>
-          <a:xfrm>
-            <a:off x="4709160" y="1325880"/>
-            <a:ext cx="7178040" cy="4892040"/>
+                <a:latin typeface="Segoe UI"/>
+              </a:rPr>
+              <a:t>RCG Principal Engineer  ·  Part 2  ·  Agentic Development Strategy</a:t>
+            </a:r>
+          </a:p>
+        </p:txBody>
+      </p:sp>
+      <p:sp>
+        <p:nvSpPr>
+          <p:cNvPr id="13" name="Rounded Rectangle 12"/>
+          <p:cNvSpPr/>
+          <p:nvPr/>
+        </p:nvSpPr>
+        <p:spPr>
+          <a:xfrm>
+            <a:off x="4709160" y="1536192"/>
+            <a:ext cx="7178040" cy="4709160"/>
           </a:xfrm>
           <a:prstGeom prst="roundRect">
-            <a:avLst/>
+            <a:avLst>
+              <a:gd name="adj" fmla="val 4500"/>
+            </a:avLst>
           </a:prstGeom>
           <a:solidFill>
             <a:srgbClr val="FFFFFF"/>
           </a:solidFill>
-          <a:ln w="15875">
+          <a:ln w="12700">
             <a:solidFill>
-              <a:srgbClr val="CBE8F5"/>
+              <a:srgbClr val="D8ECF7"/>
             </a:solidFill>
           </a:ln>
+          <a:effectLst>
+            <a:outerShdw blurRad="146304" dist="54864" dir="5400000" rotWithShape="0">
+              <a:srgbClr val="1B3A4B">
+                <a:alpha val="22000"/>
+              </a:srgbClr>
+            </a:outerShdw>
+          </a:effectLst>
         </p:spPr>
         <p:style>
           <a:lnRef idx="1">
@@ -4420,7 +4980,7 @@
       </p:sp>
       <p:pic>
         <p:nvPicPr>
-          <p:cNvPr id="11" name="Picture 10" descr="slide-10-enablement.png"/>
+          <p:cNvPr id="14" name="Picture 13" descr="slide-10-enablement.png"/>
           <p:cNvPicPr>
             <a:picLocks noChangeAspect="1"/>
           </p:cNvPicPr>
@@ -4434,14 +4994,68 @@
         </p:blipFill>
         <p:spPr>
           <a:xfrm>
-            <a:off x="4782312" y="1399032"/>
-            <a:ext cx="7031736" cy="4745736"/>
+            <a:off x="4791456" y="1618488"/>
+            <a:ext cx="7013448" cy="4544568"/>
           </a:xfrm>
           <a:prstGeom prst="rect">
             <a:avLst/>
           </a:prstGeom>
         </p:spPr>
       </p:pic>
+      <p:sp>
+        <p:nvSpPr>
+          <p:cNvPr id="15" name="Rounded Rectangle 14"/>
+          <p:cNvSpPr/>
+          <p:nvPr/>
+        </p:nvSpPr>
+        <p:spPr>
+          <a:xfrm>
+            <a:off x="4873752" y="1353312"/>
+            <a:ext cx="1554480" cy="365760"/>
+          </a:xfrm>
+          <a:prstGeom prst="roundRect">
+            <a:avLst>
+              <a:gd name="adj" fmla="val 50000"/>
+            </a:avLst>
+          </a:prstGeom>
+          <a:solidFill>
+            <a:srgbClr val="004C73"/>
+          </a:solidFill>
+          <a:ln>
+            <a:noFill/>
+          </a:ln>
+        </p:spPr>
+        <p:style>
+          <a:lnRef idx="1">
+            <a:schemeClr val="accent1"/>
+          </a:lnRef>
+          <a:fillRef idx="3">
+            <a:schemeClr val="accent1"/>
+          </a:fillRef>
+          <a:effectRef idx="2">
+            <a:schemeClr val="accent1"/>
+          </a:effectRef>
+          <a:fontRef idx="minor">
+            <a:schemeClr val="lt1"/>
+          </a:fontRef>
+        </p:style>
+        <p:txBody>
+          <a:bodyPr rtlCol="0" anchor="ctr" lIns="0" rIns="0" tIns="0" bIns="0"/>
+          <a:lstStyle/>
+          <a:p>
+            <a:pPr algn="ctr"/>
+            <a:r>
+              <a:rPr sz="1000" b="1">
+                <a:solidFill>
+                  <a:srgbClr val="FFFFFF"/>
+                </a:solidFill>
+                <a:latin typeface="Segoe UI"/>
+              </a:rPr>
+              <a:t>LIVE OUTPUT</a:t>
+            </a:r>
+          </a:p>
+        </p:txBody>
+      </p:sp>
     </p:spTree>
   </p:cSld>
   <p:clrMapOvr>
@@ -4480,10 +5094,10 @@
                 <a:srgbClr val="FFFFFF"/>
               </a:gs>
               <a:gs pos="100000">
-                <a:srgbClr val="E8F4FC"/>
+                <a:srgbClr val="F1F7FB"/>
               </a:gs>
             </a:gsLst>
-            <a:lin scaled="0" ang="15000000"/>
+            <a:lin scaled="0" ang="14700000"/>
           </a:gradFill>
           <a:ln>
             <a:noFill/>
@@ -4513,29 +5127,21 @@
       </p:sp>
       <p:sp>
         <p:nvSpPr>
-          <p:cNvPr id="3" name="Rectangle 2"/>
-          <p:cNvSpPr/>
-          <p:nvPr/>
-        </p:nvSpPr>
-        <p:spPr>
-          <a:xfrm>
-            <a:off x="0" y="5303520"/>
-            <a:ext cx="12191695" cy="1554480"/>
-          </a:xfrm>
-          <a:prstGeom prst="rect">
+          <p:cNvPr id="3" name="Oval 2"/>
+          <p:cNvSpPr/>
+          <p:nvPr/>
+        </p:nvSpPr>
+        <p:spPr>
+          <a:xfrm>
+            <a:off x="9692640" y="4480560"/>
+            <a:ext cx="4754880" cy="4754880"/>
+          </a:xfrm>
+          <a:prstGeom prst="ellipse">
             <a:avLst/>
           </a:prstGeom>
-          <a:gradFill rotWithShape="1">
-            <a:gsLst>
-              <a:gs pos="0">
-                <a:srgbClr val="90E0EF"/>
-              </a:gs>
-              <a:gs pos="100000">
-                <a:srgbClr val="E8F4FC"/>
-              </a:gs>
-            </a:gsLst>
-            <a:lin scaled="0" ang="0"/>
-          </a:gradFill>
+          <a:solidFill>
+            <a:srgbClr val="90E0EF"/>
+          </a:solidFill>
           <a:ln>
             <a:noFill/>
           </a:ln>
@@ -4571,7 +5177,7 @@
         <p:spPr>
           <a:xfrm>
             <a:off x="0" y="0"/>
-            <a:ext cx="12191695" cy="109728"/>
+            <a:ext cx="12191695" cy="73152"/>
           </a:xfrm>
           <a:prstGeom prst="rect">
             <a:avLst/>
@@ -4615,32 +5221,41 @@
       </p:sp>
       <p:sp>
         <p:nvSpPr>
-          <p:cNvPr id="5" name="Rectangle 4"/>
-          <p:cNvSpPr/>
-          <p:nvPr/>
-        </p:nvSpPr>
-        <p:spPr>
-          <a:xfrm>
-            <a:off x="0" y="109728"/>
-            <a:ext cx="12191695" cy="960120"/>
-          </a:xfrm>
-          <a:prstGeom prst="rect">
-            <a:avLst/>
+          <p:cNvPr id="5" name="Rounded Rectangle 4"/>
+          <p:cNvSpPr/>
+          <p:nvPr/>
+        </p:nvSpPr>
+        <p:spPr>
+          <a:xfrm>
+            <a:off x="365760" y="292608"/>
+            <a:ext cx="11460175" cy="932688"/>
+          </a:xfrm>
+          <a:prstGeom prst="roundRect">
+            <a:avLst>
+              <a:gd name="adj" fmla="val 12000"/>
+            </a:avLst>
           </a:prstGeom>
           <a:gradFill rotWithShape="1">
             <a:gsLst>
               <a:gs pos="0">
-                <a:srgbClr val="005F8C"/>
+                <a:srgbClr val="004C73"/>
               </a:gs>
               <a:gs pos="100000">
                 <a:srgbClr val="0096C7"/>
               </a:gs>
             </a:gsLst>
-            <a:lin scaled="0" ang="0"/>
+            <a:lin scaled="0" ang="21120000"/>
           </a:gradFill>
           <a:ln>
             <a:noFill/>
           </a:ln>
+          <a:effectLst>
+            <a:outerShdw blurRad="128016" dist="45720" dir="5400000" rotWithShape="0">
+              <a:srgbClr val="1B3A4B">
+                <a:alpha val="26000"/>
+              </a:srgbClr>
+            </a:outerShdw>
+          </a:effectLst>
         </p:spPr>
         <p:style>
           <a:lnRef idx="1">
@@ -4666,14 +5281,66 @@
       </p:sp>
       <p:sp>
         <p:nvSpPr>
-          <p:cNvPr id="6" name="TextBox 5"/>
+          <p:cNvPr id="6" name="Oval 5"/>
+          <p:cNvSpPr/>
+          <p:nvPr/>
+        </p:nvSpPr>
+        <p:spPr>
+          <a:xfrm>
+            <a:off x="566928" y="438912"/>
+            <a:ext cx="658368" cy="658368"/>
+          </a:xfrm>
+          <a:prstGeom prst="ellipse">
+            <a:avLst/>
+          </a:prstGeom>
+          <a:solidFill>
+            <a:srgbClr val="FF7A45"/>
+          </a:solidFill>
+          <a:ln>
+            <a:noFill/>
+          </a:ln>
+        </p:spPr>
+        <p:style>
+          <a:lnRef idx="1">
+            <a:schemeClr val="accent1"/>
+          </a:lnRef>
+          <a:fillRef idx="3">
+            <a:schemeClr val="accent1"/>
+          </a:fillRef>
+          <a:effectRef idx="2">
+            <a:schemeClr val="accent1"/>
+          </a:effectRef>
+          <a:fontRef idx="minor">
+            <a:schemeClr val="lt1"/>
+          </a:fontRef>
+        </p:style>
+        <p:txBody>
+          <a:bodyPr rtlCol="0" anchor="ctr" wrap="none" lIns="0" rIns="0" tIns="0" bIns="0"/>
+          <a:lstStyle/>
+          <a:p>
+            <a:pPr algn="ctr"/>
+            <a:r>
+              <a:rPr sz="1700" b="1">
+                <a:solidFill>
+                  <a:srgbClr val="FFFFFF"/>
+                </a:solidFill>
+                <a:latin typeface="Segoe UI"/>
+              </a:rPr>
+              <a:t>11</a:t>
+            </a:r>
+          </a:p>
+        </p:txBody>
+      </p:sp>
+      <p:sp>
+        <p:nvSpPr>
+          <p:cNvPr id="7" name="TextBox 6"/>
           <p:cNvSpPr txBox="1"/>
           <p:nvPr/>
         </p:nvSpPr>
         <p:spPr>
           <a:xfrm>
-            <a:off x="502920" y="256032"/>
-            <a:ext cx="9601200" cy="685800"/>
+            <a:off x="1444752" y="384048"/>
+            <a:ext cx="9052560" cy="777240"/>
           </a:xfrm>
           <a:prstGeom prst="rect">
             <a:avLst/>
@@ -4681,17 +5348,17 @@
           <a:noFill/>
         </p:spPr>
         <p:txBody>
-          <a:bodyPr wrap="square">
+          <a:bodyPr wrap="square" anchor="ctr">
             <a:spAutoFit/>
           </a:bodyPr>
           <a:lstStyle/>
           <a:p>
             <a:r>
-              <a:rPr sz="2800" b="1">
+              <a:rPr sz="2500" b="1">
                 <a:solidFill>
                   <a:srgbClr val="FFFFFF"/>
                 </a:solidFill>
-                <a:latin typeface="Calibri"/>
+                <a:latin typeface="Segoe UI Semibold"/>
               </a:rPr>
               <a:t>Risks and kill criteria</a:t>
             </a:r>
@@ -4700,17 +5367,19 @@
       </p:sp>
       <p:sp>
         <p:nvSpPr>
-          <p:cNvPr id="7" name="Rounded Rectangle 6"/>
-          <p:cNvSpPr/>
-          <p:nvPr/>
-        </p:nvSpPr>
-        <p:spPr>
-          <a:xfrm>
-            <a:off x="10835640" y="320040"/>
-            <a:ext cx="960120" cy="411480"/>
+          <p:cNvPr id="8" name="Rounded Rectangle 7"/>
+          <p:cNvSpPr/>
+          <p:nvPr/>
+        </p:nvSpPr>
+        <p:spPr>
+          <a:xfrm>
+            <a:off x="10561320" y="457200"/>
+            <a:ext cx="1051560" cy="384048"/>
           </a:xfrm>
           <a:prstGeom prst="roundRect">
-            <a:avLst/>
+            <a:avLst>
+              <a:gd name="adj" fmla="val 50000"/>
+            </a:avLst>
           </a:prstGeom>
           <a:solidFill>
             <a:srgbClr val="FFFFFF"/>
@@ -4734,32 +5403,77 @@
           </a:fontRef>
         </p:style>
         <p:txBody>
+          <a:bodyPr rtlCol="0" anchor="ctr" lIns="0" rIns="0" tIns="0" bIns="0"/>
+          <a:lstStyle/>
+          <a:p>
+            <a:pPr algn="ctr"/>
+            <a:r>
+              <a:rPr sz="1200" b="1">
+                <a:solidFill>
+                  <a:srgbClr val="004C73"/>
+                </a:solidFill>
+                <a:latin typeface="Segoe UI"/>
+              </a:rPr>
+              <a:t>11 / 12</a:t>
+            </a:r>
+          </a:p>
+        </p:txBody>
+      </p:sp>
+      <p:sp>
+        <p:nvSpPr>
+          <p:cNvPr id="9" name="Rounded Rectangle 8"/>
+          <p:cNvSpPr/>
+          <p:nvPr/>
+        </p:nvSpPr>
+        <p:spPr>
+          <a:xfrm>
+            <a:off x="502920" y="1481328"/>
+            <a:ext cx="54864" cy="4709160"/>
+          </a:xfrm>
+          <a:prstGeom prst="roundRect">
+            <a:avLst>
+              <a:gd name="adj" fmla="val 50000"/>
+            </a:avLst>
+          </a:prstGeom>
+          <a:solidFill>
+            <a:srgbClr val="FF7A45"/>
+          </a:solidFill>
+          <a:ln>
+            <a:noFill/>
+          </a:ln>
+        </p:spPr>
+        <p:style>
+          <a:lnRef idx="1">
+            <a:schemeClr val="accent1"/>
+          </a:lnRef>
+          <a:fillRef idx="3">
+            <a:schemeClr val="accent1"/>
+          </a:fillRef>
+          <a:effectRef idx="2">
+            <a:schemeClr val="accent1"/>
+          </a:effectRef>
+          <a:fontRef idx="minor">
+            <a:schemeClr val="lt1"/>
+          </a:fontRef>
+        </p:style>
+        <p:txBody>
           <a:bodyPr rtlCol="0" anchor="ctr"/>
           <a:lstStyle/>
           <a:p>
             <a:pPr algn="ctr"/>
-            <a:r>
-              <a:rPr sz="1100" b="1">
-                <a:solidFill>
-                  <a:srgbClr val="FFFFFF"/>
-                </a:solidFill>
-                <a:latin typeface="Calibri"/>
-              </a:rPr>
-              <a:t>11/12</a:t>
-            </a:r>
-          </a:p>
-        </p:txBody>
-      </p:sp>
-      <p:sp>
-        <p:nvSpPr>
-          <p:cNvPr id="8" name="TextBox 7"/>
+          </a:p>
+        </p:txBody>
+      </p:sp>
+      <p:sp>
+        <p:nvSpPr>
+          <p:cNvPr id="10" name="TextBox 9"/>
           <p:cNvSpPr txBox="1"/>
           <p:nvPr/>
         </p:nvSpPr>
         <p:spPr>
           <a:xfrm>
-            <a:off x="502920" y="1325880"/>
-            <a:ext cx="3977639" cy="5120640"/>
+            <a:off x="749808" y="1417320"/>
+            <a:ext cx="3703320" cy="4892040"/>
           </a:xfrm>
           <a:prstGeom prst="rect">
             <a:avLst/>
@@ -4774,10 +5488,10 @@
           <a:p>
             <a:pPr>
               <a:lnSpc>
-                <a:spcPct val="115000"/>
+                <a:spcPct val="118000"/>
               </a:lnSpc>
               <a:spcAft>
-                <a:spcPts val="1400"/>
+                <a:spcPts val="1600"/>
               </a:spcAft>
             </a:pPr>
             <a:r>
@@ -4785,16 +5499,16 @@
                 <a:solidFill>
                   <a:srgbClr val="0096C7"/>
                 </a:solidFill>
-                <a:latin typeface="Calibri"/>
-              </a:rPr>
-              <a:t>●  </a:t>
+                <a:latin typeface="Segoe UI Semibold"/>
+              </a:rPr>
+              <a:t>01  </a:t>
             </a:r>
             <a:r>
               <a:rPr sz="1500" b="0">
                 <a:solidFill>
                   <a:srgbClr val="334155"/>
                 </a:solidFill>
-                <a:latin typeface="Calibri"/>
+                <a:latin typeface="Segoe UI"/>
               </a:rPr>
               <a:t>Pause expansion if change-fail rises, secret leaks, review degrades</a:t>
             </a:r>
@@ -4802,10 +5516,10 @@
           <a:p>
             <a:pPr>
               <a:lnSpc>
-                <a:spcPct val="115000"/>
+                <a:spcPct val="118000"/>
               </a:lnSpc>
               <a:spcAft>
-                <a:spcPts val="1400"/>
+                <a:spcPts val="1600"/>
               </a:spcAft>
             </a:pPr>
             <a:r>
@@ -4813,16 +5527,16 @@
                 <a:solidFill>
                   <a:srgbClr val="0096C7"/>
                 </a:solidFill>
-                <a:latin typeface="Calibri"/>
-              </a:rPr>
-              <a:t>●  </a:t>
+                <a:latin typeface="Segoe UI Semibold"/>
+              </a:rPr>
+              <a:t>02  </a:t>
             </a:r>
             <a:r>
               <a:rPr sz="1500" b="0">
                 <a:solidFill>
                   <a:srgbClr val="334155"/>
                 </a:solidFill>
-                <a:latin typeface="Calibri"/>
+                <a:latin typeface="Segoe UI"/>
               </a:rPr>
               <a:t>Kill guest feature if eval fails, hold oversells, or cost cap blown</a:t>
             </a:r>
@@ -4830,10 +5544,10 @@
           <a:p>
             <a:pPr>
               <a:lnSpc>
-                <a:spcPct val="115000"/>
+                <a:spcPct val="118000"/>
               </a:lnSpc>
               <a:spcAft>
-                <a:spcPts val="1400"/>
+                <a:spcPts val="1600"/>
               </a:spcAft>
             </a:pPr>
             <a:r>
@@ -4841,16 +5555,16 @@
                 <a:solidFill>
                   <a:srgbClr val="0096C7"/>
                 </a:solidFill>
-                <a:latin typeface="Calibri"/>
-              </a:rPr>
-              <a:t>●  </a:t>
+                <a:latin typeface="Segoe UI Semibold"/>
+              </a:rPr>
+              <a:t>03  </a:t>
             </a:r>
             <a:r>
               <a:rPr sz="1500" b="0">
                 <a:solidFill>
                   <a:srgbClr val="334155"/>
                 </a:solidFill>
-                <a:latin typeface="Calibri"/>
+                <a:latin typeface="Segoe UI"/>
               </a:rPr>
               <a:t>Trade-off: slower first 30 days for an audit trail you can defend</a:t>
             </a:r>
@@ -4859,14 +5573,57 @@
       </p:sp>
       <p:sp>
         <p:nvSpPr>
-          <p:cNvPr id="9" name="TextBox 8"/>
+          <p:cNvPr id="11" name="Rectangle 10"/>
+          <p:cNvSpPr/>
+          <p:nvPr/>
+        </p:nvSpPr>
+        <p:spPr>
+          <a:xfrm>
+            <a:off x="502920" y="6382512"/>
+            <a:ext cx="11183112" cy="12700"/>
+          </a:xfrm>
+          <a:prstGeom prst="rect">
+            <a:avLst/>
+          </a:prstGeom>
+          <a:solidFill>
+            <a:srgbClr val="D8ECF7"/>
+          </a:solidFill>
+          <a:ln>
+            <a:noFill/>
+          </a:ln>
+        </p:spPr>
+        <p:style>
+          <a:lnRef idx="1">
+            <a:schemeClr val="accent1"/>
+          </a:lnRef>
+          <a:fillRef idx="3">
+            <a:schemeClr val="accent1"/>
+          </a:fillRef>
+          <a:effectRef idx="2">
+            <a:schemeClr val="accent1"/>
+          </a:effectRef>
+          <a:fontRef idx="minor">
+            <a:schemeClr val="lt1"/>
+          </a:fontRef>
+        </p:style>
+        <p:txBody>
+          <a:bodyPr rtlCol="0" anchor="ctr"/>
+          <a:lstStyle/>
+          <a:p>
+            <a:pPr algn="ctr"/>
+          </a:p>
+        </p:txBody>
+      </p:sp>
+      <p:sp>
+        <p:nvSpPr>
+          <p:cNvPr id="12" name="TextBox 11"/>
           <p:cNvSpPr txBox="1"/>
           <p:nvPr/>
         </p:nvSpPr>
         <p:spPr>
           <a:xfrm>
-            <a:off x="502920" y="6446520"/>
-            <a:ext cx="7315200" cy="320040"/>
+            <a:off x="502920" y="6455664"/>
+            <a:ext cx="10652760" cy="292608"/>
           </a:xfrm>
           <a:prstGeom prst="rect">
             <a:avLst/>
@@ -4884,35 +5641,44 @@
                 <a:solidFill>
                   <a:srgbClr val="64748B"/>
                 </a:solidFill>
-                <a:latin typeface="Calibri"/>
-              </a:rPr>
-              <a:t>RCG Principal Engineer · Part 2 · Agentic Development Strategy</a:t>
-            </a:r>
-          </a:p>
-        </p:txBody>
-      </p:sp>
-      <p:sp>
-        <p:nvSpPr>
-          <p:cNvPr id="10" name="Rounded Rectangle 9"/>
-          <p:cNvSpPr/>
-          <p:nvPr/>
-        </p:nvSpPr>
-        <p:spPr>
-          <a:xfrm>
-            <a:off x="4709160" y="1325880"/>
-            <a:ext cx="7178040" cy="4892040"/>
+                <a:latin typeface="Segoe UI"/>
+              </a:rPr>
+              <a:t>RCG Principal Engineer  ·  Part 2  ·  Agentic Development Strategy</a:t>
+            </a:r>
+          </a:p>
+        </p:txBody>
+      </p:sp>
+      <p:sp>
+        <p:nvSpPr>
+          <p:cNvPr id="13" name="Rounded Rectangle 12"/>
+          <p:cNvSpPr/>
+          <p:nvPr/>
+        </p:nvSpPr>
+        <p:spPr>
+          <a:xfrm>
+            <a:off x="4709160" y="1536192"/>
+            <a:ext cx="7178040" cy="4709160"/>
           </a:xfrm>
           <a:prstGeom prst="roundRect">
-            <a:avLst/>
+            <a:avLst>
+              <a:gd name="adj" fmla="val 4500"/>
+            </a:avLst>
           </a:prstGeom>
           <a:solidFill>
             <a:srgbClr val="FFFFFF"/>
           </a:solidFill>
-          <a:ln w="15875">
+          <a:ln w="12700">
             <a:solidFill>
-              <a:srgbClr val="CBE8F5"/>
+              <a:srgbClr val="D8ECF7"/>
             </a:solidFill>
           </a:ln>
+          <a:effectLst>
+            <a:outerShdw blurRad="146304" dist="54864" dir="5400000" rotWithShape="0">
+              <a:srgbClr val="1B3A4B">
+                <a:alpha val="22000"/>
+              </a:srgbClr>
+            </a:outerShdw>
+          </a:effectLst>
         </p:spPr>
         <p:style>
           <a:lnRef idx="1">
@@ -4938,7 +5704,7 @@
       </p:sp>
       <p:pic>
         <p:nvPicPr>
-          <p:cNvPr id="11" name="Picture 10" descr="slide-11-kill-criteria.png"/>
+          <p:cNvPr id="14" name="Picture 13" descr="slide-11-kill-criteria.png"/>
           <p:cNvPicPr>
             <a:picLocks noChangeAspect="1"/>
           </p:cNvPicPr>
@@ -4952,14 +5718,68 @@
         </p:blipFill>
         <p:spPr>
           <a:xfrm>
-            <a:off x="4782312" y="1399032"/>
-            <a:ext cx="7031736" cy="4745736"/>
+            <a:off x="4791456" y="1618488"/>
+            <a:ext cx="7013448" cy="4544568"/>
           </a:xfrm>
           <a:prstGeom prst="rect">
             <a:avLst/>
           </a:prstGeom>
         </p:spPr>
       </p:pic>
+      <p:sp>
+        <p:nvSpPr>
+          <p:cNvPr id="15" name="Rounded Rectangle 14"/>
+          <p:cNvSpPr/>
+          <p:nvPr/>
+        </p:nvSpPr>
+        <p:spPr>
+          <a:xfrm>
+            <a:off x="4873752" y="1353312"/>
+            <a:ext cx="1554480" cy="365760"/>
+          </a:xfrm>
+          <a:prstGeom prst="roundRect">
+            <a:avLst>
+              <a:gd name="adj" fmla="val 50000"/>
+            </a:avLst>
+          </a:prstGeom>
+          <a:solidFill>
+            <a:srgbClr val="004C73"/>
+          </a:solidFill>
+          <a:ln>
+            <a:noFill/>
+          </a:ln>
+        </p:spPr>
+        <p:style>
+          <a:lnRef idx="1">
+            <a:schemeClr val="accent1"/>
+          </a:lnRef>
+          <a:fillRef idx="3">
+            <a:schemeClr val="accent1"/>
+          </a:fillRef>
+          <a:effectRef idx="2">
+            <a:schemeClr val="accent1"/>
+          </a:effectRef>
+          <a:fontRef idx="minor">
+            <a:schemeClr val="lt1"/>
+          </a:fontRef>
+        </p:style>
+        <p:txBody>
+          <a:bodyPr rtlCol="0" anchor="ctr" lIns="0" rIns="0" tIns="0" bIns="0"/>
+          <a:lstStyle/>
+          <a:p>
+            <a:pPr algn="ctr"/>
+            <a:r>
+              <a:rPr sz="1000" b="1">
+                <a:solidFill>
+                  <a:srgbClr val="FFFFFF"/>
+                </a:solidFill>
+                <a:latin typeface="Segoe UI"/>
+              </a:rPr>
+              <a:t>LIVE OUTPUT</a:t>
+            </a:r>
+          </a:p>
+        </p:txBody>
+      </p:sp>
     </p:spTree>
   </p:cSld>
   <p:clrMapOvr>
@@ -4998,10 +5818,10 @@
                 <a:srgbClr val="FFFFFF"/>
               </a:gs>
               <a:gs pos="100000">
-                <a:srgbClr val="E8F4FC"/>
+                <a:srgbClr val="F1F7FB"/>
               </a:gs>
             </a:gsLst>
-            <a:lin scaled="0" ang="15000000"/>
+            <a:lin scaled="0" ang="14700000"/>
           </a:gradFill>
           <a:ln>
             <a:noFill/>
@@ -5031,29 +5851,21 @@
       </p:sp>
       <p:sp>
         <p:nvSpPr>
-          <p:cNvPr id="3" name="Rectangle 2"/>
-          <p:cNvSpPr/>
-          <p:nvPr/>
-        </p:nvSpPr>
-        <p:spPr>
-          <a:xfrm>
-            <a:off x="0" y="5303520"/>
-            <a:ext cx="12191695" cy="1554480"/>
-          </a:xfrm>
-          <a:prstGeom prst="rect">
+          <p:cNvPr id="3" name="Oval 2"/>
+          <p:cNvSpPr/>
+          <p:nvPr/>
+        </p:nvSpPr>
+        <p:spPr>
+          <a:xfrm>
+            <a:off x="9692640" y="4480560"/>
+            <a:ext cx="4754880" cy="4754880"/>
+          </a:xfrm>
+          <a:prstGeom prst="ellipse">
             <a:avLst/>
           </a:prstGeom>
-          <a:gradFill rotWithShape="1">
-            <a:gsLst>
-              <a:gs pos="0">
-                <a:srgbClr val="90E0EF"/>
-              </a:gs>
-              <a:gs pos="100000">
-                <a:srgbClr val="E8F4FC"/>
-              </a:gs>
-            </a:gsLst>
-            <a:lin scaled="0" ang="0"/>
-          </a:gradFill>
+          <a:solidFill>
+            <a:srgbClr val="90E0EF"/>
+          </a:solidFill>
           <a:ln>
             <a:noFill/>
           </a:ln>
@@ -5089,7 +5901,7 @@
         <p:spPr>
           <a:xfrm>
             <a:off x="0" y="0"/>
-            <a:ext cx="12191695" cy="109728"/>
+            <a:ext cx="12191695" cy="73152"/>
           </a:xfrm>
           <a:prstGeom prst="rect">
             <a:avLst/>
@@ -5133,32 +5945,41 @@
       </p:sp>
       <p:sp>
         <p:nvSpPr>
-          <p:cNvPr id="5" name="Rectangle 4"/>
-          <p:cNvSpPr/>
-          <p:nvPr/>
-        </p:nvSpPr>
-        <p:spPr>
-          <a:xfrm>
-            <a:off x="0" y="109728"/>
-            <a:ext cx="12191695" cy="960120"/>
-          </a:xfrm>
-          <a:prstGeom prst="rect">
-            <a:avLst/>
+          <p:cNvPr id="5" name="Rounded Rectangle 4"/>
+          <p:cNvSpPr/>
+          <p:nvPr/>
+        </p:nvSpPr>
+        <p:spPr>
+          <a:xfrm>
+            <a:off x="365760" y="292608"/>
+            <a:ext cx="11460175" cy="932688"/>
+          </a:xfrm>
+          <a:prstGeom prst="roundRect">
+            <a:avLst>
+              <a:gd name="adj" fmla="val 12000"/>
+            </a:avLst>
           </a:prstGeom>
           <a:gradFill rotWithShape="1">
             <a:gsLst>
               <a:gs pos="0">
-                <a:srgbClr val="005F8C"/>
+                <a:srgbClr val="004C73"/>
               </a:gs>
               <a:gs pos="100000">
                 <a:srgbClr val="0096C7"/>
               </a:gs>
             </a:gsLst>
-            <a:lin scaled="0" ang="0"/>
+            <a:lin scaled="0" ang="21120000"/>
           </a:gradFill>
           <a:ln>
             <a:noFill/>
           </a:ln>
+          <a:effectLst>
+            <a:outerShdw blurRad="128016" dist="45720" dir="5400000" rotWithShape="0">
+              <a:srgbClr val="1B3A4B">
+                <a:alpha val="26000"/>
+              </a:srgbClr>
+            </a:outerShdw>
+          </a:effectLst>
         </p:spPr>
         <p:style>
           <a:lnRef idx="1">
@@ -5184,14 +6005,66 @@
       </p:sp>
       <p:sp>
         <p:nvSpPr>
-          <p:cNvPr id="6" name="TextBox 5"/>
+          <p:cNvPr id="6" name="Oval 5"/>
+          <p:cNvSpPr/>
+          <p:nvPr/>
+        </p:nvSpPr>
+        <p:spPr>
+          <a:xfrm>
+            <a:off x="566928" y="438912"/>
+            <a:ext cx="658368" cy="658368"/>
+          </a:xfrm>
+          <a:prstGeom prst="ellipse">
+            <a:avLst/>
+          </a:prstGeom>
+          <a:solidFill>
+            <a:srgbClr val="FF7A45"/>
+          </a:solidFill>
+          <a:ln>
+            <a:noFill/>
+          </a:ln>
+        </p:spPr>
+        <p:style>
+          <a:lnRef idx="1">
+            <a:schemeClr val="accent1"/>
+          </a:lnRef>
+          <a:fillRef idx="3">
+            <a:schemeClr val="accent1"/>
+          </a:fillRef>
+          <a:effectRef idx="2">
+            <a:schemeClr val="accent1"/>
+          </a:effectRef>
+          <a:fontRef idx="minor">
+            <a:schemeClr val="lt1"/>
+          </a:fontRef>
+        </p:style>
+        <p:txBody>
+          <a:bodyPr rtlCol="0" anchor="ctr" wrap="none" lIns="0" rIns="0" tIns="0" bIns="0"/>
+          <a:lstStyle/>
+          <a:p>
+            <a:pPr algn="ctr"/>
+            <a:r>
+              <a:rPr sz="1700" b="1">
+                <a:solidFill>
+                  <a:srgbClr val="FFFFFF"/>
+                </a:solidFill>
+                <a:latin typeface="Segoe UI"/>
+              </a:rPr>
+              <a:t>12</a:t>
+            </a:r>
+          </a:p>
+        </p:txBody>
+      </p:sp>
+      <p:sp>
+        <p:nvSpPr>
+          <p:cNvPr id="7" name="TextBox 6"/>
           <p:cNvSpPr txBox="1"/>
           <p:nvPr/>
         </p:nvSpPr>
         <p:spPr>
           <a:xfrm>
-            <a:off x="502920" y="256032"/>
-            <a:ext cx="9601200" cy="685800"/>
+            <a:off x="1444752" y="384048"/>
+            <a:ext cx="9052560" cy="777240"/>
           </a:xfrm>
           <a:prstGeom prst="rect">
             <a:avLst/>
@@ -5199,17 +6072,17 @@
           <a:noFill/>
         </p:spPr>
         <p:txBody>
-          <a:bodyPr wrap="square">
+          <a:bodyPr wrap="square" anchor="ctr">
             <a:spAutoFit/>
           </a:bodyPr>
           <a:lstStyle/>
           <a:p>
             <a:r>
-              <a:rPr sz="2800" b="1">
+              <a:rPr sz="2500" b="1">
                 <a:solidFill>
                   <a:srgbClr val="FFFFFF"/>
                 </a:solidFill>
-                <a:latin typeface="Calibri"/>
+                <a:latin typeface="Segoe UI Semibold"/>
               </a:rPr>
               <a:t>The ask</a:t>
             </a:r>
@@ -5218,17 +6091,19 @@
       </p:sp>
       <p:sp>
         <p:nvSpPr>
-          <p:cNvPr id="7" name="Rounded Rectangle 6"/>
-          <p:cNvSpPr/>
-          <p:nvPr/>
-        </p:nvSpPr>
-        <p:spPr>
-          <a:xfrm>
-            <a:off x="10835640" y="320040"/>
-            <a:ext cx="960120" cy="411480"/>
+          <p:cNvPr id="8" name="Rounded Rectangle 7"/>
+          <p:cNvSpPr/>
+          <p:nvPr/>
+        </p:nvSpPr>
+        <p:spPr>
+          <a:xfrm>
+            <a:off x="10561320" y="457200"/>
+            <a:ext cx="1051560" cy="384048"/>
           </a:xfrm>
           <a:prstGeom prst="roundRect">
-            <a:avLst/>
+            <a:avLst>
+              <a:gd name="adj" fmla="val 50000"/>
+            </a:avLst>
           </a:prstGeom>
           <a:solidFill>
             <a:srgbClr val="FFFFFF"/>
@@ -5252,32 +6127,77 @@
           </a:fontRef>
         </p:style>
         <p:txBody>
+          <a:bodyPr rtlCol="0" anchor="ctr" lIns="0" rIns="0" tIns="0" bIns="0"/>
+          <a:lstStyle/>
+          <a:p>
+            <a:pPr algn="ctr"/>
+            <a:r>
+              <a:rPr sz="1200" b="1">
+                <a:solidFill>
+                  <a:srgbClr val="004C73"/>
+                </a:solidFill>
+                <a:latin typeface="Segoe UI"/>
+              </a:rPr>
+              <a:t>12 / 12</a:t>
+            </a:r>
+          </a:p>
+        </p:txBody>
+      </p:sp>
+      <p:sp>
+        <p:nvSpPr>
+          <p:cNvPr id="9" name="Rounded Rectangle 8"/>
+          <p:cNvSpPr/>
+          <p:nvPr/>
+        </p:nvSpPr>
+        <p:spPr>
+          <a:xfrm>
+            <a:off x="502920" y="1481328"/>
+            <a:ext cx="54864" cy="4709160"/>
+          </a:xfrm>
+          <a:prstGeom prst="roundRect">
+            <a:avLst>
+              <a:gd name="adj" fmla="val 50000"/>
+            </a:avLst>
+          </a:prstGeom>
+          <a:solidFill>
+            <a:srgbClr val="FF7A45"/>
+          </a:solidFill>
+          <a:ln>
+            <a:noFill/>
+          </a:ln>
+        </p:spPr>
+        <p:style>
+          <a:lnRef idx="1">
+            <a:schemeClr val="accent1"/>
+          </a:lnRef>
+          <a:fillRef idx="3">
+            <a:schemeClr val="accent1"/>
+          </a:fillRef>
+          <a:effectRef idx="2">
+            <a:schemeClr val="accent1"/>
+          </a:effectRef>
+          <a:fontRef idx="minor">
+            <a:schemeClr val="lt1"/>
+          </a:fontRef>
+        </p:style>
+        <p:txBody>
           <a:bodyPr rtlCol="0" anchor="ctr"/>
           <a:lstStyle/>
           <a:p>
             <a:pPr algn="ctr"/>
-            <a:r>
-              <a:rPr sz="1100" b="1">
-                <a:solidFill>
-                  <a:srgbClr val="FFFFFF"/>
-                </a:solidFill>
-                <a:latin typeface="Calibri"/>
-              </a:rPr>
-              <a:t>12/12</a:t>
-            </a:r>
-          </a:p>
-        </p:txBody>
-      </p:sp>
-      <p:sp>
-        <p:nvSpPr>
-          <p:cNvPr id="8" name="TextBox 7"/>
+          </a:p>
+        </p:txBody>
+      </p:sp>
+      <p:sp>
+        <p:nvSpPr>
+          <p:cNvPr id="10" name="TextBox 9"/>
           <p:cNvSpPr txBox="1"/>
           <p:nvPr/>
         </p:nvSpPr>
         <p:spPr>
           <a:xfrm>
-            <a:off x="502920" y="1325880"/>
-            <a:ext cx="3977639" cy="5120640"/>
+            <a:off x="749808" y="1417320"/>
+            <a:ext cx="3703320" cy="4892040"/>
           </a:xfrm>
           <a:prstGeom prst="rect">
             <a:avLst/>
@@ -5292,10 +6212,10 @@
           <a:p>
             <a:pPr>
               <a:lnSpc>
-                <a:spcPct val="115000"/>
+                <a:spcPct val="118000"/>
               </a:lnSpc>
               <a:spcAft>
-                <a:spcPts val="1400"/>
+                <a:spcPts val="1600"/>
               </a:spcAft>
             </a:pPr>
             <a:r>
@@ -5303,16 +6223,16 @@
                 <a:solidFill>
                   <a:srgbClr val="0096C7"/>
                 </a:solidFill>
-                <a:latin typeface="Calibri"/>
-              </a:rPr>
-              <a:t>●  </a:t>
+                <a:latin typeface="Segoe UI Semibold"/>
+              </a:rPr>
+              <a:t>01  </a:t>
             </a:r>
             <a:r>
               <a:rPr sz="1500" b="0">
                 <a:solidFill>
                   <a:srgbClr val="334155"/>
                 </a:solidFill>
-                <a:latin typeface="Calibri"/>
+                <a:latin typeface="Segoe UI"/>
               </a:rPr>
               <a:t>Pilot mandate · Security/Legal/Audit time · Day-90 decision forum</a:t>
             </a:r>
@@ -5320,10 +6240,10 @@
           <a:p>
             <a:pPr>
               <a:lnSpc>
-                <a:spcPct val="115000"/>
+                <a:spcPct val="118000"/>
               </a:lnSpc>
               <a:spcAft>
-                <a:spcPts val="1400"/>
+                <a:spcPts val="1600"/>
               </a:spcAft>
             </a:pPr>
             <a:r>
@@ -5331,16 +6251,16 @@
                 <a:solidFill>
                   <a:srgbClr val="0096C7"/>
                 </a:solidFill>
-                <a:latin typeface="Calibri"/>
-              </a:rPr>
-              <a:t>●  </a:t>
+                <a:latin typeface="Segoe UI Semibold"/>
+              </a:rPr>
+              <a:t>02  </a:t>
             </a:r>
             <a:r>
               <a:rPr sz="1500" b="0">
                 <a:solidFill>
                   <a:srgbClr val="334155"/>
                 </a:solidFill>
-                <a:latin typeface="Calibri"/>
+                <a:latin typeface="Segoe UI"/>
               </a:rPr>
               <a:t>Transferable asset: operating model, not the cruise planner</a:t>
             </a:r>
@@ -5349,14 +6269,57 @@
       </p:sp>
       <p:sp>
         <p:nvSpPr>
-          <p:cNvPr id="9" name="TextBox 8"/>
+          <p:cNvPr id="11" name="Rectangle 10"/>
+          <p:cNvSpPr/>
+          <p:nvPr/>
+        </p:nvSpPr>
+        <p:spPr>
+          <a:xfrm>
+            <a:off x="502920" y="6382512"/>
+            <a:ext cx="11183112" cy="12700"/>
+          </a:xfrm>
+          <a:prstGeom prst="rect">
+            <a:avLst/>
+          </a:prstGeom>
+          <a:solidFill>
+            <a:srgbClr val="D8ECF7"/>
+          </a:solidFill>
+          <a:ln>
+            <a:noFill/>
+          </a:ln>
+        </p:spPr>
+        <p:style>
+          <a:lnRef idx="1">
+            <a:schemeClr val="accent1"/>
+          </a:lnRef>
+          <a:fillRef idx="3">
+            <a:schemeClr val="accent1"/>
+          </a:fillRef>
+          <a:effectRef idx="2">
+            <a:schemeClr val="accent1"/>
+          </a:effectRef>
+          <a:fontRef idx="minor">
+            <a:schemeClr val="lt1"/>
+          </a:fontRef>
+        </p:style>
+        <p:txBody>
+          <a:bodyPr rtlCol="0" anchor="ctr"/>
+          <a:lstStyle/>
+          <a:p>
+            <a:pPr algn="ctr"/>
+          </a:p>
+        </p:txBody>
+      </p:sp>
+      <p:sp>
+        <p:nvSpPr>
+          <p:cNvPr id="12" name="TextBox 11"/>
           <p:cNvSpPr txBox="1"/>
           <p:nvPr/>
         </p:nvSpPr>
         <p:spPr>
           <a:xfrm>
-            <a:off x="502920" y="6446520"/>
-            <a:ext cx="7315200" cy="320040"/>
+            <a:off x="502920" y="6455664"/>
+            <a:ext cx="10652760" cy="292608"/>
           </a:xfrm>
           <a:prstGeom prst="rect">
             <a:avLst/>
@@ -5374,35 +6337,44 @@
                 <a:solidFill>
                   <a:srgbClr val="64748B"/>
                 </a:solidFill>
-                <a:latin typeface="Calibri"/>
-              </a:rPr>
-              <a:t>RCG Principal Engineer · Part 2 · Agentic Development Strategy</a:t>
-            </a:r>
-          </a:p>
-        </p:txBody>
-      </p:sp>
-      <p:sp>
-        <p:nvSpPr>
-          <p:cNvPr id="10" name="Rounded Rectangle 9"/>
-          <p:cNvSpPr/>
-          <p:nvPr/>
-        </p:nvSpPr>
-        <p:spPr>
-          <a:xfrm>
-            <a:off x="4709160" y="1325880"/>
-            <a:ext cx="7178040" cy="4892040"/>
+                <a:latin typeface="Segoe UI"/>
+              </a:rPr>
+              <a:t>RCG Principal Engineer  ·  Part 2  ·  Agentic Development Strategy</a:t>
+            </a:r>
+          </a:p>
+        </p:txBody>
+      </p:sp>
+      <p:sp>
+        <p:nvSpPr>
+          <p:cNvPr id="13" name="Rounded Rectangle 12"/>
+          <p:cNvSpPr/>
+          <p:nvPr/>
+        </p:nvSpPr>
+        <p:spPr>
+          <a:xfrm>
+            <a:off x="4709160" y="1536192"/>
+            <a:ext cx="7178040" cy="4709160"/>
           </a:xfrm>
           <a:prstGeom prst="roundRect">
-            <a:avLst/>
+            <a:avLst>
+              <a:gd name="adj" fmla="val 4500"/>
+            </a:avLst>
           </a:prstGeom>
           <a:solidFill>
             <a:srgbClr val="FFFFFF"/>
           </a:solidFill>
-          <a:ln w="15875">
+          <a:ln w="12700">
             <a:solidFill>
-              <a:srgbClr val="CBE8F5"/>
+              <a:srgbClr val="D8ECF7"/>
             </a:solidFill>
           </a:ln>
+          <a:effectLst>
+            <a:outerShdw blurRad="146304" dist="54864" dir="5400000" rotWithShape="0">
+              <a:srgbClr val="1B3A4B">
+                <a:alpha val="22000"/>
+              </a:srgbClr>
+            </a:outerShdw>
+          </a:effectLst>
         </p:spPr>
         <p:style>
           <a:lnRef idx="1">
@@ -5428,7 +6400,7 @@
       </p:sp>
       <p:pic>
         <p:nvPicPr>
-          <p:cNvPr id="11" name="Picture 10" descr="slide-12-ask.png"/>
+          <p:cNvPr id="14" name="Picture 13" descr="slide-12-ask.png"/>
           <p:cNvPicPr>
             <a:picLocks noChangeAspect="1"/>
           </p:cNvPicPr>
@@ -5442,14 +6414,68 @@
         </p:blipFill>
         <p:spPr>
           <a:xfrm>
-            <a:off x="4782312" y="1399032"/>
-            <a:ext cx="7031736" cy="4745736"/>
+            <a:off x="4791456" y="1618488"/>
+            <a:ext cx="7013448" cy="4544568"/>
           </a:xfrm>
           <a:prstGeom prst="rect">
             <a:avLst/>
           </a:prstGeom>
         </p:spPr>
       </p:pic>
+      <p:sp>
+        <p:nvSpPr>
+          <p:cNvPr id="15" name="Rounded Rectangle 14"/>
+          <p:cNvSpPr/>
+          <p:nvPr/>
+        </p:nvSpPr>
+        <p:spPr>
+          <a:xfrm>
+            <a:off x="4873752" y="1353312"/>
+            <a:ext cx="1554480" cy="365760"/>
+          </a:xfrm>
+          <a:prstGeom prst="roundRect">
+            <a:avLst>
+              <a:gd name="adj" fmla="val 50000"/>
+            </a:avLst>
+          </a:prstGeom>
+          <a:solidFill>
+            <a:srgbClr val="004C73"/>
+          </a:solidFill>
+          <a:ln>
+            <a:noFill/>
+          </a:ln>
+        </p:spPr>
+        <p:style>
+          <a:lnRef idx="1">
+            <a:schemeClr val="accent1"/>
+          </a:lnRef>
+          <a:fillRef idx="3">
+            <a:schemeClr val="accent1"/>
+          </a:fillRef>
+          <a:effectRef idx="2">
+            <a:schemeClr val="accent1"/>
+          </a:effectRef>
+          <a:fontRef idx="minor">
+            <a:schemeClr val="lt1"/>
+          </a:fontRef>
+        </p:style>
+        <p:txBody>
+          <a:bodyPr rtlCol="0" anchor="ctr" lIns="0" rIns="0" tIns="0" bIns="0"/>
+          <a:lstStyle/>
+          <a:p>
+            <a:pPr algn="ctr"/>
+            <a:r>
+              <a:rPr sz="1000" b="1">
+                <a:solidFill>
+                  <a:srgbClr val="FFFFFF"/>
+                </a:solidFill>
+                <a:latin typeface="Segoe UI"/>
+              </a:rPr>
+              <a:t>LIVE OUTPUT</a:t>
+            </a:r>
+          </a:p>
+        </p:txBody>
+      </p:sp>
     </p:spTree>
   </p:cSld>
   <p:clrMapOvr>
@@ -5488,10 +6514,10 @@
                 <a:srgbClr val="FFFFFF"/>
               </a:gs>
               <a:gs pos="100000">
-                <a:srgbClr val="E8F4FC"/>
+                <a:srgbClr val="F1F7FB"/>
               </a:gs>
             </a:gsLst>
-            <a:lin scaled="0" ang="15000000"/>
+            <a:lin scaled="0" ang="14700000"/>
           </a:gradFill>
           <a:ln>
             <a:noFill/>
@@ -5521,29 +6547,21 @@
       </p:sp>
       <p:sp>
         <p:nvSpPr>
-          <p:cNvPr id="3" name="Rectangle 2"/>
-          <p:cNvSpPr/>
-          <p:nvPr/>
-        </p:nvSpPr>
-        <p:spPr>
-          <a:xfrm>
-            <a:off x="0" y="5303520"/>
-            <a:ext cx="12191695" cy="1554480"/>
-          </a:xfrm>
-          <a:prstGeom prst="rect">
+          <p:cNvPr id="3" name="Oval 2"/>
+          <p:cNvSpPr/>
+          <p:nvPr/>
+        </p:nvSpPr>
+        <p:spPr>
+          <a:xfrm>
+            <a:off x="9692640" y="4480560"/>
+            <a:ext cx="4754880" cy="4754880"/>
+          </a:xfrm>
+          <a:prstGeom prst="ellipse">
             <a:avLst/>
           </a:prstGeom>
-          <a:gradFill rotWithShape="1">
-            <a:gsLst>
-              <a:gs pos="0">
-                <a:srgbClr val="90E0EF"/>
-              </a:gs>
-              <a:gs pos="100000">
-                <a:srgbClr val="E8F4FC"/>
-              </a:gs>
-            </a:gsLst>
-            <a:lin scaled="0" ang="0"/>
-          </a:gradFill>
+          <a:solidFill>
+            <a:srgbClr val="90E0EF"/>
+          </a:solidFill>
           <a:ln>
             <a:noFill/>
           </a:ln>
@@ -5579,7 +6597,7 @@
         <p:spPr>
           <a:xfrm>
             <a:off x="0" y="0"/>
-            <a:ext cx="12191695" cy="109728"/>
+            <a:ext cx="12191695" cy="73152"/>
           </a:xfrm>
           <a:prstGeom prst="rect">
             <a:avLst/>
@@ -5623,32 +6641,41 @@
       </p:sp>
       <p:sp>
         <p:nvSpPr>
-          <p:cNvPr id="5" name="Rectangle 4"/>
-          <p:cNvSpPr/>
-          <p:nvPr/>
-        </p:nvSpPr>
-        <p:spPr>
-          <a:xfrm>
-            <a:off x="0" y="109728"/>
-            <a:ext cx="12191695" cy="960120"/>
-          </a:xfrm>
-          <a:prstGeom prst="rect">
-            <a:avLst/>
+          <p:cNvPr id="5" name="Rounded Rectangle 4"/>
+          <p:cNvSpPr/>
+          <p:nvPr/>
+        </p:nvSpPr>
+        <p:spPr>
+          <a:xfrm>
+            <a:off x="365760" y="292608"/>
+            <a:ext cx="11460175" cy="932688"/>
+          </a:xfrm>
+          <a:prstGeom prst="roundRect">
+            <a:avLst>
+              <a:gd name="adj" fmla="val 12000"/>
+            </a:avLst>
           </a:prstGeom>
           <a:gradFill rotWithShape="1">
             <a:gsLst>
               <a:gs pos="0">
-                <a:srgbClr val="005F8C"/>
+                <a:srgbClr val="004C73"/>
               </a:gs>
               <a:gs pos="100000">
                 <a:srgbClr val="0096C7"/>
               </a:gs>
             </a:gsLst>
-            <a:lin scaled="0" ang="0"/>
+            <a:lin scaled="0" ang="21120000"/>
           </a:gradFill>
           <a:ln>
             <a:noFill/>
           </a:ln>
+          <a:effectLst>
+            <a:outerShdw blurRad="128016" dist="45720" dir="5400000" rotWithShape="0">
+              <a:srgbClr val="1B3A4B">
+                <a:alpha val="26000"/>
+              </a:srgbClr>
+            </a:outerShdw>
+          </a:effectLst>
         </p:spPr>
         <p:style>
           <a:lnRef idx="1">
@@ -5674,14 +6701,66 @@
       </p:sp>
       <p:sp>
         <p:nvSpPr>
-          <p:cNvPr id="6" name="TextBox 5"/>
+          <p:cNvPr id="6" name="Oval 5"/>
+          <p:cNvSpPr/>
+          <p:nvPr/>
+        </p:nvSpPr>
+        <p:spPr>
+          <a:xfrm>
+            <a:off x="566928" y="438912"/>
+            <a:ext cx="658368" cy="658368"/>
+          </a:xfrm>
+          <a:prstGeom prst="ellipse">
+            <a:avLst/>
+          </a:prstGeom>
+          <a:solidFill>
+            <a:srgbClr val="FF7A45"/>
+          </a:solidFill>
+          <a:ln>
+            <a:noFill/>
+          </a:ln>
+        </p:spPr>
+        <p:style>
+          <a:lnRef idx="1">
+            <a:schemeClr val="accent1"/>
+          </a:lnRef>
+          <a:fillRef idx="3">
+            <a:schemeClr val="accent1"/>
+          </a:fillRef>
+          <a:effectRef idx="2">
+            <a:schemeClr val="accent1"/>
+          </a:effectRef>
+          <a:fontRef idx="minor">
+            <a:schemeClr val="lt1"/>
+          </a:fontRef>
+        </p:style>
+        <p:txBody>
+          <a:bodyPr rtlCol="0" anchor="ctr" wrap="none" lIns="0" rIns="0" tIns="0" bIns="0"/>
+          <a:lstStyle/>
+          <a:p>
+            <a:pPr algn="ctr"/>
+            <a:r>
+              <a:rPr sz="2000" b="1">
+                <a:solidFill>
+                  <a:srgbClr val="FFFFFF"/>
+                </a:solidFill>
+                <a:latin typeface="Segoe UI"/>
+              </a:rPr>
+              <a:t>1</a:t>
+            </a:r>
+          </a:p>
+        </p:txBody>
+      </p:sp>
+      <p:sp>
+        <p:nvSpPr>
+          <p:cNvPr id="7" name="TextBox 6"/>
           <p:cNvSpPr txBox="1"/>
           <p:nvPr/>
         </p:nvSpPr>
         <p:spPr>
           <a:xfrm>
-            <a:off x="502920" y="256032"/>
-            <a:ext cx="9601200" cy="685800"/>
+            <a:off x="1444752" y="384048"/>
+            <a:ext cx="9052560" cy="777240"/>
           </a:xfrm>
           <a:prstGeom prst="rect">
             <a:avLst/>
@@ -5689,17 +6768,17 @@
           <a:noFill/>
         </p:spPr>
         <p:txBody>
-          <a:bodyPr wrap="square">
+          <a:bodyPr wrap="square" anchor="ctr">
             <a:spAutoFit/>
           </a:bodyPr>
           <a:lstStyle/>
           <a:p>
             <a:r>
-              <a:rPr sz="2800" b="1">
+              <a:rPr sz="2500" b="1">
                 <a:solidFill>
                   <a:srgbClr val="FFFFFF"/>
                 </a:solidFill>
-                <a:latin typeface="Calibri"/>
+                <a:latin typeface="Segoe UI Semibold"/>
               </a:rPr>
               <a:t>Thesis — agents are untrusted workers</a:t>
             </a:r>
@@ -5708,17 +6787,19 @@
       </p:sp>
       <p:sp>
         <p:nvSpPr>
-          <p:cNvPr id="7" name="Rounded Rectangle 6"/>
-          <p:cNvSpPr/>
-          <p:nvPr/>
-        </p:nvSpPr>
-        <p:spPr>
-          <a:xfrm>
-            <a:off x="10835640" y="320040"/>
-            <a:ext cx="960120" cy="411480"/>
+          <p:cNvPr id="8" name="Rounded Rectangle 7"/>
+          <p:cNvSpPr/>
+          <p:nvPr/>
+        </p:nvSpPr>
+        <p:spPr>
+          <a:xfrm>
+            <a:off x="10561320" y="457200"/>
+            <a:ext cx="1051560" cy="384048"/>
           </a:xfrm>
           <a:prstGeom prst="roundRect">
-            <a:avLst/>
+            <a:avLst>
+              <a:gd name="adj" fmla="val 50000"/>
+            </a:avLst>
           </a:prstGeom>
           <a:solidFill>
             <a:srgbClr val="FFFFFF"/>
@@ -5742,32 +6823,77 @@
           </a:fontRef>
         </p:style>
         <p:txBody>
+          <a:bodyPr rtlCol="0" anchor="ctr" lIns="0" rIns="0" tIns="0" bIns="0"/>
+          <a:lstStyle/>
+          <a:p>
+            <a:pPr algn="ctr"/>
+            <a:r>
+              <a:rPr sz="1200" b="1">
+                <a:solidFill>
+                  <a:srgbClr val="004C73"/>
+                </a:solidFill>
+                <a:latin typeface="Segoe UI"/>
+              </a:rPr>
+              <a:t>1 / 12</a:t>
+            </a:r>
+          </a:p>
+        </p:txBody>
+      </p:sp>
+      <p:sp>
+        <p:nvSpPr>
+          <p:cNvPr id="9" name="Rounded Rectangle 8"/>
+          <p:cNvSpPr/>
+          <p:nvPr/>
+        </p:nvSpPr>
+        <p:spPr>
+          <a:xfrm>
+            <a:off x="502920" y="1481328"/>
+            <a:ext cx="54864" cy="4709160"/>
+          </a:xfrm>
+          <a:prstGeom prst="roundRect">
+            <a:avLst>
+              <a:gd name="adj" fmla="val 50000"/>
+            </a:avLst>
+          </a:prstGeom>
+          <a:solidFill>
+            <a:srgbClr val="FF7A45"/>
+          </a:solidFill>
+          <a:ln>
+            <a:noFill/>
+          </a:ln>
+        </p:spPr>
+        <p:style>
+          <a:lnRef idx="1">
+            <a:schemeClr val="accent1"/>
+          </a:lnRef>
+          <a:fillRef idx="3">
+            <a:schemeClr val="accent1"/>
+          </a:fillRef>
+          <a:effectRef idx="2">
+            <a:schemeClr val="accent1"/>
+          </a:effectRef>
+          <a:fontRef idx="minor">
+            <a:schemeClr val="lt1"/>
+          </a:fontRef>
+        </p:style>
+        <p:txBody>
           <a:bodyPr rtlCol="0" anchor="ctr"/>
           <a:lstStyle/>
           <a:p>
             <a:pPr algn="ctr"/>
-            <a:r>
-              <a:rPr sz="1100" b="1">
-                <a:solidFill>
-                  <a:srgbClr val="FFFFFF"/>
-                </a:solidFill>
-                <a:latin typeface="Calibri"/>
-              </a:rPr>
-              <a:t>1/12</a:t>
-            </a:r>
-          </a:p>
-        </p:txBody>
-      </p:sp>
-      <p:sp>
-        <p:nvSpPr>
-          <p:cNvPr id="8" name="TextBox 7"/>
+          </a:p>
+        </p:txBody>
+      </p:sp>
+      <p:sp>
+        <p:nvSpPr>
+          <p:cNvPr id="10" name="TextBox 9"/>
           <p:cNvSpPr txBox="1"/>
           <p:nvPr/>
         </p:nvSpPr>
         <p:spPr>
           <a:xfrm>
-            <a:off x="502920" y="1325880"/>
-            <a:ext cx="3977639" cy="5120640"/>
+            <a:off x="749808" y="1417320"/>
+            <a:ext cx="3703320" cy="4892040"/>
           </a:xfrm>
           <a:prstGeom prst="rect">
             <a:avLst/>
@@ -5782,10 +6908,10 @@
           <a:p>
             <a:pPr>
               <a:lnSpc>
-                <a:spcPct val="115000"/>
+                <a:spcPct val="118000"/>
               </a:lnSpc>
               <a:spcAft>
-                <a:spcPts val="1400"/>
+                <a:spcPts val="1600"/>
               </a:spcAft>
             </a:pPr>
             <a:r>
@@ -5793,16 +6919,16 @@
                 <a:solidFill>
                   <a:srgbClr val="0096C7"/>
                 </a:solidFill>
-                <a:latin typeface="Calibri"/>
-              </a:rPr>
-              <a:t>●  </a:t>
+                <a:latin typeface="Segoe UI Semibold"/>
+              </a:rPr>
+              <a:t>01  </a:t>
             </a:r>
             <a:r>
               <a:rPr sz="1500" b="0">
                 <a:solidFill>
                   <a:srgbClr val="334155"/>
                 </a:solidFill>
-                <a:latin typeface="Calibri"/>
+                <a:latin typeface="Segoe UI"/>
               </a:rPr>
               <a:t>Model interprets; deterministic tools own every commerce value</a:t>
             </a:r>
@@ -5810,10 +6936,10 @@
           <a:p>
             <a:pPr>
               <a:lnSpc>
-                <a:spcPct val="115000"/>
+                <a:spcPct val="118000"/>
               </a:lnSpc>
               <a:spcAft>
-                <a:spcPts val="1400"/>
+                <a:spcPts val="1600"/>
               </a:spcAft>
             </a:pPr>
             <a:r>
@@ -5821,16 +6947,16 @@
                 <a:solidFill>
                   <a:srgbClr val="0096C7"/>
                 </a:solidFill>
-                <a:latin typeface="Calibri"/>
-              </a:rPr>
-              <a:t>●  </a:t>
+                <a:latin typeface="Segoe UI Semibold"/>
+              </a:rPr>
+              <a:t>02  </a:t>
             </a:r>
             <a:r>
               <a:rPr sz="1500" b="0">
                 <a:solidFill>
                   <a:srgbClr val="334155"/>
                 </a:solidFill>
-                <a:latin typeface="Calibri"/>
+                <a:latin typeface="Segoe UI"/>
               </a:rPr>
               <a:t>Nothing touches money, inventory, or controls without human authority</a:t>
             </a:r>
@@ -5838,10 +6964,10 @@
           <a:p>
             <a:pPr>
               <a:lnSpc>
-                <a:spcPct val="115000"/>
+                <a:spcPct val="118000"/>
               </a:lnSpc>
               <a:spcAft>
-                <a:spcPts val="1400"/>
+                <a:spcPts val="1600"/>
               </a:spcAft>
             </a:pPr>
             <a:r>
@@ -5849,16 +6975,16 @@
                 <a:solidFill>
                   <a:srgbClr val="0096C7"/>
                 </a:solidFill>
-                <a:latin typeface="Calibri"/>
-              </a:rPr>
-              <a:t>●  </a:t>
+                <a:latin typeface="Segoe UI Semibold"/>
+              </a:rPr>
+              <a:t>03  </a:t>
             </a:r>
             <a:r>
               <a:rPr sz="1500" b="0">
                 <a:solidFill>
                   <a:srgbClr val="334155"/>
                 </a:solidFill>
-                <a:latin typeface="Calibri"/>
+                <a:latin typeface="Segoe UI"/>
               </a:rPr>
               <a:t>Assumption: existing React/AEM/GraphQL/AWS + SOX process stays</a:t>
             </a:r>
@@ -5867,14 +6993,57 @@
       </p:sp>
       <p:sp>
         <p:nvSpPr>
-          <p:cNvPr id="9" name="TextBox 8"/>
+          <p:cNvPr id="11" name="Rectangle 10"/>
+          <p:cNvSpPr/>
+          <p:nvPr/>
+        </p:nvSpPr>
+        <p:spPr>
+          <a:xfrm>
+            <a:off x="502920" y="6382512"/>
+            <a:ext cx="11183112" cy="12700"/>
+          </a:xfrm>
+          <a:prstGeom prst="rect">
+            <a:avLst/>
+          </a:prstGeom>
+          <a:solidFill>
+            <a:srgbClr val="D8ECF7"/>
+          </a:solidFill>
+          <a:ln>
+            <a:noFill/>
+          </a:ln>
+        </p:spPr>
+        <p:style>
+          <a:lnRef idx="1">
+            <a:schemeClr val="accent1"/>
+          </a:lnRef>
+          <a:fillRef idx="3">
+            <a:schemeClr val="accent1"/>
+          </a:fillRef>
+          <a:effectRef idx="2">
+            <a:schemeClr val="accent1"/>
+          </a:effectRef>
+          <a:fontRef idx="minor">
+            <a:schemeClr val="lt1"/>
+          </a:fontRef>
+        </p:style>
+        <p:txBody>
+          <a:bodyPr rtlCol="0" anchor="ctr"/>
+          <a:lstStyle/>
+          <a:p>
+            <a:pPr algn="ctr"/>
+          </a:p>
+        </p:txBody>
+      </p:sp>
+      <p:sp>
+        <p:nvSpPr>
+          <p:cNvPr id="12" name="TextBox 11"/>
           <p:cNvSpPr txBox="1"/>
           <p:nvPr/>
         </p:nvSpPr>
         <p:spPr>
           <a:xfrm>
-            <a:off x="502920" y="6446520"/>
-            <a:ext cx="7315200" cy="320040"/>
+            <a:off x="502920" y="6455664"/>
+            <a:ext cx="10652760" cy="292608"/>
           </a:xfrm>
           <a:prstGeom prst="rect">
             <a:avLst/>
@@ -5892,35 +7061,44 @@
                 <a:solidFill>
                   <a:srgbClr val="64748B"/>
                 </a:solidFill>
-                <a:latin typeface="Calibri"/>
-              </a:rPr>
-              <a:t>RCG Principal Engineer · Part 2 · Agentic Development Strategy</a:t>
-            </a:r>
-          </a:p>
-        </p:txBody>
-      </p:sp>
-      <p:sp>
-        <p:nvSpPr>
-          <p:cNvPr id="10" name="Rounded Rectangle 9"/>
-          <p:cNvSpPr/>
-          <p:nvPr/>
-        </p:nvSpPr>
-        <p:spPr>
-          <a:xfrm>
-            <a:off x="4709160" y="1325880"/>
-            <a:ext cx="7178040" cy="4892040"/>
+                <a:latin typeface="Segoe UI"/>
+              </a:rPr>
+              <a:t>RCG Principal Engineer  ·  Part 2  ·  Agentic Development Strategy</a:t>
+            </a:r>
+          </a:p>
+        </p:txBody>
+      </p:sp>
+      <p:sp>
+        <p:nvSpPr>
+          <p:cNvPr id="13" name="Rounded Rectangle 12"/>
+          <p:cNvSpPr/>
+          <p:nvPr/>
+        </p:nvSpPr>
+        <p:spPr>
+          <a:xfrm>
+            <a:off x="4709160" y="1536192"/>
+            <a:ext cx="7178040" cy="4709160"/>
           </a:xfrm>
           <a:prstGeom prst="roundRect">
-            <a:avLst/>
+            <a:avLst>
+              <a:gd name="adj" fmla="val 4500"/>
+            </a:avLst>
           </a:prstGeom>
           <a:solidFill>
             <a:srgbClr val="FFFFFF"/>
           </a:solidFill>
-          <a:ln w="15875">
+          <a:ln w="12700">
             <a:solidFill>
-              <a:srgbClr val="CBE8F5"/>
+              <a:srgbClr val="D8ECF7"/>
             </a:solidFill>
           </a:ln>
+          <a:effectLst>
+            <a:outerShdw blurRad="146304" dist="54864" dir="5400000" rotWithShape="0">
+              <a:srgbClr val="1B3A4B">
+                <a:alpha val="22000"/>
+              </a:srgbClr>
+            </a:outerShdw>
+          </a:effectLst>
         </p:spPr>
         <p:style>
           <a:lnRef idx="1">
@@ -5946,7 +7124,7 @@
       </p:sp>
       <p:pic>
         <p:nvPicPr>
-          <p:cNvPr id="11" name="Picture 10" descr="slide-01-cruise-plan.png"/>
+          <p:cNvPr id="14" name="Picture 13" descr="slide-01-cruise-plan.png"/>
           <p:cNvPicPr>
             <a:picLocks noChangeAspect="1"/>
           </p:cNvPicPr>
@@ -5960,14 +7138,68 @@
         </p:blipFill>
         <p:spPr>
           <a:xfrm>
-            <a:off x="4782312" y="1399032"/>
-            <a:ext cx="7031736" cy="4745736"/>
+            <a:off x="4791456" y="1618488"/>
+            <a:ext cx="7013448" cy="4544568"/>
           </a:xfrm>
           <a:prstGeom prst="rect">
             <a:avLst/>
           </a:prstGeom>
         </p:spPr>
       </p:pic>
+      <p:sp>
+        <p:nvSpPr>
+          <p:cNvPr id="15" name="Rounded Rectangle 14"/>
+          <p:cNvSpPr/>
+          <p:nvPr/>
+        </p:nvSpPr>
+        <p:spPr>
+          <a:xfrm>
+            <a:off x="4873752" y="1353312"/>
+            <a:ext cx="1554480" cy="365760"/>
+          </a:xfrm>
+          <a:prstGeom prst="roundRect">
+            <a:avLst>
+              <a:gd name="adj" fmla="val 50000"/>
+            </a:avLst>
+          </a:prstGeom>
+          <a:solidFill>
+            <a:srgbClr val="004C73"/>
+          </a:solidFill>
+          <a:ln>
+            <a:noFill/>
+          </a:ln>
+        </p:spPr>
+        <p:style>
+          <a:lnRef idx="1">
+            <a:schemeClr val="accent1"/>
+          </a:lnRef>
+          <a:fillRef idx="3">
+            <a:schemeClr val="accent1"/>
+          </a:fillRef>
+          <a:effectRef idx="2">
+            <a:schemeClr val="accent1"/>
+          </a:effectRef>
+          <a:fontRef idx="minor">
+            <a:schemeClr val="lt1"/>
+          </a:fontRef>
+        </p:style>
+        <p:txBody>
+          <a:bodyPr rtlCol="0" anchor="ctr" lIns="0" rIns="0" tIns="0" bIns="0"/>
+          <a:lstStyle/>
+          <a:p>
+            <a:pPr algn="ctr"/>
+            <a:r>
+              <a:rPr sz="1000" b="1">
+                <a:solidFill>
+                  <a:srgbClr val="FFFFFF"/>
+                </a:solidFill>
+                <a:latin typeface="Segoe UI"/>
+              </a:rPr>
+              <a:t>LIVE OUTPUT</a:t>
+            </a:r>
+          </a:p>
+        </p:txBody>
+      </p:sp>
     </p:spTree>
   </p:cSld>
   <p:clrMapOvr>
@@ -6006,10 +7238,10 @@
                 <a:srgbClr val="FFFFFF"/>
               </a:gs>
               <a:gs pos="100000">
-                <a:srgbClr val="E8F4FC"/>
+                <a:srgbClr val="F1F7FB"/>
               </a:gs>
             </a:gsLst>
-            <a:lin scaled="0" ang="15000000"/>
+            <a:lin scaled="0" ang="14700000"/>
           </a:gradFill>
           <a:ln>
             <a:noFill/>
@@ -6039,29 +7271,21 @@
       </p:sp>
       <p:sp>
         <p:nvSpPr>
-          <p:cNvPr id="3" name="Rectangle 2"/>
-          <p:cNvSpPr/>
-          <p:nvPr/>
-        </p:nvSpPr>
-        <p:spPr>
-          <a:xfrm>
-            <a:off x="0" y="5303520"/>
-            <a:ext cx="12191695" cy="1554480"/>
-          </a:xfrm>
-          <a:prstGeom prst="rect">
+          <p:cNvPr id="3" name="Oval 2"/>
+          <p:cNvSpPr/>
+          <p:nvPr/>
+        </p:nvSpPr>
+        <p:spPr>
+          <a:xfrm>
+            <a:off x="9692640" y="4480560"/>
+            <a:ext cx="4754880" cy="4754880"/>
+          </a:xfrm>
+          <a:prstGeom prst="ellipse">
             <a:avLst/>
           </a:prstGeom>
-          <a:gradFill rotWithShape="1">
-            <a:gsLst>
-              <a:gs pos="0">
-                <a:srgbClr val="90E0EF"/>
-              </a:gs>
-              <a:gs pos="100000">
-                <a:srgbClr val="E8F4FC"/>
-              </a:gs>
-            </a:gsLst>
-            <a:lin scaled="0" ang="0"/>
-          </a:gradFill>
+          <a:solidFill>
+            <a:srgbClr val="90E0EF"/>
+          </a:solidFill>
           <a:ln>
             <a:noFill/>
           </a:ln>
@@ -6097,7 +7321,7 @@
         <p:spPr>
           <a:xfrm>
             <a:off x="0" y="0"/>
-            <a:ext cx="12191695" cy="109728"/>
+            <a:ext cx="12191695" cy="73152"/>
           </a:xfrm>
           <a:prstGeom prst="rect">
             <a:avLst/>
@@ -6141,32 +7365,41 @@
       </p:sp>
       <p:sp>
         <p:nvSpPr>
-          <p:cNvPr id="5" name="Rectangle 4"/>
-          <p:cNvSpPr/>
-          <p:nvPr/>
-        </p:nvSpPr>
-        <p:spPr>
-          <a:xfrm>
-            <a:off x="0" y="109728"/>
-            <a:ext cx="12191695" cy="960120"/>
-          </a:xfrm>
-          <a:prstGeom prst="rect">
-            <a:avLst/>
+          <p:cNvPr id="5" name="Rounded Rectangle 4"/>
+          <p:cNvSpPr/>
+          <p:nvPr/>
+        </p:nvSpPr>
+        <p:spPr>
+          <a:xfrm>
+            <a:off x="365760" y="292608"/>
+            <a:ext cx="11460175" cy="932688"/>
+          </a:xfrm>
+          <a:prstGeom prst="roundRect">
+            <a:avLst>
+              <a:gd name="adj" fmla="val 12000"/>
+            </a:avLst>
           </a:prstGeom>
           <a:gradFill rotWithShape="1">
             <a:gsLst>
               <a:gs pos="0">
-                <a:srgbClr val="005F8C"/>
+                <a:srgbClr val="004C73"/>
               </a:gs>
               <a:gs pos="100000">
                 <a:srgbClr val="0096C7"/>
               </a:gs>
             </a:gsLst>
-            <a:lin scaled="0" ang="0"/>
+            <a:lin scaled="0" ang="21120000"/>
           </a:gradFill>
           <a:ln>
             <a:noFill/>
           </a:ln>
+          <a:effectLst>
+            <a:outerShdw blurRad="128016" dist="45720" dir="5400000" rotWithShape="0">
+              <a:srgbClr val="1B3A4B">
+                <a:alpha val="26000"/>
+              </a:srgbClr>
+            </a:outerShdw>
+          </a:effectLst>
         </p:spPr>
         <p:style>
           <a:lnRef idx="1">
@@ -6192,14 +7425,66 @@
       </p:sp>
       <p:sp>
         <p:nvSpPr>
-          <p:cNvPr id="6" name="TextBox 5"/>
+          <p:cNvPr id="6" name="Oval 5"/>
+          <p:cNvSpPr/>
+          <p:nvPr/>
+        </p:nvSpPr>
+        <p:spPr>
+          <a:xfrm>
+            <a:off x="566928" y="438912"/>
+            <a:ext cx="658368" cy="658368"/>
+          </a:xfrm>
+          <a:prstGeom prst="ellipse">
+            <a:avLst/>
+          </a:prstGeom>
+          <a:solidFill>
+            <a:srgbClr val="FF7A45"/>
+          </a:solidFill>
+          <a:ln>
+            <a:noFill/>
+          </a:ln>
+        </p:spPr>
+        <p:style>
+          <a:lnRef idx="1">
+            <a:schemeClr val="accent1"/>
+          </a:lnRef>
+          <a:fillRef idx="3">
+            <a:schemeClr val="accent1"/>
+          </a:fillRef>
+          <a:effectRef idx="2">
+            <a:schemeClr val="accent1"/>
+          </a:effectRef>
+          <a:fontRef idx="minor">
+            <a:schemeClr val="lt1"/>
+          </a:fontRef>
+        </p:style>
+        <p:txBody>
+          <a:bodyPr rtlCol="0" anchor="ctr" wrap="none" lIns="0" rIns="0" tIns="0" bIns="0"/>
+          <a:lstStyle/>
+          <a:p>
+            <a:pPr algn="ctr"/>
+            <a:r>
+              <a:rPr sz="2000" b="1">
+                <a:solidFill>
+                  <a:srgbClr val="FFFFFF"/>
+                </a:solidFill>
+                <a:latin typeface="Segoe UI"/>
+              </a:rPr>
+              <a:t>2</a:t>
+            </a:r>
+          </a:p>
+        </p:txBody>
+      </p:sp>
+      <p:sp>
+        <p:nvSpPr>
+          <p:cNvPr id="7" name="TextBox 6"/>
           <p:cNvSpPr txBox="1"/>
           <p:nvPr/>
         </p:nvSpPr>
         <p:spPr>
           <a:xfrm>
-            <a:off x="502920" y="256032"/>
-            <a:ext cx="9601200" cy="685800"/>
+            <a:off x="1444752" y="384048"/>
+            <a:ext cx="9052560" cy="777240"/>
           </a:xfrm>
           <a:prstGeom prst="rect">
             <a:avLst/>
@@ -6207,17 +7492,17 @@
           <a:noFill/>
         </p:spPr>
         <p:txBody>
-          <a:bodyPr wrap="square">
+          <a:bodyPr wrap="square" anchor="ctr">
             <a:spAutoFit/>
           </a:bodyPr>
           <a:lstStyle/>
           <a:p>
             <a:r>
-              <a:rPr sz="2800" b="1">
+              <a:rPr sz="2500" b="1">
                 <a:solidFill>
                   <a:srgbClr val="FFFFFF"/>
                 </a:solidFill>
-                <a:latin typeface="Calibri"/>
+                <a:latin typeface="Segoe UI Semibold"/>
               </a:rPr>
               <a:t>Why now — govern or explain in an audit</a:t>
             </a:r>
@@ -6226,17 +7511,19 @@
       </p:sp>
       <p:sp>
         <p:nvSpPr>
-          <p:cNvPr id="7" name="Rounded Rectangle 6"/>
-          <p:cNvSpPr/>
-          <p:nvPr/>
-        </p:nvSpPr>
-        <p:spPr>
-          <a:xfrm>
-            <a:off x="10835640" y="320040"/>
-            <a:ext cx="960120" cy="411480"/>
+          <p:cNvPr id="8" name="Rounded Rectangle 7"/>
+          <p:cNvSpPr/>
+          <p:nvPr/>
+        </p:nvSpPr>
+        <p:spPr>
+          <a:xfrm>
+            <a:off x="10561320" y="457200"/>
+            <a:ext cx="1051560" cy="384048"/>
           </a:xfrm>
           <a:prstGeom prst="roundRect">
-            <a:avLst/>
+            <a:avLst>
+              <a:gd name="adj" fmla="val 50000"/>
+            </a:avLst>
           </a:prstGeom>
           <a:solidFill>
             <a:srgbClr val="FFFFFF"/>
@@ -6260,32 +7547,77 @@
           </a:fontRef>
         </p:style>
         <p:txBody>
+          <a:bodyPr rtlCol="0" anchor="ctr" lIns="0" rIns="0" tIns="0" bIns="0"/>
+          <a:lstStyle/>
+          <a:p>
+            <a:pPr algn="ctr"/>
+            <a:r>
+              <a:rPr sz="1200" b="1">
+                <a:solidFill>
+                  <a:srgbClr val="004C73"/>
+                </a:solidFill>
+                <a:latin typeface="Segoe UI"/>
+              </a:rPr>
+              <a:t>2 / 12</a:t>
+            </a:r>
+          </a:p>
+        </p:txBody>
+      </p:sp>
+      <p:sp>
+        <p:nvSpPr>
+          <p:cNvPr id="9" name="Rounded Rectangle 8"/>
+          <p:cNvSpPr/>
+          <p:nvPr/>
+        </p:nvSpPr>
+        <p:spPr>
+          <a:xfrm>
+            <a:off x="502920" y="1481328"/>
+            <a:ext cx="54864" cy="4709160"/>
+          </a:xfrm>
+          <a:prstGeom prst="roundRect">
+            <a:avLst>
+              <a:gd name="adj" fmla="val 50000"/>
+            </a:avLst>
+          </a:prstGeom>
+          <a:solidFill>
+            <a:srgbClr val="FF7A45"/>
+          </a:solidFill>
+          <a:ln>
+            <a:noFill/>
+          </a:ln>
+        </p:spPr>
+        <p:style>
+          <a:lnRef idx="1">
+            <a:schemeClr val="accent1"/>
+          </a:lnRef>
+          <a:fillRef idx="3">
+            <a:schemeClr val="accent1"/>
+          </a:fillRef>
+          <a:effectRef idx="2">
+            <a:schemeClr val="accent1"/>
+          </a:effectRef>
+          <a:fontRef idx="minor">
+            <a:schemeClr val="lt1"/>
+          </a:fontRef>
+        </p:style>
+        <p:txBody>
           <a:bodyPr rtlCol="0" anchor="ctr"/>
           <a:lstStyle/>
           <a:p>
             <a:pPr algn="ctr"/>
-            <a:r>
-              <a:rPr sz="1100" b="1">
-                <a:solidFill>
-                  <a:srgbClr val="FFFFFF"/>
-                </a:solidFill>
-                <a:latin typeface="Calibri"/>
-              </a:rPr>
-              <a:t>2/12</a:t>
-            </a:r>
-          </a:p>
-        </p:txBody>
-      </p:sp>
-      <p:sp>
-        <p:nvSpPr>
-          <p:cNvPr id="8" name="TextBox 7"/>
+          </a:p>
+        </p:txBody>
+      </p:sp>
+      <p:sp>
+        <p:nvSpPr>
+          <p:cNvPr id="10" name="TextBox 9"/>
           <p:cNvSpPr txBox="1"/>
           <p:nvPr/>
         </p:nvSpPr>
         <p:spPr>
           <a:xfrm>
-            <a:off x="502920" y="1325880"/>
-            <a:ext cx="3977639" cy="5120640"/>
+            <a:off x="749808" y="1417320"/>
+            <a:ext cx="3703320" cy="4892040"/>
           </a:xfrm>
           <a:prstGeom prst="rect">
             <a:avLst/>
@@ -6300,10 +7632,10 @@
           <a:p>
             <a:pPr>
               <a:lnSpc>
-                <a:spcPct val="115000"/>
+                <a:spcPct val="118000"/>
               </a:lnSpc>
               <a:spcAft>
-                <a:spcPts val="1400"/>
+                <a:spcPts val="1600"/>
               </a:spcAft>
             </a:pPr>
             <a:r>
@@ -6311,16 +7643,16 @@
                 <a:solidFill>
                   <a:srgbClr val="0096C7"/>
                 </a:solidFill>
-                <a:latin typeface="Calibri"/>
-              </a:rPr>
-              <a:t>●  </a:t>
+                <a:latin typeface="Segoe UI Semibold"/>
+              </a:rPr>
+              <a:t>01  </a:t>
             </a:r>
             <a:r>
               <a:rPr sz="1500" b="0">
                 <a:solidFill>
                   <a:srgbClr val="334155"/>
                 </a:solidFill>
-                <a:latin typeface="Calibri"/>
+                <a:latin typeface="Segoe UI"/>
               </a:rPr>
               <a:t>Assistants are already in use — uneven skill, no shared record</a:t>
             </a:r>
@@ -6328,10 +7660,10 @@
           <a:p>
             <a:pPr>
               <a:lnSpc>
-                <a:spcPct val="115000"/>
+                <a:spcPct val="118000"/>
               </a:lnSpc>
               <a:spcAft>
-                <a:spcPts val="1400"/>
+                <a:spcPts val="1600"/>
               </a:spcAft>
             </a:pPr>
             <a:r>
@@ -6339,16 +7671,16 @@
                 <a:solidFill>
                   <a:srgbClr val="0096C7"/>
                 </a:solidFill>
-                <a:latin typeface="Calibri"/>
-              </a:rPr>
-              <a:t>●  </a:t>
+                <a:latin typeface="Segoe UI Semibold"/>
+              </a:rPr>
+              <a:t>02  </a:t>
             </a:r>
             <a:r>
               <a:rPr sz="1500" b="0">
                 <a:solidFill>
                   <a:srgbClr val="334155"/>
                 </a:solidFill>
-                <a:latin typeface="Calibri"/>
+                <a:latin typeface="Segoe UI"/>
               </a:rPr>
               <a:t>Shadow AI is a compliance risk before it is a quality risk</a:t>
             </a:r>
@@ -6356,10 +7688,10 @@
           <a:p>
             <a:pPr>
               <a:lnSpc>
-                <a:spcPct val="115000"/>
+                <a:spcPct val="118000"/>
               </a:lnSpc>
               <a:spcAft>
-                <a:spcPts val="1400"/>
+                <a:spcPts val="1600"/>
               </a:spcAft>
             </a:pPr>
             <a:r>
@@ -6367,16 +7699,16 @@
                 <a:solidFill>
                   <a:srgbClr val="0096C7"/>
                 </a:solidFill>
-                <a:latin typeface="Calibri"/>
-              </a:rPr>
-              <a:t>●  </a:t>
+                <a:latin typeface="Segoe UI Semibold"/>
+              </a:rPr>
+              <a:t>03  </a:t>
             </a:r>
             <a:r>
               <a:rPr sz="1500" b="0">
                 <a:solidFill>
                   <a:srgbClr val="334155"/>
                 </a:solidFill>
-                <a:latin typeface="Calibri"/>
+                <a:latin typeface="Segoe UI"/>
               </a:rPr>
               <a:t>First 30 days buy control and a baseline, not raw velocity</a:t>
             </a:r>
@@ -6385,14 +7717,57 @@
       </p:sp>
       <p:sp>
         <p:nvSpPr>
-          <p:cNvPr id="9" name="TextBox 8"/>
+          <p:cNvPr id="11" name="Rectangle 10"/>
+          <p:cNvSpPr/>
+          <p:nvPr/>
+        </p:nvSpPr>
+        <p:spPr>
+          <a:xfrm>
+            <a:off x="502920" y="6382512"/>
+            <a:ext cx="11183112" cy="12700"/>
+          </a:xfrm>
+          <a:prstGeom prst="rect">
+            <a:avLst/>
+          </a:prstGeom>
+          <a:solidFill>
+            <a:srgbClr val="D8ECF7"/>
+          </a:solidFill>
+          <a:ln>
+            <a:noFill/>
+          </a:ln>
+        </p:spPr>
+        <p:style>
+          <a:lnRef idx="1">
+            <a:schemeClr val="accent1"/>
+          </a:lnRef>
+          <a:fillRef idx="3">
+            <a:schemeClr val="accent1"/>
+          </a:fillRef>
+          <a:effectRef idx="2">
+            <a:schemeClr val="accent1"/>
+          </a:effectRef>
+          <a:fontRef idx="minor">
+            <a:schemeClr val="lt1"/>
+          </a:fontRef>
+        </p:style>
+        <p:txBody>
+          <a:bodyPr rtlCol="0" anchor="ctr"/>
+          <a:lstStyle/>
+          <a:p>
+            <a:pPr algn="ctr"/>
+          </a:p>
+        </p:txBody>
+      </p:sp>
+      <p:sp>
+        <p:nvSpPr>
+          <p:cNvPr id="12" name="TextBox 11"/>
           <p:cNvSpPr txBox="1"/>
           <p:nvPr/>
         </p:nvSpPr>
         <p:spPr>
           <a:xfrm>
-            <a:off x="502920" y="6446520"/>
-            <a:ext cx="7315200" cy="320040"/>
+            <a:off x="502920" y="6455664"/>
+            <a:ext cx="10652760" cy="292608"/>
           </a:xfrm>
           <a:prstGeom prst="rect">
             <a:avLst/>
@@ -6410,35 +7785,44 @@
                 <a:solidFill>
                   <a:srgbClr val="64748B"/>
                 </a:solidFill>
-                <a:latin typeface="Calibri"/>
-              </a:rPr>
-              <a:t>RCG Principal Engineer · Part 2 · Agentic Development Strategy</a:t>
-            </a:r>
-          </a:p>
-        </p:txBody>
-      </p:sp>
-      <p:sp>
-        <p:nvSpPr>
-          <p:cNvPr id="10" name="Rounded Rectangle 9"/>
-          <p:cNvSpPr/>
-          <p:nvPr/>
-        </p:nvSpPr>
-        <p:spPr>
-          <a:xfrm>
-            <a:off x="4709160" y="1325880"/>
-            <a:ext cx="7178040" cy="4892040"/>
+                <a:latin typeface="Segoe UI"/>
+              </a:rPr>
+              <a:t>RCG Principal Engineer  ·  Part 2  ·  Agentic Development Strategy</a:t>
+            </a:r>
+          </a:p>
+        </p:txBody>
+      </p:sp>
+      <p:sp>
+        <p:nvSpPr>
+          <p:cNvPr id="13" name="Rounded Rectangle 12"/>
+          <p:cNvSpPr/>
+          <p:nvPr/>
+        </p:nvSpPr>
+        <p:spPr>
+          <a:xfrm>
+            <a:off x="4709160" y="1536192"/>
+            <a:ext cx="7178040" cy="4709160"/>
           </a:xfrm>
           <a:prstGeom prst="roundRect">
-            <a:avLst/>
+            <a:avLst>
+              <a:gd name="adj" fmla="val 4500"/>
+            </a:avLst>
           </a:prstGeom>
           <a:solidFill>
             <a:srgbClr val="FFFFFF"/>
           </a:solidFill>
-          <a:ln w="15875">
+          <a:ln w="12700">
             <a:solidFill>
-              <a:srgbClr val="CBE8F5"/>
+              <a:srgbClr val="D8ECF7"/>
             </a:solidFill>
           </a:ln>
+          <a:effectLst>
+            <a:outerShdw blurRad="146304" dist="54864" dir="5400000" rotWithShape="0">
+              <a:srgbClr val="1B3A4B">
+                <a:alpha val="22000"/>
+              </a:srgbClr>
+            </a:outerShdw>
+          </a:effectLst>
         </p:spPr>
         <p:style>
           <a:lnRef idx="1">
@@ -6464,7 +7848,7 @@
       </p:sp>
       <p:pic>
         <p:nvPicPr>
-          <p:cNvPr id="11" name="Picture 10" descr="slide-02-credential-block.png"/>
+          <p:cNvPr id="14" name="Picture 13" descr="slide-02-credential-block.png"/>
           <p:cNvPicPr>
             <a:picLocks noChangeAspect="1"/>
           </p:cNvPicPr>
@@ -6478,14 +7862,68 @@
         </p:blipFill>
         <p:spPr>
           <a:xfrm>
-            <a:off x="4782312" y="1399032"/>
-            <a:ext cx="7031736" cy="4745736"/>
+            <a:off x="4791456" y="1618488"/>
+            <a:ext cx="7013448" cy="4544568"/>
           </a:xfrm>
           <a:prstGeom prst="rect">
             <a:avLst/>
           </a:prstGeom>
         </p:spPr>
       </p:pic>
+      <p:sp>
+        <p:nvSpPr>
+          <p:cNvPr id="15" name="Rounded Rectangle 14"/>
+          <p:cNvSpPr/>
+          <p:nvPr/>
+        </p:nvSpPr>
+        <p:spPr>
+          <a:xfrm>
+            <a:off x="4873752" y="1353312"/>
+            <a:ext cx="1554480" cy="365760"/>
+          </a:xfrm>
+          <a:prstGeom prst="roundRect">
+            <a:avLst>
+              <a:gd name="adj" fmla="val 50000"/>
+            </a:avLst>
+          </a:prstGeom>
+          <a:solidFill>
+            <a:srgbClr val="004C73"/>
+          </a:solidFill>
+          <a:ln>
+            <a:noFill/>
+          </a:ln>
+        </p:spPr>
+        <p:style>
+          <a:lnRef idx="1">
+            <a:schemeClr val="accent1"/>
+          </a:lnRef>
+          <a:fillRef idx="3">
+            <a:schemeClr val="accent1"/>
+          </a:fillRef>
+          <a:effectRef idx="2">
+            <a:schemeClr val="accent1"/>
+          </a:effectRef>
+          <a:fontRef idx="minor">
+            <a:schemeClr val="lt1"/>
+          </a:fontRef>
+        </p:style>
+        <p:txBody>
+          <a:bodyPr rtlCol="0" anchor="ctr" lIns="0" rIns="0" tIns="0" bIns="0"/>
+          <a:lstStyle/>
+          <a:p>
+            <a:pPr algn="ctr"/>
+            <a:r>
+              <a:rPr sz="1000" b="1">
+                <a:solidFill>
+                  <a:srgbClr val="FFFFFF"/>
+                </a:solidFill>
+                <a:latin typeface="Segoe UI"/>
+              </a:rPr>
+              <a:t>LIVE OUTPUT</a:t>
+            </a:r>
+          </a:p>
+        </p:txBody>
+      </p:sp>
     </p:spTree>
   </p:cSld>
   <p:clrMapOvr>
@@ -6524,10 +7962,10 @@
                 <a:srgbClr val="FFFFFF"/>
               </a:gs>
               <a:gs pos="100000">
-                <a:srgbClr val="E8F4FC"/>
+                <a:srgbClr val="F1F7FB"/>
               </a:gs>
             </a:gsLst>
-            <a:lin scaled="0" ang="15000000"/>
+            <a:lin scaled="0" ang="14700000"/>
           </a:gradFill>
           <a:ln>
             <a:noFill/>
@@ -6557,29 +7995,21 @@
       </p:sp>
       <p:sp>
         <p:nvSpPr>
-          <p:cNvPr id="3" name="Rectangle 2"/>
-          <p:cNvSpPr/>
-          <p:nvPr/>
-        </p:nvSpPr>
-        <p:spPr>
-          <a:xfrm>
-            <a:off x="0" y="5303520"/>
-            <a:ext cx="12191695" cy="1554480"/>
-          </a:xfrm>
-          <a:prstGeom prst="rect">
+          <p:cNvPr id="3" name="Oval 2"/>
+          <p:cNvSpPr/>
+          <p:nvPr/>
+        </p:nvSpPr>
+        <p:spPr>
+          <a:xfrm>
+            <a:off x="9692640" y="4480560"/>
+            <a:ext cx="4754880" cy="4754880"/>
+          </a:xfrm>
+          <a:prstGeom prst="ellipse">
             <a:avLst/>
           </a:prstGeom>
-          <a:gradFill rotWithShape="1">
-            <a:gsLst>
-              <a:gs pos="0">
-                <a:srgbClr val="90E0EF"/>
-              </a:gs>
-              <a:gs pos="100000">
-                <a:srgbClr val="E8F4FC"/>
-              </a:gs>
-            </a:gsLst>
-            <a:lin scaled="0" ang="0"/>
-          </a:gradFill>
+          <a:solidFill>
+            <a:srgbClr val="90E0EF"/>
+          </a:solidFill>
           <a:ln>
             <a:noFill/>
           </a:ln>
@@ -6615,7 +8045,7 @@
         <p:spPr>
           <a:xfrm>
             <a:off x="0" y="0"/>
-            <a:ext cx="12191695" cy="109728"/>
+            <a:ext cx="12191695" cy="73152"/>
           </a:xfrm>
           <a:prstGeom prst="rect">
             <a:avLst/>
@@ -6659,32 +8089,41 @@
       </p:sp>
       <p:sp>
         <p:nvSpPr>
-          <p:cNvPr id="5" name="Rectangle 4"/>
-          <p:cNvSpPr/>
-          <p:nvPr/>
-        </p:nvSpPr>
-        <p:spPr>
-          <a:xfrm>
-            <a:off x="0" y="109728"/>
-            <a:ext cx="12191695" cy="960120"/>
-          </a:xfrm>
-          <a:prstGeom prst="rect">
-            <a:avLst/>
+          <p:cNvPr id="5" name="Rounded Rectangle 4"/>
+          <p:cNvSpPr/>
+          <p:nvPr/>
+        </p:nvSpPr>
+        <p:spPr>
+          <a:xfrm>
+            <a:off x="365760" y="292608"/>
+            <a:ext cx="11460175" cy="932688"/>
+          </a:xfrm>
+          <a:prstGeom prst="roundRect">
+            <a:avLst>
+              <a:gd name="adj" fmla="val 12000"/>
+            </a:avLst>
           </a:prstGeom>
           <a:gradFill rotWithShape="1">
             <a:gsLst>
               <a:gs pos="0">
-                <a:srgbClr val="005F8C"/>
+                <a:srgbClr val="004C73"/>
               </a:gs>
               <a:gs pos="100000">
                 <a:srgbClr val="0096C7"/>
               </a:gs>
             </a:gsLst>
-            <a:lin scaled="0" ang="0"/>
+            <a:lin scaled="0" ang="21120000"/>
           </a:gradFill>
           <a:ln>
             <a:noFill/>
           </a:ln>
+          <a:effectLst>
+            <a:outerShdw blurRad="128016" dist="45720" dir="5400000" rotWithShape="0">
+              <a:srgbClr val="1B3A4B">
+                <a:alpha val="26000"/>
+              </a:srgbClr>
+            </a:outerShdw>
+          </a:effectLst>
         </p:spPr>
         <p:style>
           <a:lnRef idx="1">
@@ -6710,14 +8149,66 @@
       </p:sp>
       <p:sp>
         <p:nvSpPr>
-          <p:cNvPr id="6" name="TextBox 5"/>
+          <p:cNvPr id="6" name="Oval 5"/>
+          <p:cNvSpPr/>
+          <p:nvPr/>
+        </p:nvSpPr>
+        <p:spPr>
+          <a:xfrm>
+            <a:off x="566928" y="438912"/>
+            <a:ext cx="658368" cy="658368"/>
+          </a:xfrm>
+          <a:prstGeom prst="ellipse">
+            <a:avLst/>
+          </a:prstGeom>
+          <a:solidFill>
+            <a:srgbClr val="FF7A45"/>
+          </a:solidFill>
+          <a:ln>
+            <a:noFill/>
+          </a:ln>
+        </p:spPr>
+        <p:style>
+          <a:lnRef idx="1">
+            <a:schemeClr val="accent1"/>
+          </a:lnRef>
+          <a:fillRef idx="3">
+            <a:schemeClr val="accent1"/>
+          </a:fillRef>
+          <a:effectRef idx="2">
+            <a:schemeClr val="accent1"/>
+          </a:effectRef>
+          <a:fontRef idx="minor">
+            <a:schemeClr val="lt1"/>
+          </a:fontRef>
+        </p:style>
+        <p:txBody>
+          <a:bodyPr rtlCol="0" anchor="ctr" wrap="none" lIns="0" rIns="0" tIns="0" bIns="0"/>
+          <a:lstStyle/>
+          <a:p>
+            <a:pPr algn="ctr"/>
+            <a:r>
+              <a:rPr sz="2000" b="1">
+                <a:solidFill>
+                  <a:srgbClr val="FFFFFF"/>
+                </a:solidFill>
+                <a:latin typeface="Segoe UI"/>
+              </a:rPr>
+              <a:t>3</a:t>
+            </a:r>
+          </a:p>
+        </p:txBody>
+      </p:sp>
+      <p:sp>
+        <p:nvSpPr>
+          <p:cNvPr id="7" name="TextBox 6"/>
           <p:cNvSpPr txBox="1"/>
           <p:nvPr/>
         </p:nvSpPr>
         <p:spPr>
           <a:xfrm>
-            <a:off x="502920" y="256032"/>
-            <a:ext cx="9601200" cy="685800"/>
+            <a:off x="1444752" y="384048"/>
+            <a:ext cx="9052560" cy="777240"/>
           </a:xfrm>
           <a:prstGeom prst="rect">
             <a:avLst/>
@@ -6725,17 +8216,17 @@
           <a:noFill/>
         </p:spPr>
         <p:txBody>
-          <a:bodyPr wrap="square">
+          <a:bodyPr wrap="square" anchor="ctr">
             <a:spAutoFit/>
           </a:bodyPr>
           <a:lstStyle/>
           <a:p>
             <a:r>
-              <a:rPr sz="2800" b="1">
+              <a:rPr sz="2500" b="1">
                 <a:solidFill>
                   <a:srgbClr val="FFFFFF"/>
                 </a:solidFill>
-                <a:latin typeface="Calibri"/>
+                <a:latin typeface="Segoe UI Semibold"/>
               </a:rPr>
               <a:t>Tooling standard — policy layer, not editor mandate</a:t>
             </a:r>
@@ -6744,17 +8235,19 @@
       </p:sp>
       <p:sp>
         <p:nvSpPr>
-          <p:cNvPr id="7" name="Rounded Rectangle 6"/>
-          <p:cNvSpPr/>
-          <p:nvPr/>
-        </p:nvSpPr>
-        <p:spPr>
-          <a:xfrm>
-            <a:off x="10835640" y="320040"/>
-            <a:ext cx="960120" cy="411480"/>
+          <p:cNvPr id="8" name="Rounded Rectangle 7"/>
+          <p:cNvSpPr/>
+          <p:nvPr/>
+        </p:nvSpPr>
+        <p:spPr>
+          <a:xfrm>
+            <a:off x="10561320" y="457200"/>
+            <a:ext cx="1051560" cy="384048"/>
           </a:xfrm>
           <a:prstGeom prst="roundRect">
-            <a:avLst/>
+            <a:avLst>
+              <a:gd name="adj" fmla="val 50000"/>
+            </a:avLst>
           </a:prstGeom>
           <a:solidFill>
             <a:srgbClr val="FFFFFF"/>
@@ -6778,32 +8271,77 @@
           </a:fontRef>
         </p:style>
         <p:txBody>
+          <a:bodyPr rtlCol="0" anchor="ctr" lIns="0" rIns="0" tIns="0" bIns="0"/>
+          <a:lstStyle/>
+          <a:p>
+            <a:pPr algn="ctr"/>
+            <a:r>
+              <a:rPr sz="1200" b="1">
+                <a:solidFill>
+                  <a:srgbClr val="004C73"/>
+                </a:solidFill>
+                <a:latin typeface="Segoe UI"/>
+              </a:rPr>
+              <a:t>3 / 12</a:t>
+            </a:r>
+          </a:p>
+        </p:txBody>
+      </p:sp>
+      <p:sp>
+        <p:nvSpPr>
+          <p:cNvPr id="9" name="Rounded Rectangle 8"/>
+          <p:cNvSpPr/>
+          <p:nvPr/>
+        </p:nvSpPr>
+        <p:spPr>
+          <a:xfrm>
+            <a:off x="502920" y="1481328"/>
+            <a:ext cx="54864" cy="4709160"/>
+          </a:xfrm>
+          <a:prstGeom prst="roundRect">
+            <a:avLst>
+              <a:gd name="adj" fmla="val 50000"/>
+            </a:avLst>
+          </a:prstGeom>
+          <a:solidFill>
+            <a:srgbClr val="FF7A45"/>
+          </a:solidFill>
+          <a:ln>
+            <a:noFill/>
+          </a:ln>
+        </p:spPr>
+        <p:style>
+          <a:lnRef idx="1">
+            <a:schemeClr val="accent1"/>
+          </a:lnRef>
+          <a:fillRef idx="3">
+            <a:schemeClr val="accent1"/>
+          </a:fillRef>
+          <a:effectRef idx="2">
+            <a:schemeClr val="accent1"/>
+          </a:effectRef>
+          <a:fontRef idx="minor">
+            <a:schemeClr val="lt1"/>
+          </a:fontRef>
+        </p:style>
+        <p:txBody>
           <a:bodyPr rtlCol="0" anchor="ctr"/>
           <a:lstStyle/>
           <a:p>
             <a:pPr algn="ctr"/>
-            <a:r>
-              <a:rPr sz="1100" b="1">
-                <a:solidFill>
-                  <a:srgbClr val="FFFFFF"/>
-                </a:solidFill>
-                <a:latin typeface="Calibri"/>
-              </a:rPr>
-              <a:t>3/12</a:t>
-            </a:r>
-          </a:p>
-        </p:txBody>
-      </p:sp>
-      <p:sp>
-        <p:nvSpPr>
-          <p:cNvPr id="8" name="TextBox 7"/>
+          </a:p>
+        </p:txBody>
+      </p:sp>
+      <p:sp>
+        <p:nvSpPr>
+          <p:cNvPr id="10" name="TextBox 9"/>
           <p:cNvSpPr txBox="1"/>
           <p:nvPr/>
         </p:nvSpPr>
         <p:spPr>
           <a:xfrm>
-            <a:off x="502920" y="1325880"/>
-            <a:ext cx="3977639" cy="5120640"/>
+            <a:off x="749808" y="1417320"/>
+            <a:ext cx="3703320" cy="4892040"/>
           </a:xfrm>
           <a:prstGeom prst="rect">
             <a:avLst/>
@@ -6818,10 +8356,10 @@
           <a:p>
             <a:pPr>
               <a:lnSpc>
-                <a:spcPct val="115000"/>
+                <a:spcPct val="118000"/>
               </a:lnSpc>
               <a:spcAft>
-                <a:spcPts val="1400"/>
+                <a:spcPts val="1600"/>
               </a:spcAft>
             </a:pPr>
             <a:r>
@@ -6829,16 +8367,16 @@
                 <a:solidFill>
                   <a:srgbClr val="0096C7"/>
                 </a:solidFill>
-                <a:latin typeface="Calibri"/>
-              </a:rPr>
-              <a:t>●  </a:t>
+                <a:latin typeface="Segoe UI Semibold"/>
+              </a:rPr>
+              <a:t>01  </a:t>
             </a:r>
             <a:r>
               <a:rPr sz="1500" b="0">
                 <a:solidFill>
                   <a:srgbClr val="334155"/>
                 </a:solidFill>
-                <a:latin typeface="Calibri"/>
+                <a:latin typeface="Segoe UI"/>
               </a:rPr>
               <a:t>Floor: one sanctioned assistant under enterprise agreement</a:t>
             </a:r>
@@ -6846,10 +8384,10 @@
           <a:p>
             <a:pPr>
               <a:lnSpc>
-                <a:spcPct val="115000"/>
+                <a:spcPct val="118000"/>
               </a:lnSpc>
               <a:spcAft>
-                <a:spcPts val="1400"/>
+                <a:spcPts val="1600"/>
               </a:spcAft>
             </a:pPr>
             <a:r>
@@ -6857,16 +8395,16 @@
                 <a:solidFill>
                   <a:srgbClr val="0096C7"/>
                 </a:solidFill>
-                <a:latin typeface="Calibri"/>
-              </a:rPr>
-              <a:t>●  </a:t>
+                <a:latin typeface="Segoe UI Semibold"/>
+              </a:rPr>
+              <a:t>02  </a:t>
             </a:r>
             <a:r>
               <a:rPr sz="1500" b="0">
                 <a:solidFill>
                   <a:srgbClr val="334155"/>
                 </a:solidFill>
-                <a:latin typeface="Calibri"/>
+                <a:latin typeface="Segoe UI"/>
               </a:rPr>
               <a:t>Overlay: same protected paths, scans, telemetry on every agent</a:t>
             </a:r>
@@ -6874,10 +8412,10 @@
           <a:p>
             <a:pPr>
               <a:lnSpc>
-                <a:spcPct val="115000"/>
+                <a:spcPct val="118000"/>
               </a:lnSpc>
               <a:spcAft>
-                <a:spcPts val="1400"/>
+                <a:spcPts val="1600"/>
               </a:spcAft>
             </a:pPr>
             <a:r>
@@ -6885,16 +8423,16 @@
                 <a:solidFill>
                   <a:srgbClr val="0096C7"/>
                 </a:solidFill>
-                <a:latin typeface="Calibri"/>
-              </a:rPr>
-              <a:t>●  </a:t>
+                <a:latin typeface="Segoe UI Semibold"/>
+              </a:rPr>
+              <a:t>03  </a:t>
             </a:r>
             <a:r>
               <a:rPr sz="1500" b="0">
                 <a:solidFill>
                   <a:srgbClr val="334155"/>
                 </a:solidFill>
-                <a:latin typeface="Calibri"/>
+                <a:latin typeface="Segoe UI"/>
               </a:rPr>
               <a:t>Runtime: model gateway on AWS — no vendor keys in apps</a:t>
             </a:r>
@@ -6903,14 +8441,57 @@
       </p:sp>
       <p:sp>
         <p:nvSpPr>
-          <p:cNvPr id="9" name="TextBox 8"/>
+          <p:cNvPr id="11" name="Rectangle 10"/>
+          <p:cNvSpPr/>
+          <p:nvPr/>
+        </p:nvSpPr>
+        <p:spPr>
+          <a:xfrm>
+            <a:off x="502920" y="6382512"/>
+            <a:ext cx="11183112" cy="12700"/>
+          </a:xfrm>
+          <a:prstGeom prst="rect">
+            <a:avLst/>
+          </a:prstGeom>
+          <a:solidFill>
+            <a:srgbClr val="D8ECF7"/>
+          </a:solidFill>
+          <a:ln>
+            <a:noFill/>
+          </a:ln>
+        </p:spPr>
+        <p:style>
+          <a:lnRef idx="1">
+            <a:schemeClr val="accent1"/>
+          </a:lnRef>
+          <a:fillRef idx="3">
+            <a:schemeClr val="accent1"/>
+          </a:fillRef>
+          <a:effectRef idx="2">
+            <a:schemeClr val="accent1"/>
+          </a:effectRef>
+          <a:fontRef idx="minor">
+            <a:schemeClr val="lt1"/>
+          </a:fontRef>
+        </p:style>
+        <p:txBody>
+          <a:bodyPr rtlCol="0" anchor="ctr"/>
+          <a:lstStyle/>
+          <a:p>
+            <a:pPr algn="ctr"/>
+          </a:p>
+        </p:txBody>
+      </p:sp>
+      <p:sp>
+        <p:nvSpPr>
+          <p:cNvPr id="12" name="TextBox 11"/>
           <p:cNvSpPr txBox="1"/>
           <p:nvPr/>
         </p:nvSpPr>
         <p:spPr>
           <a:xfrm>
-            <a:off x="502920" y="6446520"/>
-            <a:ext cx="7315200" cy="320040"/>
+            <a:off x="502920" y="6455664"/>
+            <a:ext cx="10652760" cy="292608"/>
           </a:xfrm>
           <a:prstGeom prst="rect">
             <a:avLst/>
@@ -6928,35 +8509,44 @@
                 <a:solidFill>
                   <a:srgbClr val="64748B"/>
                 </a:solidFill>
-                <a:latin typeface="Calibri"/>
-              </a:rPr>
-              <a:t>RCG Principal Engineer · Part 2 · Agentic Development Strategy</a:t>
-            </a:r>
-          </a:p>
-        </p:txBody>
-      </p:sp>
-      <p:sp>
-        <p:nvSpPr>
-          <p:cNvPr id="10" name="Rounded Rectangle 9"/>
-          <p:cNvSpPr/>
-          <p:nvPr/>
-        </p:nvSpPr>
-        <p:spPr>
-          <a:xfrm>
-            <a:off x="4709160" y="1325880"/>
-            <a:ext cx="7178040" cy="4892040"/>
+                <a:latin typeface="Segoe UI"/>
+              </a:rPr>
+              <a:t>RCG Principal Engineer  ·  Part 2  ·  Agentic Development Strategy</a:t>
+            </a:r>
+          </a:p>
+        </p:txBody>
+      </p:sp>
+      <p:sp>
+        <p:nvSpPr>
+          <p:cNvPr id="13" name="Rounded Rectangle 12"/>
+          <p:cNvSpPr/>
+          <p:nvPr/>
+        </p:nvSpPr>
+        <p:spPr>
+          <a:xfrm>
+            <a:off x="4709160" y="1536192"/>
+            <a:ext cx="7178040" cy="4709160"/>
           </a:xfrm>
           <a:prstGeom prst="roundRect">
-            <a:avLst/>
+            <a:avLst>
+              <a:gd name="adj" fmla="val 4500"/>
+            </a:avLst>
           </a:prstGeom>
           <a:solidFill>
             <a:srgbClr val="FFFFFF"/>
           </a:solidFill>
-          <a:ln w="15875">
+          <a:ln w="12700">
             <a:solidFill>
-              <a:srgbClr val="CBE8F5"/>
+              <a:srgbClr val="D8ECF7"/>
             </a:solidFill>
           </a:ln>
+          <a:effectLst>
+            <a:outerShdw blurRad="146304" dist="54864" dir="5400000" rotWithShape="0">
+              <a:srgbClr val="1B3A4B">
+                <a:alpha val="22000"/>
+              </a:srgbClr>
+            </a:outerShdw>
+          </a:effectLst>
         </p:spPr>
         <p:style>
           <a:lnRef idx="1">
@@ -6982,7 +8572,7 @@
       </p:sp>
       <p:pic>
         <p:nvPicPr>
-          <p:cNvPr id="11" name="Picture 10" descr="slide-03-enforcement-matrix.png"/>
+          <p:cNvPr id="14" name="Picture 13" descr="slide-03-enforcement-matrix.png"/>
           <p:cNvPicPr>
             <a:picLocks noChangeAspect="1"/>
           </p:cNvPicPr>
@@ -6996,14 +8586,68 @@
         </p:blipFill>
         <p:spPr>
           <a:xfrm>
-            <a:off x="4782312" y="1399032"/>
-            <a:ext cx="7031736" cy="4745736"/>
+            <a:off x="4791456" y="1618488"/>
+            <a:ext cx="7013448" cy="4544568"/>
           </a:xfrm>
           <a:prstGeom prst="rect">
             <a:avLst/>
           </a:prstGeom>
         </p:spPr>
       </p:pic>
+      <p:sp>
+        <p:nvSpPr>
+          <p:cNvPr id="15" name="Rounded Rectangle 14"/>
+          <p:cNvSpPr/>
+          <p:nvPr/>
+        </p:nvSpPr>
+        <p:spPr>
+          <a:xfrm>
+            <a:off x="4873752" y="1353312"/>
+            <a:ext cx="1554480" cy="365760"/>
+          </a:xfrm>
+          <a:prstGeom prst="roundRect">
+            <a:avLst>
+              <a:gd name="adj" fmla="val 50000"/>
+            </a:avLst>
+          </a:prstGeom>
+          <a:solidFill>
+            <a:srgbClr val="004C73"/>
+          </a:solidFill>
+          <a:ln>
+            <a:noFill/>
+          </a:ln>
+        </p:spPr>
+        <p:style>
+          <a:lnRef idx="1">
+            <a:schemeClr val="accent1"/>
+          </a:lnRef>
+          <a:fillRef idx="3">
+            <a:schemeClr val="accent1"/>
+          </a:fillRef>
+          <a:effectRef idx="2">
+            <a:schemeClr val="accent1"/>
+          </a:effectRef>
+          <a:fontRef idx="minor">
+            <a:schemeClr val="lt1"/>
+          </a:fontRef>
+        </p:style>
+        <p:txBody>
+          <a:bodyPr rtlCol="0" anchor="ctr" lIns="0" rIns="0" tIns="0" bIns="0"/>
+          <a:lstStyle/>
+          <a:p>
+            <a:pPr algn="ctr"/>
+            <a:r>
+              <a:rPr sz="1000" b="1">
+                <a:solidFill>
+                  <a:srgbClr val="FFFFFF"/>
+                </a:solidFill>
+                <a:latin typeface="Segoe UI"/>
+              </a:rPr>
+              <a:t>LIVE OUTPUT</a:t>
+            </a:r>
+          </a:p>
+        </p:txBody>
+      </p:sp>
     </p:spTree>
   </p:cSld>
   <p:clrMapOvr>
@@ -7042,10 +8686,10 @@
                 <a:srgbClr val="FFFFFF"/>
               </a:gs>
               <a:gs pos="100000">
-                <a:srgbClr val="E8F4FC"/>
+                <a:srgbClr val="F1F7FB"/>
               </a:gs>
             </a:gsLst>
-            <a:lin scaled="0" ang="15000000"/>
+            <a:lin scaled="0" ang="14700000"/>
           </a:gradFill>
           <a:ln>
             <a:noFill/>
@@ -7075,29 +8719,21 @@
       </p:sp>
       <p:sp>
         <p:nvSpPr>
-          <p:cNvPr id="3" name="Rectangle 2"/>
-          <p:cNvSpPr/>
-          <p:nvPr/>
-        </p:nvSpPr>
-        <p:spPr>
-          <a:xfrm>
-            <a:off x="0" y="5303520"/>
-            <a:ext cx="12191695" cy="1554480"/>
-          </a:xfrm>
-          <a:prstGeom prst="rect">
+          <p:cNvPr id="3" name="Oval 2"/>
+          <p:cNvSpPr/>
+          <p:nvPr/>
+        </p:nvSpPr>
+        <p:spPr>
+          <a:xfrm>
+            <a:off x="9692640" y="4480560"/>
+            <a:ext cx="4754880" cy="4754880"/>
+          </a:xfrm>
+          <a:prstGeom prst="ellipse">
             <a:avLst/>
           </a:prstGeom>
-          <a:gradFill rotWithShape="1">
-            <a:gsLst>
-              <a:gs pos="0">
-                <a:srgbClr val="90E0EF"/>
-              </a:gs>
-              <a:gs pos="100000">
-                <a:srgbClr val="E8F4FC"/>
-              </a:gs>
-            </a:gsLst>
-            <a:lin scaled="0" ang="0"/>
-          </a:gradFill>
+          <a:solidFill>
+            <a:srgbClr val="90E0EF"/>
+          </a:solidFill>
           <a:ln>
             <a:noFill/>
           </a:ln>
@@ -7133,7 +8769,7 @@
         <p:spPr>
           <a:xfrm>
             <a:off x="0" y="0"/>
-            <a:ext cx="12191695" cy="109728"/>
+            <a:ext cx="12191695" cy="73152"/>
           </a:xfrm>
           <a:prstGeom prst="rect">
             <a:avLst/>
@@ -7177,32 +8813,41 @@
       </p:sp>
       <p:sp>
         <p:nvSpPr>
-          <p:cNvPr id="5" name="Rectangle 4"/>
-          <p:cNvSpPr/>
-          <p:nvPr/>
-        </p:nvSpPr>
-        <p:spPr>
-          <a:xfrm>
-            <a:off x="0" y="109728"/>
-            <a:ext cx="12191695" cy="960120"/>
-          </a:xfrm>
-          <a:prstGeom prst="rect">
-            <a:avLst/>
+          <p:cNvPr id="5" name="Rounded Rectangle 4"/>
+          <p:cNvSpPr/>
+          <p:nvPr/>
+        </p:nvSpPr>
+        <p:spPr>
+          <a:xfrm>
+            <a:off x="365760" y="292608"/>
+            <a:ext cx="11460175" cy="932688"/>
+          </a:xfrm>
+          <a:prstGeom prst="roundRect">
+            <a:avLst>
+              <a:gd name="adj" fmla="val 12000"/>
+            </a:avLst>
           </a:prstGeom>
           <a:gradFill rotWithShape="1">
             <a:gsLst>
               <a:gs pos="0">
-                <a:srgbClr val="005F8C"/>
+                <a:srgbClr val="004C73"/>
               </a:gs>
               <a:gs pos="100000">
                 <a:srgbClr val="0096C7"/>
               </a:gs>
             </a:gsLst>
-            <a:lin scaled="0" ang="0"/>
+            <a:lin scaled="0" ang="21120000"/>
           </a:gradFill>
           <a:ln>
             <a:noFill/>
           </a:ln>
+          <a:effectLst>
+            <a:outerShdw blurRad="128016" dist="45720" dir="5400000" rotWithShape="0">
+              <a:srgbClr val="1B3A4B">
+                <a:alpha val="26000"/>
+              </a:srgbClr>
+            </a:outerShdw>
+          </a:effectLst>
         </p:spPr>
         <p:style>
           <a:lnRef idx="1">
@@ -7228,14 +8873,66 @@
       </p:sp>
       <p:sp>
         <p:nvSpPr>
-          <p:cNvPr id="6" name="TextBox 5"/>
+          <p:cNvPr id="6" name="Oval 5"/>
+          <p:cNvSpPr/>
+          <p:nvPr/>
+        </p:nvSpPr>
+        <p:spPr>
+          <a:xfrm>
+            <a:off x="566928" y="438912"/>
+            <a:ext cx="658368" cy="658368"/>
+          </a:xfrm>
+          <a:prstGeom prst="ellipse">
+            <a:avLst/>
+          </a:prstGeom>
+          <a:solidFill>
+            <a:srgbClr val="FF7A45"/>
+          </a:solidFill>
+          <a:ln>
+            <a:noFill/>
+          </a:ln>
+        </p:spPr>
+        <p:style>
+          <a:lnRef idx="1">
+            <a:schemeClr val="accent1"/>
+          </a:lnRef>
+          <a:fillRef idx="3">
+            <a:schemeClr val="accent1"/>
+          </a:fillRef>
+          <a:effectRef idx="2">
+            <a:schemeClr val="accent1"/>
+          </a:effectRef>
+          <a:fontRef idx="minor">
+            <a:schemeClr val="lt1"/>
+          </a:fontRef>
+        </p:style>
+        <p:txBody>
+          <a:bodyPr rtlCol="0" anchor="ctr" wrap="none" lIns="0" rIns="0" tIns="0" bIns="0"/>
+          <a:lstStyle/>
+          <a:p>
+            <a:pPr algn="ctr"/>
+            <a:r>
+              <a:rPr sz="2000" b="1">
+                <a:solidFill>
+                  <a:srgbClr val="FFFFFF"/>
+                </a:solidFill>
+                <a:latin typeface="Segoe UI"/>
+              </a:rPr>
+              <a:t>4</a:t>
+            </a:r>
+          </a:p>
+        </p:txBody>
+      </p:sp>
+      <p:sp>
+        <p:nvSpPr>
+          <p:cNvPr id="7" name="TextBox 6"/>
           <p:cNvSpPr txBox="1"/>
           <p:nvPr/>
         </p:nvSpPr>
         <p:spPr>
           <a:xfrm>
-            <a:off x="502920" y="256032"/>
-            <a:ext cx="9601200" cy="685800"/>
+            <a:off x="1444752" y="384048"/>
+            <a:ext cx="9052560" cy="777240"/>
           </a:xfrm>
           <a:prstGeom prst="rect">
             <a:avLst/>
@@ -7243,17 +8940,17 @@
           <a:noFill/>
         </p:spPr>
         <p:txBody>
-          <a:bodyPr wrap="square">
+          <a:bodyPr wrap="square" anchor="ctr">
             <a:spAutoFit/>
           </a:bodyPr>
           <a:lstStyle/>
           <a:p>
             <a:r>
-              <a:rPr sz="2800" b="1">
+              <a:rPr sz="2500" b="1">
                 <a:solidFill>
                   <a:srgbClr val="FFFFFF"/>
                 </a:solidFill>
-                <a:latin typeface="Calibri"/>
+                <a:latin typeface="Segoe UI Semibold"/>
               </a:rPr>
               <a:t>30 / 60 / 90 — three pillars in parallel</a:t>
             </a:r>
@@ -7262,17 +8959,19 @@
       </p:sp>
       <p:sp>
         <p:nvSpPr>
-          <p:cNvPr id="7" name="Rounded Rectangle 6"/>
-          <p:cNvSpPr/>
-          <p:nvPr/>
-        </p:nvSpPr>
-        <p:spPr>
-          <a:xfrm>
-            <a:off x="10835640" y="320040"/>
-            <a:ext cx="960120" cy="411480"/>
+          <p:cNvPr id="8" name="Rounded Rectangle 7"/>
+          <p:cNvSpPr/>
+          <p:nvPr/>
+        </p:nvSpPr>
+        <p:spPr>
+          <a:xfrm>
+            <a:off x="10561320" y="457200"/>
+            <a:ext cx="1051560" cy="384048"/>
           </a:xfrm>
           <a:prstGeom prst="roundRect">
-            <a:avLst/>
+            <a:avLst>
+              <a:gd name="adj" fmla="val 50000"/>
+            </a:avLst>
           </a:prstGeom>
           <a:solidFill>
             <a:srgbClr val="FFFFFF"/>
@@ -7296,32 +8995,77 @@
           </a:fontRef>
         </p:style>
         <p:txBody>
+          <a:bodyPr rtlCol="0" anchor="ctr" lIns="0" rIns="0" tIns="0" bIns="0"/>
+          <a:lstStyle/>
+          <a:p>
+            <a:pPr algn="ctr"/>
+            <a:r>
+              <a:rPr sz="1200" b="1">
+                <a:solidFill>
+                  <a:srgbClr val="004C73"/>
+                </a:solidFill>
+                <a:latin typeface="Segoe UI"/>
+              </a:rPr>
+              <a:t>4 / 12</a:t>
+            </a:r>
+          </a:p>
+        </p:txBody>
+      </p:sp>
+      <p:sp>
+        <p:nvSpPr>
+          <p:cNvPr id="9" name="Rounded Rectangle 8"/>
+          <p:cNvSpPr/>
+          <p:nvPr/>
+        </p:nvSpPr>
+        <p:spPr>
+          <a:xfrm>
+            <a:off x="502920" y="1481328"/>
+            <a:ext cx="54864" cy="4709160"/>
+          </a:xfrm>
+          <a:prstGeom prst="roundRect">
+            <a:avLst>
+              <a:gd name="adj" fmla="val 50000"/>
+            </a:avLst>
+          </a:prstGeom>
+          <a:solidFill>
+            <a:srgbClr val="FF7A45"/>
+          </a:solidFill>
+          <a:ln>
+            <a:noFill/>
+          </a:ln>
+        </p:spPr>
+        <p:style>
+          <a:lnRef idx="1">
+            <a:schemeClr val="accent1"/>
+          </a:lnRef>
+          <a:fillRef idx="3">
+            <a:schemeClr val="accent1"/>
+          </a:fillRef>
+          <a:effectRef idx="2">
+            <a:schemeClr val="accent1"/>
+          </a:effectRef>
+          <a:fontRef idx="minor">
+            <a:schemeClr val="lt1"/>
+          </a:fontRef>
+        </p:style>
+        <p:txBody>
           <a:bodyPr rtlCol="0" anchor="ctr"/>
           <a:lstStyle/>
           <a:p>
             <a:pPr algn="ctr"/>
-            <a:r>
-              <a:rPr sz="1100" b="1">
-                <a:solidFill>
-                  <a:srgbClr val="FFFFFF"/>
-                </a:solidFill>
-                <a:latin typeface="Calibri"/>
-              </a:rPr>
-              <a:t>4/12</a:t>
-            </a:r>
-          </a:p>
-        </p:txBody>
-      </p:sp>
-      <p:sp>
-        <p:nvSpPr>
-          <p:cNvPr id="8" name="TextBox 7"/>
+          </a:p>
+        </p:txBody>
+      </p:sp>
+      <p:sp>
+        <p:nvSpPr>
+          <p:cNvPr id="10" name="TextBox 9"/>
           <p:cNvSpPr txBox="1"/>
           <p:nvPr/>
         </p:nvSpPr>
         <p:spPr>
           <a:xfrm>
-            <a:off x="502920" y="1325880"/>
-            <a:ext cx="3977639" cy="5120640"/>
+            <a:off x="749808" y="1417320"/>
+            <a:ext cx="3703320" cy="4892040"/>
           </a:xfrm>
           <a:prstGeom prst="rect">
             <a:avLst/>
@@ -7336,10 +9080,10 @@
           <a:p>
             <a:pPr>
               <a:lnSpc>
-                <a:spcPct val="115000"/>
+                <a:spcPct val="118000"/>
               </a:lnSpc>
               <a:spcAft>
-                <a:spcPts val="1400"/>
+                <a:spcPts val="1600"/>
               </a:spcAft>
             </a:pPr>
             <a:r>
@@ -7347,16 +9091,16 @@
                 <a:solidFill>
                   <a:srgbClr val="0096C7"/>
                 </a:solidFill>
-                <a:latin typeface="Calibri"/>
-              </a:rPr>
-              <a:t>●  </a:t>
+                <a:latin typeface="Segoe UI Semibold"/>
+              </a:rPr>
+              <a:t>01  </a:t>
             </a:r>
             <a:r>
               <a:rPr sz="1500" b="0">
                 <a:solidFill>
                   <a:srgbClr val="334155"/>
                 </a:solidFill>
-                <a:latin typeface="Calibri"/>
+                <a:latin typeface="Segoe UI"/>
               </a:rPr>
               <a:t>Each horizon moves adoption, SDLC, and product together</a:t>
             </a:r>
@@ -7364,10 +9108,10 @@
           <a:p>
             <a:pPr>
               <a:lnSpc>
-                <a:spcPct val="115000"/>
+                <a:spcPct val="118000"/>
               </a:lnSpc>
               <a:spcAft>
-                <a:spcPts val="1400"/>
+                <a:spcPts val="1600"/>
               </a:spcAft>
             </a:pPr>
             <a:r>
@@ -7375,16 +9119,16 @@
                 <a:solidFill>
                   <a:srgbClr val="0096C7"/>
                 </a:solidFill>
-                <a:latin typeface="Calibri"/>
-              </a:rPr>
-              <a:t>●  </a:t>
+                <a:latin typeface="Segoe UI Semibold"/>
+              </a:rPr>
+              <a:t>02  </a:t>
             </a:r>
             <a:r>
               <a:rPr sz="1500" b="0">
                 <a:solidFill>
                   <a:srgbClr val="334155"/>
                 </a:solidFill>
-                <a:latin typeface="Calibri"/>
+                <a:latin typeface="Segoe UI"/>
               </a:rPr>
               <a:t>Explicit exit gate at every boundary — evidence or kill</a:t>
             </a:r>
@@ -7392,10 +9136,10 @@
           <a:p>
             <a:pPr>
               <a:lnSpc>
-                <a:spcPct val="115000"/>
+                <a:spcPct val="118000"/>
               </a:lnSpc>
               <a:spcAft>
-                <a:spcPts val="1400"/>
+                <a:spcPts val="1600"/>
               </a:spcAft>
             </a:pPr>
             <a:r>
@@ -7403,16 +9147,16 @@
                 <a:solidFill>
                   <a:srgbClr val="0096C7"/>
                 </a:solidFill>
-                <a:latin typeface="Calibri"/>
-              </a:rPr>
-              <a:t>●  </a:t>
+                <a:latin typeface="Segoe UI Semibold"/>
+              </a:rPr>
+              <a:t>03  </a:t>
             </a:r>
             <a:r>
               <a:rPr sz="1500" b="0">
                 <a:solidFill>
                   <a:srgbClr val="334155"/>
                 </a:solidFill>
-                <a:latin typeface="Calibri"/>
+                <a:latin typeface="Segoe UI"/>
               </a:rPr>
               <a:t>Pick one enthusiastic team and one skeptical team on purpose</a:t>
             </a:r>
@@ -7421,14 +9165,57 @@
       </p:sp>
       <p:sp>
         <p:nvSpPr>
-          <p:cNvPr id="9" name="TextBox 8"/>
+          <p:cNvPr id="11" name="Rectangle 10"/>
+          <p:cNvSpPr/>
+          <p:nvPr/>
+        </p:nvSpPr>
+        <p:spPr>
+          <a:xfrm>
+            <a:off x="502920" y="6382512"/>
+            <a:ext cx="11183112" cy="12700"/>
+          </a:xfrm>
+          <a:prstGeom prst="rect">
+            <a:avLst/>
+          </a:prstGeom>
+          <a:solidFill>
+            <a:srgbClr val="D8ECF7"/>
+          </a:solidFill>
+          <a:ln>
+            <a:noFill/>
+          </a:ln>
+        </p:spPr>
+        <p:style>
+          <a:lnRef idx="1">
+            <a:schemeClr val="accent1"/>
+          </a:lnRef>
+          <a:fillRef idx="3">
+            <a:schemeClr val="accent1"/>
+          </a:fillRef>
+          <a:effectRef idx="2">
+            <a:schemeClr val="accent1"/>
+          </a:effectRef>
+          <a:fontRef idx="minor">
+            <a:schemeClr val="lt1"/>
+          </a:fontRef>
+        </p:style>
+        <p:txBody>
+          <a:bodyPr rtlCol="0" anchor="ctr"/>
+          <a:lstStyle/>
+          <a:p>
+            <a:pPr algn="ctr"/>
+          </a:p>
+        </p:txBody>
+      </p:sp>
+      <p:sp>
+        <p:nvSpPr>
+          <p:cNvPr id="12" name="TextBox 11"/>
           <p:cNvSpPr txBox="1"/>
           <p:nvPr/>
         </p:nvSpPr>
         <p:spPr>
           <a:xfrm>
-            <a:off x="502920" y="6446520"/>
-            <a:ext cx="7315200" cy="320040"/>
+            <a:off x="502920" y="6455664"/>
+            <a:ext cx="10652760" cy="292608"/>
           </a:xfrm>
           <a:prstGeom prst="rect">
             <a:avLst/>
@@ -7446,35 +9233,44 @@
                 <a:solidFill>
                   <a:srgbClr val="64748B"/>
                 </a:solidFill>
-                <a:latin typeface="Calibri"/>
-              </a:rPr>
-              <a:t>RCG Principal Engineer · Part 2 · Agentic Development Strategy</a:t>
-            </a:r>
-          </a:p>
-        </p:txBody>
-      </p:sp>
-      <p:sp>
-        <p:nvSpPr>
-          <p:cNvPr id="10" name="Rounded Rectangle 9"/>
-          <p:cNvSpPr/>
-          <p:nvPr/>
-        </p:nvSpPr>
-        <p:spPr>
-          <a:xfrm>
-            <a:off x="4709160" y="1325880"/>
-            <a:ext cx="7178040" cy="2359152"/>
+                <a:latin typeface="Segoe UI"/>
+              </a:rPr>
+              <a:t>RCG Principal Engineer  ·  Part 2  ·  Agentic Development Strategy</a:t>
+            </a:r>
+          </a:p>
+        </p:txBody>
+      </p:sp>
+      <p:sp>
+        <p:nvSpPr>
+          <p:cNvPr id="13" name="Rounded Rectangle 12"/>
+          <p:cNvSpPr/>
+          <p:nvPr/>
+        </p:nvSpPr>
+        <p:spPr>
+          <a:xfrm>
+            <a:off x="4709160" y="1536192"/>
+            <a:ext cx="7178040" cy="2240280"/>
           </a:xfrm>
           <a:prstGeom prst="roundRect">
-            <a:avLst/>
+            <a:avLst>
+              <a:gd name="adj" fmla="val 4500"/>
+            </a:avLst>
           </a:prstGeom>
           <a:solidFill>
             <a:srgbClr val="FFFFFF"/>
           </a:solidFill>
-          <a:ln w="15875">
+          <a:ln w="12700">
             <a:solidFill>
-              <a:srgbClr val="CBE8F5"/>
+              <a:srgbClr val="D8ECF7"/>
             </a:solidFill>
           </a:ln>
+          <a:effectLst>
+            <a:outerShdw blurRad="146304" dist="54864" dir="5400000" rotWithShape="0">
+              <a:srgbClr val="1B3A4B">
+                <a:alpha val="22000"/>
+              </a:srgbClr>
+            </a:outerShdw>
+          </a:effectLst>
         </p:spPr>
         <p:style>
           <a:lnRef idx="1">
@@ -7500,7 +9296,7 @@
       </p:sp>
       <p:pic>
         <p:nvPicPr>
-          <p:cNvPr id="11" name="Picture 10" descr="slide-04-roadmap.png"/>
+          <p:cNvPr id="14" name="Picture 13" descr="slide-04-roadmap.png"/>
           <p:cNvPicPr>
             <a:picLocks noChangeAspect="1"/>
           </p:cNvPicPr>
@@ -7514,8 +9310,8 @@
         </p:blipFill>
         <p:spPr>
           <a:xfrm>
-            <a:off x="4782312" y="1399032"/>
-            <a:ext cx="7031736" cy="2212848"/>
+            <a:off x="4791456" y="1618488"/>
+            <a:ext cx="7013448" cy="2075688"/>
           </a:xfrm>
           <a:prstGeom prst="rect">
             <a:avLst/>
@@ -7524,26 +9320,89 @@
       </p:pic>
       <p:sp>
         <p:nvSpPr>
-          <p:cNvPr id="12" name="Rounded Rectangle 11"/>
-          <p:cNvSpPr/>
-          <p:nvPr/>
-        </p:nvSpPr>
-        <p:spPr>
-          <a:xfrm>
-            <a:off x="4709160" y="3849624"/>
-            <a:ext cx="7178040" cy="2359152"/>
+          <p:cNvPr id="15" name="Rounded Rectangle 14"/>
+          <p:cNvSpPr/>
+          <p:nvPr/>
+        </p:nvSpPr>
+        <p:spPr>
+          <a:xfrm>
+            <a:off x="4873752" y="1353312"/>
+            <a:ext cx="1554480" cy="365760"/>
           </a:xfrm>
           <a:prstGeom prst="roundRect">
-            <a:avLst/>
+            <a:avLst>
+              <a:gd name="adj" fmla="val 50000"/>
+            </a:avLst>
+          </a:prstGeom>
+          <a:solidFill>
+            <a:srgbClr val="004C73"/>
+          </a:solidFill>
+          <a:ln>
+            <a:noFill/>
+          </a:ln>
+        </p:spPr>
+        <p:style>
+          <a:lnRef idx="1">
+            <a:schemeClr val="accent1"/>
+          </a:lnRef>
+          <a:fillRef idx="3">
+            <a:schemeClr val="accent1"/>
+          </a:fillRef>
+          <a:effectRef idx="2">
+            <a:schemeClr val="accent1"/>
+          </a:effectRef>
+          <a:fontRef idx="minor">
+            <a:schemeClr val="lt1"/>
+          </a:fontRef>
+        </p:style>
+        <p:txBody>
+          <a:bodyPr rtlCol="0" anchor="ctr" lIns="0" rIns="0" tIns="0" bIns="0"/>
+          <a:lstStyle/>
+          <a:p>
+            <a:pPr algn="ctr"/>
+            <a:r>
+              <a:rPr sz="1000" b="1">
+                <a:solidFill>
+                  <a:srgbClr val="FFFFFF"/>
+                </a:solidFill>
+                <a:latin typeface="Segoe UI"/>
+              </a:rPr>
+              <a:t>LIVE OUTPUT — 1/2</a:t>
+            </a:r>
+          </a:p>
+        </p:txBody>
+      </p:sp>
+      <p:sp>
+        <p:nvSpPr>
+          <p:cNvPr id="16" name="Rounded Rectangle 15"/>
+          <p:cNvSpPr/>
+          <p:nvPr/>
+        </p:nvSpPr>
+        <p:spPr>
+          <a:xfrm>
+            <a:off x="4709160" y="4005072"/>
+            <a:ext cx="7178040" cy="2240280"/>
+          </a:xfrm>
+          <a:prstGeom prst="roundRect">
+            <a:avLst>
+              <a:gd name="adj" fmla="val 4500"/>
+            </a:avLst>
           </a:prstGeom>
           <a:solidFill>
             <a:srgbClr val="FFFFFF"/>
           </a:solidFill>
-          <a:ln w="15875">
+          <a:ln w="12700">
             <a:solidFill>
-              <a:srgbClr val="CBE8F5"/>
+              <a:srgbClr val="D8ECF7"/>
             </a:solidFill>
           </a:ln>
+          <a:effectLst>
+            <a:outerShdw blurRad="146304" dist="54864" dir="5400000" rotWithShape="0">
+              <a:srgbClr val="1B3A4B">
+                <a:alpha val="22000"/>
+              </a:srgbClr>
+            </a:outerShdw>
+          </a:effectLst>
         </p:spPr>
         <p:style>
           <a:lnRef idx="1">
@@ -7569,7 +9428,7 @@
       </p:sp>
       <p:pic>
         <p:nvPicPr>
-          <p:cNvPr id="13" name="Picture 12" descr="slide-04-deploy.png"/>
+          <p:cNvPr id="17" name="Picture 16" descr="slide-04-deploy.png"/>
           <p:cNvPicPr>
             <a:picLocks noChangeAspect="1"/>
           </p:cNvPicPr>
@@ -7583,14 +9442,68 @@
         </p:blipFill>
         <p:spPr>
           <a:xfrm>
-            <a:off x="4782312" y="3922776"/>
-            <a:ext cx="7031736" cy="2212848"/>
+            <a:off x="4791456" y="4087368"/>
+            <a:ext cx="7013448" cy="2075688"/>
           </a:xfrm>
           <a:prstGeom prst="rect">
             <a:avLst/>
           </a:prstGeom>
         </p:spPr>
       </p:pic>
+      <p:sp>
+        <p:nvSpPr>
+          <p:cNvPr id="18" name="Rounded Rectangle 17"/>
+          <p:cNvSpPr/>
+          <p:nvPr/>
+        </p:nvSpPr>
+        <p:spPr>
+          <a:xfrm>
+            <a:off x="4873752" y="3822192"/>
+            <a:ext cx="1554480" cy="365760"/>
+          </a:xfrm>
+          <a:prstGeom prst="roundRect">
+            <a:avLst>
+              <a:gd name="adj" fmla="val 50000"/>
+            </a:avLst>
+          </a:prstGeom>
+          <a:solidFill>
+            <a:srgbClr val="004C73"/>
+          </a:solidFill>
+          <a:ln>
+            <a:noFill/>
+          </a:ln>
+        </p:spPr>
+        <p:style>
+          <a:lnRef idx="1">
+            <a:schemeClr val="accent1"/>
+          </a:lnRef>
+          <a:fillRef idx="3">
+            <a:schemeClr val="accent1"/>
+          </a:fillRef>
+          <a:effectRef idx="2">
+            <a:schemeClr val="accent1"/>
+          </a:effectRef>
+          <a:fontRef idx="minor">
+            <a:schemeClr val="lt1"/>
+          </a:fontRef>
+        </p:style>
+        <p:txBody>
+          <a:bodyPr rtlCol="0" anchor="ctr" lIns="0" rIns="0" tIns="0" bIns="0"/>
+          <a:lstStyle/>
+          <a:p>
+            <a:pPr algn="ctr"/>
+            <a:r>
+              <a:rPr sz="1000" b="1">
+                <a:solidFill>
+                  <a:srgbClr val="FFFFFF"/>
+                </a:solidFill>
+                <a:latin typeface="Segoe UI"/>
+              </a:rPr>
+              <a:t>LIVE OUTPUT — 2/2</a:t>
+            </a:r>
+          </a:p>
+        </p:txBody>
+      </p:sp>
     </p:spTree>
   </p:cSld>
   <p:clrMapOvr>
@@ -7629,10 +9542,10 @@
                 <a:srgbClr val="FFFFFF"/>
               </a:gs>
               <a:gs pos="100000">
-                <a:srgbClr val="E8F4FC"/>
+                <a:srgbClr val="F1F7FB"/>
               </a:gs>
             </a:gsLst>
-            <a:lin scaled="0" ang="15000000"/>
+            <a:lin scaled="0" ang="14700000"/>
           </a:gradFill>
           <a:ln>
             <a:noFill/>
@@ -7662,29 +9575,21 @@
       </p:sp>
       <p:sp>
         <p:nvSpPr>
-          <p:cNvPr id="3" name="Rectangle 2"/>
-          <p:cNvSpPr/>
-          <p:nvPr/>
-        </p:nvSpPr>
-        <p:spPr>
-          <a:xfrm>
-            <a:off x="0" y="5303520"/>
-            <a:ext cx="12191695" cy="1554480"/>
-          </a:xfrm>
-          <a:prstGeom prst="rect">
+          <p:cNvPr id="3" name="Oval 2"/>
+          <p:cNvSpPr/>
+          <p:nvPr/>
+        </p:nvSpPr>
+        <p:spPr>
+          <a:xfrm>
+            <a:off x="9692640" y="4480560"/>
+            <a:ext cx="4754880" cy="4754880"/>
+          </a:xfrm>
+          <a:prstGeom prst="ellipse">
             <a:avLst/>
           </a:prstGeom>
-          <a:gradFill rotWithShape="1">
-            <a:gsLst>
-              <a:gs pos="0">
-                <a:srgbClr val="90E0EF"/>
-              </a:gs>
-              <a:gs pos="100000">
-                <a:srgbClr val="E8F4FC"/>
-              </a:gs>
-            </a:gsLst>
-            <a:lin scaled="0" ang="0"/>
-          </a:gradFill>
+          <a:solidFill>
+            <a:srgbClr val="90E0EF"/>
+          </a:solidFill>
           <a:ln>
             <a:noFill/>
           </a:ln>
@@ -7720,7 +9625,7 @@
         <p:spPr>
           <a:xfrm>
             <a:off x="0" y="0"/>
-            <a:ext cx="12191695" cy="109728"/>
+            <a:ext cx="12191695" cy="73152"/>
           </a:xfrm>
           <a:prstGeom prst="rect">
             <a:avLst/>
@@ -7764,32 +9669,41 @@
       </p:sp>
       <p:sp>
         <p:nvSpPr>
-          <p:cNvPr id="5" name="Rectangle 4"/>
-          <p:cNvSpPr/>
-          <p:nvPr/>
-        </p:nvSpPr>
-        <p:spPr>
-          <a:xfrm>
-            <a:off x="0" y="109728"/>
-            <a:ext cx="12191695" cy="960120"/>
-          </a:xfrm>
-          <a:prstGeom prst="rect">
-            <a:avLst/>
+          <p:cNvPr id="5" name="Rounded Rectangle 4"/>
+          <p:cNvSpPr/>
+          <p:nvPr/>
+        </p:nvSpPr>
+        <p:spPr>
+          <a:xfrm>
+            <a:off x="365760" y="292608"/>
+            <a:ext cx="11460175" cy="932688"/>
+          </a:xfrm>
+          <a:prstGeom prst="roundRect">
+            <a:avLst>
+              <a:gd name="adj" fmla="val 12000"/>
+            </a:avLst>
           </a:prstGeom>
           <a:gradFill rotWithShape="1">
             <a:gsLst>
               <a:gs pos="0">
-                <a:srgbClr val="005F8C"/>
+                <a:srgbClr val="004C73"/>
               </a:gs>
               <a:gs pos="100000">
                 <a:srgbClr val="0096C7"/>
               </a:gs>
             </a:gsLst>
-            <a:lin scaled="0" ang="0"/>
+            <a:lin scaled="0" ang="21120000"/>
           </a:gradFill>
           <a:ln>
             <a:noFill/>
           </a:ln>
+          <a:effectLst>
+            <a:outerShdw blurRad="128016" dist="45720" dir="5400000" rotWithShape="0">
+              <a:srgbClr val="1B3A4B">
+                <a:alpha val="26000"/>
+              </a:srgbClr>
+            </a:outerShdw>
+          </a:effectLst>
         </p:spPr>
         <p:style>
           <a:lnRef idx="1">
@@ -7815,14 +9729,66 @@
       </p:sp>
       <p:sp>
         <p:nvSpPr>
-          <p:cNvPr id="6" name="TextBox 5"/>
+          <p:cNvPr id="6" name="Oval 5"/>
+          <p:cNvSpPr/>
+          <p:nvPr/>
+        </p:nvSpPr>
+        <p:spPr>
+          <a:xfrm>
+            <a:off x="566928" y="438912"/>
+            <a:ext cx="658368" cy="658368"/>
+          </a:xfrm>
+          <a:prstGeom prst="ellipse">
+            <a:avLst/>
+          </a:prstGeom>
+          <a:solidFill>
+            <a:srgbClr val="FF7A45"/>
+          </a:solidFill>
+          <a:ln>
+            <a:noFill/>
+          </a:ln>
+        </p:spPr>
+        <p:style>
+          <a:lnRef idx="1">
+            <a:schemeClr val="accent1"/>
+          </a:lnRef>
+          <a:fillRef idx="3">
+            <a:schemeClr val="accent1"/>
+          </a:fillRef>
+          <a:effectRef idx="2">
+            <a:schemeClr val="accent1"/>
+          </a:effectRef>
+          <a:fontRef idx="minor">
+            <a:schemeClr val="lt1"/>
+          </a:fontRef>
+        </p:style>
+        <p:txBody>
+          <a:bodyPr rtlCol="0" anchor="ctr" wrap="none" lIns="0" rIns="0" tIns="0" bIns="0"/>
+          <a:lstStyle/>
+          <a:p>
+            <a:pPr algn="ctr"/>
+            <a:r>
+              <a:rPr sz="2000" b="1">
+                <a:solidFill>
+                  <a:srgbClr val="FFFFFF"/>
+                </a:solidFill>
+                <a:latin typeface="Segoe UI"/>
+              </a:rPr>
+              <a:t>5</a:t>
+            </a:r>
+          </a:p>
+        </p:txBody>
+      </p:sp>
+      <p:sp>
+        <p:nvSpPr>
+          <p:cNvPr id="7" name="TextBox 6"/>
           <p:cNvSpPr txBox="1"/>
           <p:nvPr/>
         </p:nvSpPr>
         <p:spPr>
           <a:xfrm>
-            <a:off x="502920" y="256032"/>
-            <a:ext cx="9601200" cy="685800"/>
+            <a:off x="1444752" y="384048"/>
+            <a:ext cx="9052560" cy="777240"/>
           </a:xfrm>
           <a:prstGeom prst="rect">
             <a:avLst/>
@@ -7830,17 +9796,17 @@
           <a:noFill/>
         </p:spPr>
         <p:txBody>
-          <a:bodyPr wrap="square">
+          <a:bodyPr wrap="square" anchor="ctr">
             <a:spAutoFit/>
           </a:bodyPr>
           <a:lstStyle/>
           <a:p>
             <a:r>
-              <a:rPr sz="2800" b="1">
+              <a:rPr sz="2500" b="1">
                 <a:solidFill>
                   <a:srgbClr val="FFFFFF"/>
                 </a:solidFill>
-                <a:latin typeface="Calibri"/>
+                <a:latin typeface="Segoe UI Semibold"/>
               </a:rPr>
               <a:t>SDLC — what AI may and may not do</a:t>
             </a:r>
@@ -7849,17 +9815,19 @@
       </p:sp>
       <p:sp>
         <p:nvSpPr>
-          <p:cNvPr id="7" name="Rounded Rectangle 6"/>
-          <p:cNvSpPr/>
-          <p:nvPr/>
-        </p:nvSpPr>
-        <p:spPr>
-          <a:xfrm>
-            <a:off x="10835640" y="320040"/>
-            <a:ext cx="960120" cy="411480"/>
+          <p:cNvPr id="8" name="Rounded Rectangle 7"/>
+          <p:cNvSpPr/>
+          <p:nvPr/>
+        </p:nvSpPr>
+        <p:spPr>
+          <a:xfrm>
+            <a:off x="10561320" y="457200"/>
+            <a:ext cx="1051560" cy="384048"/>
           </a:xfrm>
           <a:prstGeom prst="roundRect">
-            <a:avLst/>
+            <a:avLst>
+              <a:gd name="adj" fmla="val 50000"/>
+            </a:avLst>
           </a:prstGeom>
           <a:solidFill>
             <a:srgbClr val="FFFFFF"/>
@@ -7883,32 +9851,77 @@
           </a:fontRef>
         </p:style>
         <p:txBody>
+          <a:bodyPr rtlCol="0" anchor="ctr" lIns="0" rIns="0" tIns="0" bIns="0"/>
+          <a:lstStyle/>
+          <a:p>
+            <a:pPr algn="ctr"/>
+            <a:r>
+              <a:rPr sz="1200" b="1">
+                <a:solidFill>
+                  <a:srgbClr val="004C73"/>
+                </a:solidFill>
+                <a:latin typeface="Segoe UI"/>
+              </a:rPr>
+              <a:t>5 / 12</a:t>
+            </a:r>
+          </a:p>
+        </p:txBody>
+      </p:sp>
+      <p:sp>
+        <p:nvSpPr>
+          <p:cNvPr id="9" name="Rounded Rectangle 8"/>
+          <p:cNvSpPr/>
+          <p:nvPr/>
+        </p:nvSpPr>
+        <p:spPr>
+          <a:xfrm>
+            <a:off x="502920" y="1481328"/>
+            <a:ext cx="54864" cy="4709160"/>
+          </a:xfrm>
+          <a:prstGeom prst="roundRect">
+            <a:avLst>
+              <a:gd name="adj" fmla="val 50000"/>
+            </a:avLst>
+          </a:prstGeom>
+          <a:solidFill>
+            <a:srgbClr val="FF7A45"/>
+          </a:solidFill>
+          <a:ln>
+            <a:noFill/>
+          </a:ln>
+        </p:spPr>
+        <p:style>
+          <a:lnRef idx="1">
+            <a:schemeClr val="accent1"/>
+          </a:lnRef>
+          <a:fillRef idx="3">
+            <a:schemeClr val="accent1"/>
+          </a:fillRef>
+          <a:effectRef idx="2">
+            <a:schemeClr val="accent1"/>
+          </a:effectRef>
+          <a:fontRef idx="minor">
+            <a:schemeClr val="lt1"/>
+          </a:fontRef>
+        </p:style>
+        <p:txBody>
           <a:bodyPr rtlCol="0" anchor="ctr"/>
           <a:lstStyle/>
           <a:p>
             <a:pPr algn="ctr"/>
-            <a:r>
-              <a:rPr sz="1100" b="1">
-                <a:solidFill>
-                  <a:srgbClr val="FFFFFF"/>
-                </a:solidFill>
-                <a:latin typeface="Calibri"/>
-              </a:rPr>
-              <a:t>5/12</a:t>
-            </a:r>
-          </a:p>
-        </p:txBody>
-      </p:sp>
-      <p:sp>
-        <p:nvSpPr>
-          <p:cNvPr id="8" name="TextBox 7"/>
+          </a:p>
+        </p:txBody>
+      </p:sp>
+      <p:sp>
+        <p:nvSpPr>
+          <p:cNvPr id="10" name="TextBox 9"/>
           <p:cNvSpPr txBox="1"/>
           <p:nvPr/>
         </p:nvSpPr>
         <p:spPr>
           <a:xfrm>
-            <a:off x="502920" y="1325880"/>
-            <a:ext cx="3977639" cy="5120640"/>
+            <a:off x="749808" y="1417320"/>
+            <a:ext cx="3703320" cy="4892040"/>
           </a:xfrm>
           <a:prstGeom prst="rect">
             <a:avLst/>
@@ -7923,10 +9936,10 @@
           <a:p>
             <a:pPr>
               <a:lnSpc>
-                <a:spcPct val="115000"/>
+                <a:spcPct val="118000"/>
               </a:lnSpc>
               <a:spcAft>
-                <a:spcPts val="1400"/>
+                <a:spcPts val="1600"/>
               </a:spcAft>
             </a:pPr>
             <a:r>
@@ -7934,16 +9947,16 @@
                 <a:solidFill>
                   <a:srgbClr val="0096C7"/>
                 </a:solidFill>
-                <a:latin typeface="Calibri"/>
-              </a:rPr>
-              <a:t>●  </a:t>
+                <a:latin typeface="Segoe UI Semibold"/>
+              </a:rPr>
+              <a:t>01  </a:t>
             </a:r>
             <a:r>
               <a:rPr sz="1500" b="0">
                 <a:solidFill>
                   <a:srgbClr val="334155"/>
                 </a:solidFill>
-                <a:latin typeface="Calibri"/>
+                <a:latin typeface="Segoe UI"/>
               </a:rPr>
               <a:t>AI may draft; it may not approve, merge, deploy, or take payment</a:t>
             </a:r>
@@ -7951,10 +9964,10 @@
           <a:p>
             <a:pPr>
               <a:lnSpc>
-                <a:spcPct val="115000"/>
+                <a:spcPct val="118000"/>
               </a:lnSpc>
               <a:spcAft>
-                <a:spcPts val="1400"/>
+                <a:spcPts val="1600"/>
               </a:spcAft>
             </a:pPr>
             <a:r>
@@ -7962,16 +9975,16 @@
                 <a:solidFill>
                   <a:srgbClr val="0096C7"/>
                 </a:solidFill>
-                <a:latin typeface="Calibri"/>
-              </a:rPr>
-              <a:t>●  </a:t>
+                <a:latin typeface="Segoe UI Semibold"/>
+              </a:rPr>
+              <a:t>02  </a:t>
             </a:r>
             <a:r>
               <a:rPr sz="1500" b="0">
                 <a:solidFill>
                   <a:srgbClr val="334155"/>
                 </a:solidFill>
-                <a:latin typeface="Calibri"/>
+                <a:latin typeface="Segoe UI"/>
               </a:rPr>
               <a:t>Review: specialist first pass + adversarial verification</a:t>
             </a:r>
@@ -7979,10 +9992,10 @@
           <a:p>
             <a:pPr>
               <a:lnSpc>
-                <a:spcPct val="115000"/>
+                <a:spcPct val="118000"/>
               </a:lnSpc>
               <a:spcAft>
-                <a:spcPts val="1400"/>
+                <a:spcPts val="1600"/>
               </a:spcAft>
             </a:pPr>
             <a:r>
@@ -7990,16 +10003,16 @@
                 <a:solidFill>
                   <a:srgbClr val="0096C7"/>
                 </a:solidFill>
-                <a:latin typeface="Calibri"/>
-              </a:rPr>
-              <a:t>●  </a:t>
+                <a:latin typeface="Segoe UI Semibold"/>
+              </a:rPr>
+              <a:t>03  </a:t>
             </a:r>
             <a:r>
               <a:rPr sz="1500" b="0">
                 <a:solidFill>
                   <a:srgbClr val="334155"/>
                 </a:solidFill>
-                <a:latin typeface="Calibri"/>
+                <a:latin typeface="Segoe UI"/>
               </a:rPr>
               <a:t>Human accountable at every gate — especially in SOX scope</a:t>
             </a:r>
@@ -8008,14 +10021,57 @@
       </p:sp>
       <p:sp>
         <p:nvSpPr>
-          <p:cNvPr id="9" name="TextBox 8"/>
+          <p:cNvPr id="11" name="Rectangle 10"/>
+          <p:cNvSpPr/>
+          <p:nvPr/>
+        </p:nvSpPr>
+        <p:spPr>
+          <a:xfrm>
+            <a:off x="502920" y="6382512"/>
+            <a:ext cx="11183112" cy="12700"/>
+          </a:xfrm>
+          <a:prstGeom prst="rect">
+            <a:avLst/>
+          </a:prstGeom>
+          <a:solidFill>
+            <a:srgbClr val="D8ECF7"/>
+          </a:solidFill>
+          <a:ln>
+            <a:noFill/>
+          </a:ln>
+        </p:spPr>
+        <p:style>
+          <a:lnRef idx="1">
+            <a:schemeClr val="accent1"/>
+          </a:lnRef>
+          <a:fillRef idx="3">
+            <a:schemeClr val="accent1"/>
+          </a:fillRef>
+          <a:effectRef idx="2">
+            <a:schemeClr val="accent1"/>
+          </a:effectRef>
+          <a:fontRef idx="minor">
+            <a:schemeClr val="lt1"/>
+          </a:fontRef>
+        </p:style>
+        <p:txBody>
+          <a:bodyPr rtlCol="0" anchor="ctr"/>
+          <a:lstStyle/>
+          <a:p>
+            <a:pPr algn="ctr"/>
+          </a:p>
+        </p:txBody>
+      </p:sp>
+      <p:sp>
+        <p:nvSpPr>
+          <p:cNvPr id="12" name="TextBox 11"/>
           <p:cNvSpPr txBox="1"/>
           <p:nvPr/>
         </p:nvSpPr>
         <p:spPr>
           <a:xfrm>
-            <a:off x="502920" y="6446520"/>
-            <a:ext cx="7315200" cy="320040"/>
+            <a:off x="502920" y="6455664"/>
+            <a:ext cx="10652760" cy="292608"/>
           </a:xfrm>
           <a:prstGeom prst="rect">
             <a:avLst/>
@@ -8033,35 +10089,44 @@
                 <a:solidFill>
                   <a:srgbClr val="64748B"/>
                 </a:solidFill>
-                <a:latin typeface="Calibri"/>
-              </a:rPr>
-              <a:t>RCG Principal Engineer · Part 2 · Agentic Development Strategy</a:t>
-            </a:r>
-          </a:p>
-        </p:txBody>
-      </p:sp>
-      <p:sp>
-        <p:nvSpPr>
-          <p:cNvPr id="10" name="Rounded Rectangle 9"/>
-          <p:cNvSpPr/>
-          <p:nvPr/>
-        </p:nvSpPr>
-        <p:spPr>
-          <a:xfrm>
-            <a:off x="4709160" y="1325880"/>
-            <a:ext cx="7178040" cy="4892040"/>
+                <a:latin typeface="Segoe UI"/>
+              </a:rPr>
+              <a:t>RCG Principal Engineer  ·  Part 2  ·  Agentic Development Strategy</a:t>
+            </a:r>
+          </a:p>
+        </p:txBody>
+      </p:sp>
+      <p:sp>
+        <p:nvSpPr>
+          <p:cNvPr id="13" name="Rounded Rectangle 12"/>
+          <p:cNvSpPr/>
+          <p:nvPr/>
+        </p:nvSpPr>
+        <p:spPr>
+          <a:xfrm>
+            <a:off x="4709160" y="1536192"/>
+            <a:ext cx="7178040" cy="4709160"/>
           </a:xfrm>
           <a:prstGeom prst="roundRect">
-            <a:avLst/>
+            <a:avLst>
+              <a:gd name="adj" fmla="val 4500"/>
+            </a:avLst>
           </a:prstGeom>
           <a:solidFill>
             <a:srgbClr val="FFFFFF"/>
           </a:solidFill>
-          <a:ln w="15875">
+          <a:ln w="12700">
             <a:solidFill>
-              <a:srgbClr val="CBE8F5"/>
+              <a:srgbClr val="D8ECF7"/>
             </a:solidFill>
           </a:ln>
+          <a:effectLst>
+            <a:outerShdw blurRad="146304" dist="54864" dir="5400000" rotWithShape="0">
+              <a:srgbClr val="1B3A4B">
+                <a:alpha val="22000"/>
+              </a:srgbClr>
+            </a:outerShdw>
+          </a:effectLst>
         </p:spPr>
         <p:style>
           <a:lnRef idx="1">
@@ -8087,7 +10152,7 @@
       </p:sp>
       <p:pic>
         <p:nvPicPr>
-          <p:cNvPr id="11" name="Picture 10" descr="slide-05-answer-cache.png"/>
+          <p:cNvPr id="14" name="Picture 13" descr="slide-05-answer-cache.png"/>
           <p:cNvPicPr>
             <a:picLocks noChangeAspect="1"/>
           </p:cNvPicPr>
@@ -8101,14 +10166,68 @@
         </p:blipFill>
         <p:spPr>
           <a:xfrm>
-            <a:off x="4782312" y="1399032"/>
-            <a:ext cx="7031736" cy="4745736"/>
+            <a:off x="4791456" y="1618488"/>
+            <a:ext cx="7013448" cy="4544568"/>
           </a:xfrm>
           <a:prstGeom prst="rect">
             <a:avLst/>
           </a:prstGeom>
         </p:spPr>
       </p:pic>
+      <p:sp>
+        <p:nvSpPr>
+          <p:cNvPr id="15" name="Rounded Rectangle 14"/>
+          <p:cNvSpPr/>
+          <p:nvPr/>
+        </p:nvSpPr>
+        <p:spPr>
+          <a:xfrm>
+            <a:off x="4873752" y="1353312"/>
+            <a:ext cx="1554480" cy="365760"/>
+          </a:xfrm>
+          <a:prstGeom prst="roundRect">
+            <a:avLst>
+              <a:gd name="adj" fmla="val 50000"/>
+            </a:avLst>
+          </a:prstGeom>
+          <a:solidFill>
+            <a:srgbClr val="004C73"/>
+          </a:solidFill>
+          <a:ln>
+            <a:noFill/>
+          </a:ln>
+        </p:spPr>
+        <p:style>
+          <a:lnRef idx="1">
+            <a:schemeClr val="accent1"/>
+          </a:lnRef>
+          <a:fillRef idx="3">
+            <a:schemeClr val="accent1"/>
+          </a:fillRef>
+          <a:effectRef idx="2">
+            <a:schemeClr val="accent1"/>
+          </a:effectRef>
+          <a:fontRef idx="minor">
+            <a:schemeClr val="lt1"/>
+          </a:fontRef>
+        </p:style>
+        <p:txBody>
+          <a:bodyPr rtlCol="0" anchor="ctr" lIns="0" rIns="0" tIns="0" bIns="0"/>
+          <a:lstStyle/>
+          <a:p>
+            <a:pPr algn="ctr"/>
+            <a:r>
+              <a:rPr sz="1000" b="1">
+                <a:solidFill>
+                  <a:srgbClr val="FFFFFF"/>
+                </a:solidFill>
+                <a:latin typeface="Segoe UI"/>
+              </a:rPr>
+              <a:t>LIVE OUTPUT</a:t>
+            </a:r>
+          </a:p>
+        </p:txBody>
+      </p:sp>
     </p:spTree>
   </p:cSld>
   <p:clrMapOvr>
@@ -8147,10 +10266,10 @@
                 <a:srgbClr val="FFFFFF"/>
               </a:gs>
               <a:gs pos="100000">
-                <a:srgbClr val="E8F4FC"/>
+                <a:srgbClr val="F1F7FB"/>
               </a:gs>
             </a:gsLst>
-            <a:lin scaled="0" ang="15000000"/>
+            <a:lin scaled="0" ang="14700000"/>
           </a:gradFill>
           <a:ln>
             <a:noFill/>
@@ -8180,29 +10299,21 @@
       </p:sp>
       <p:sp>
         <p:nvSpPr>
-          <p:cNvPr id="3" name="Rectangle 2"/>
-          <p:cNvSpPr/>
-          <p:nvPr/>
-        </p:nvSpPr>
-        <p:spPr>
-          <a:xfrm>
-            <a:off x="0" y="5303520"/>
-            <a:ext cx="12191695" cy="1554480"/>
-          </a:xfrm>
-          <a:prstGeom prst="rect">
+          <p:cNvPr id="3" name="Oval 2"/>
+          <p:cNvSpPr/>
+          <p:nvPr/>
+        </p:nvSpPr>
+        <p:spPr>
+          <a:xfrm>
+            <a:off x="9692640" y="4480560"/>
+            <a:ext cx="4754880" cy="4754880"/>
+          </a:xfrm>
+          <a:prstGeom prst="ellipse">
             <a:avLst/>
           </a:prstGeom>
-          <a:gradFill rotWithShape="1">
-            <a:gsLst>
-              <a:gs pos="0">
-                <a:srgbClr val="90E0EF"/>
-              </a:gs>
-              <a:gs pos="100000">
-                <a:srgbClr val="E8F4FC"/>
-              </a:gs>
-            </a:gsLst>
-            <a:lin scaled="0" ang="0"/>
-          </a:gradFill>
+          <a:solidFill>
+            <a:srgbClr val="90E0EF"/>
+          </a:solidFill>
           <a:ln>
             <a:noFill/>
           </a:ln>
@@ -8238,7 +10349,7 @@
         <p:spPr>
           <a:xfrm>
             <a:off x="0" y="0"/>
-            <a:ext cx="12191695" cy="109728"/>
+            <a:ext cx="12191695" cy="73152"/>
           </a:xfrm>
           <a:prstGeom prst="rect">
             <a:avLst/>
@@ -8282,32 +10393,41 @@
       </p:sp>
       <p:sp>
         <p:nvSpPr>
-          <p:cNvPr id="5" name="Rectangle 4"/>
-          <p:cNvSpPr/>
-          <p:nvPr/>
-        </p:nvSpPr>
-        <p:spPr>
-          <a:xfrm>
-            <a:off x="0" y="109728"/>
-            <a:ext cx="12191695" cy="960120"/>
-          </a:xfrm>
-          <a:prstGeom prst="rect">
-            <a:avLst/>
+          <p:cNvPr id="5" name="Rounded Rectangle 4"/>
+          <p:cNvSpPr/>
+          <p:nvPr/>
+        </p:nvSpPr>
+        <p:spPr>
+          <a:xfrm>
+            <a:off x="365760" y="292608"/>
+            <a:ext cx="11460175" cy="932688"/>
+          </a:xfrm>
+          <a:prstGeom prst="roundRect">
+            <a:avLst>
+              <a:gd name="adj" fmla="val 12000"/>
+            </a:avLst>
           </a:prstGeom>
           <a:gradFill rotWithShape="1">
             <a:gsLst>
               <a:gs pos="0">
-                <a:srgbClr val="005F8C"/>
+                <a:srgbClr val="004C73"/>
               </a:gs>
               <a:gs pos="100000">
                 <a:srgbClr val="0096C7"/>
               </a:gs>
             </a:gsLst>
-            <a:lin scaled="0" ang="0"/>
+            <a:lin scaled="0" ang="21120000"/>
           </a:gradFill>
           <a:ln>
             <a:noFill/>
           </a:ln>
+          <a:effectLst>
+            <a:outerShdw blurRad="128016" dist="45720" dir="5400000" rotWithShape="0">
+              <a:srgbClr val="1B3A4B">
+                <a:alpha val="26000"/>
+              </a:srgbClr>
+            </a:outerShdw>
+          </a:effectLst>
         </p:spPr>
         <p:style>
           <a:lnRef idx="1">
@@ -8333,14 +10453,66 @@
       </p:sp>
       <p:sp>
         <p:nvSpPr>
-          <p:cNvPr id="6" name="TextBox 5"/>
+          <p:cNvPr id="6" name="Oval 5"/>
+          <p:cNvSpPr/>
+          <p:nvPr/>
+        </p:nvSpPr>
+        <p:spPr>
+          <a:xfrm>
+            <a:off x="566928" y="438912"/>
+            <a:ext cx="658368" cy="658368"/>
+          </a:xfrm>
+          <a:prstGeom prst="ellipse">
+            <a:avLst/>
+          </a:prstGeom>
+          <a:solidFill>
+            <a:srgbClr val="FF7A45"/>
+          </a:solidFill>
+          <a:ln>
+            <a:noFill/>
+          </a:ln>
+        </p:spPr>
+        <p:style>
+          <a:lnRef idx="1">
+            <a:schemeClr val="accent1"/>
+          </a:lnRef>
+          <a:fillRef idx="3">
+            <a:schemeClr val="accent1"/>
+          </a:fillRef>
+          <a:effectRef idx="2">
+            <a:schemeClr val="accent1"/>
+          </a:effectRef>
+          <a:fontRef idx="minor">
+            <a:schemeClr val="lt1"/>
+          </a:fontRef>
+        </p:style>
+        <p:txBody>
+          <a:bodyPr rtlCol="0" anchor="ctr" wrap="none" lIns="0" rIns="0" tIns="0" bIns="0"/>
+          <a:lstStyle/>
+          <a:p>
+            <a:pPr algn="ctr"/>
+            <a:r>
+              <a:rPr sz="2000" b="1">
+                <a:solidFill>
+                  <a:srgbClr val="FFFFFF"/>
+                </a:solidFill>
+                <a:latin typeface="Segoe UI"/>
+              </a:rPr>
+              <a:t>6</a:t>
+            </a:r>
+          </a:p>
+        </p:txBody>
+      </p:sp>
+      <p:sp>
+        <p:nvSpPr>
+          <p:cNvPr id="7" name="TextBox 6"/>
           <p:cNvSpPr txBox="1"/>
           <p:nvPr/>
         </p:nvSpPr>
         <p:spPr>
           <a:xfrm>
-            <a:off x="502920" y="256032"/>
-            <a:ext cx="9601200" cy="685800"/>
+            <a:off x="1444752" y="384048"/>
+            <a:ext cx="9052560" cy="777240"/>
           </a:xfrm>
           <a:prstGeom prst="rect">
             <a:avLst/>
@@ -8348,17 +10520,17 @@
           <a:noFill/>
         </p:spPr>
         <p:txBody>
-          <a:bodyPr wrap="square">
+          <a:bodyPr wrap="square" anchor="ctr">
             <a:spAutoFit/>
           </a:bodyPr>
           <a:lstStyle/>
           <a:p>
             <a:r>
-              <a:rPr sz="2800" b="1">
+              <a:rPr sz="2500" b="1">
                 <a:solidFill>
                   <a:srgbClr val="FFFFFF"/>
                 </a:solidFill>
-                <a:latin typeface="Calibri"/>
+                <a:latin typeface="Segoe UI Semibold"/>
               </a:rPr>
               <a:t>Safety, SOX, IP — live control</a:t>
             </a:r>
@@ -8367,17 +10539,19 @@
       </p:sp>
       <p:sp>
         <p:nvSpPr>
-          <p:cNvPr id="7" name="Rounded Rectangle 6"/>
-          <p:cNvSpPr/>
-          <p:nvPr/>
-        </p:nvSpPr>
-        <p:spPr>
-          <a:xfrm>
-            <a:off x="10835640" y="320040"/>
-            <a:ext cx="960120" cy="411480"/>
+          <p:cNvPr id="8" name="Rounded Rectangle 7"/>
+          <p:cNvSpPr/>
+          <p:nvPr/>
+        </p:nvSpPr>
+        <p:spPr>
+          <a:xfrm>
+            <a:off x="10561320" y="457200"/>
+            <a:ext cx="1051560" cy="384048"/>
           </a:xfrm>
           <a:prstGeom prst="roundRect">
-            <a:avLst/>
+            <a:avLst>
+              <a:gd name="adj" fmla="val 50000"/>
+            </a:avLst>
           </a:prstGeom>
           <a:solidFill>
             <a:srgbClr val="FFFFFF"/>
@@ -8401,32 +10575,77 @@
           </a:fontRef>
         </p:style>
         <p:txBody>
+          <a:bodyPr rtlCol="0" anchor="ctr" lIns="0" rIns="0" tIns="0" bIns="0"/>
+          <a:lstStyle/>
+          <a:p>
+            <a:pPr algn="ctr"/>
+            <a:r>
+              <a:rPr sz="1200" b="1">
+                <a:solidFill>
+                  <a:srgbClr val="004C73"/>
+                </a:solidFill>
+                <a:latin typeface="Segoe UI"/>
+              </a:rPr>
+              <a:t>6 / 12</a:t>
+            </a:r>
+          </a:p>
+        </p:txBody>
+      </p:sp>
+      <p:sp>
+        <p:nvSpPr>
+          <p:cNvPr id="9" name="Rounded Rectangle 8"/>
+          <p:cNvSpPr/>
+          <p:nvPr/>
+        </p:nvSpPr>
+        <p:spPr>
+          <a:xfrm>
+            <a:off x="502920" y="1481328"/>
+            <a:ext cx="54864" cy="4709160"/>
+          </a:xfrm>
+          <a:prstGeom prst="roundRect">
+            <a:avLst>
+              <a:gd name="adj" fmla="val 50000"/>
+            </a:avLst>
+          </a:prstGeom>
+          <a:solidFill>
+            <a:srgbClr val="FF7A45"/>
+          </a:solidFill>
+          <a:ln>
+            <a:noFill/>
+          </a:ln>
+        </p:spPr>
+        <p:style>
+          <a:lnRef idx="1">
+            <a:schemeClr val="accent1"/>
+          </a:lnRef>
+          <a:fillRef idx="3">
+            <a:schemeClr val="accent1"/>
+          </a:fillRef>
+          <a:effectRef idx="2">
+            <a:schemeClr val="accent1"/>
+          </a:effectRef>
+          <a:fontRef idx="minor">
+            <a:schemeClr val="lt1"/>
+          </a:fontRef>
+        </p:style>
+        <p:txBody>
           <a:bodyPr rtlCol="0" anchor="ctr"/>
           <a:lstStyle/>
           <a:p>
             <a:pPr algn="ctr"/>
-            <a:r>
-              <a:rPr sz="1100" b="1">
-                <a:solidFill>
-                  <a:srgbClr val="FFFFFF"/>
-                </a:solidFill>
-                <a:latin typeface="Calibri"/>
-              </a:rPr>
-              <a:t>6/12</a:t>
-            </a:r>
-          </a:p>
-        </p:txBody>
-      </p:sp>
-      <p:sp>
-        <p:nvSpPr>
-          <p:cNvPr id="8" name="TextBox 7"/>
+          </a:p>
+        </p:txBody>
+      </p:sp>
+      <p:sp>
+        <p:nvSpPr>
+          <p:cNvPr id="10" name="TextBox 9"/>
           <p:cNvSpPr txBox="1"/>
           <p:nvPr/>
         </p:nvSpPr>
         <p:spPr>
           <a:xfrm>
-            <a:off x="502920" y="1325880"/>
-            <a:ext cx="3977639" cy="5120640"/>
+            <a:off x="749808" y="1417320"/>
+            <a:ext cx="3703320" cy="4892040"/>
           </a:xfrm>
           <a:prstGeom prst="rect">
             <a:avLst/>
@@ -8441,10 +10660,10 @@
           <a:p>
             <a:pPr>
               <a:lnSpc>
-                <a:spcPct val="115000"/>
+                <a:spcPct val="118000"/>
               </a:lnSpc>
               <a:spcAft>
-                <a:spcPts val="1400"/>
+                <a:spcPts val="1600"/>
               </a:spcAft>
             </a:pPr>
             <a:r>
@@ -8452,16 +10671,16 @@
                 <a:solidFill>
                   <a:srgbClr val="0096C7"/>
                 </a:solidFill>
-                <a:latin typeface="Calibri"/>
-              </a:rPr>
-              <a:t>●  </a:t>
+                <a:latin typeface="Segoe UI Semibold"/>
+              </a:rPr>
+              <a:t>01  </a:t>
             </a:r>
             <a:r>
               <a:rPr sz="1500" b="0">
                 <a:solidFill>
                   <a:srgbClr val="334155"/>
                 </a:solidFill>
-                <a:latin typeface="Calibri"/>
+                <a:latin typeface="Segoe UI"/>
               </a:rPr>
               <a:t>One protected-paths.json → pre-commit block + CI evidence</a:t>
             </a:r>
@@ -8469,10 +10688,10 @@
           <a:p>
             <a:pPr>
               <a:lnSpc>
-                <a:spcPct val="115000"/>
+                <a:spcPct val="118000"/>
               </a:lnSpc>
               <a:spcAft>
-                <a:spcPts val="1400"/>
+                <a:spcPts val="1600"/>
               </a:spcAft>
             </a:pPr>
             <a:r>
@@ -8480,16 +10699,16 @@
                 <a:solidFill>
                   <a:srgbClr val="0096C7"/>
                 </a:solidFill>
-                <a:latin typeface="Calibri"/>
-              </a:rPr>
-              <a:t>●  </a:t>
+                <a:latin typeface="Segoe UI Semibold"/>
+              </a:rPr>
+              <a:t>02  </a:t>
             </a:r>
             <a:r>
               <a:rPr sz="1500" b="0">
                 <a:solidFill>
                   <a:srgbClr val="334155"/>
                 </a:solidFill>
-                <a:latin typeface="Calibri"/>
+                <a:latin typeface="Segoe UI"/>
               </a:rPr>
               <a:t>Preventive: hook rejects revenue-relevant commit</a:t>
             </a:r>
@@ -8497,10 +10716,10 @@
           <a:p>
             <a:pPr>
               <a:lnSpc>
-                <a:spcPct val="115000"/>
+                <a:spcPct val="118000"/>
               </a:lnSpc>
               <a:spcAft>
-                <a:spcPts val="1400"/>
+                <a:spcPts val="1600"/>
               </a:spcAft>
             </a:pPr>
             <a:r>
@@ -8508,16 +10727,16 @@
                 <a:solidFill>
                   <a:srgbClr val="0096C7"/>
                 </a:solidFill>
-                <a:latin typeface="Calibri"/>
-              </a:rPr>
-              <a:t>●  </a:t>
+                <a:latin typeface="Segoe UI Semibold"/>
+              </a:rPr>
+              <a:t>03  </a:t>
             </a:r>
             <a:r>
               <a:rPr sz="1500" b="0">
                 <a:solidFill>
                   <a:srgbClr val="334155"/>
                 </a:solidFill>
-                <a:latin typeface="Calibri"/>
+                <a:latin typeface="Segoe UI"/>
               </a:rPr>
               <a:t>Detective: sox-evidence.py catches --no-verify · SCM + CI = system of record</a:t>
             </a:r>
@@ -8526,14 +10745,57 @@
       </p:sp>
       <p:sp>
         <p:nvSpPr>
-          <p:cNvPr id="9" name="TextBox 8"/>
+          <p:cNvPr id="11" name="Rectangle 10"/>
+          <p:cNvSpPr/>
+          <p:nvPr/>
+        </p:nvSpPr>
+        <p:spPr>
+          <a:xfrm>
+            <a:off x="502920" y="6382512"/>
+            <a:ext cx="11183112" cy="12700"/>
+          </a:xfrm>
+          <a:prstGeom prst="rect">
+            <a:avLst/>
+          </a:prstGeom>
+          <a:solidFill>
+            <a:srgbClr val="D8ECF7"/>
+          </a:solidFill>
+          <a:ln>
+            <a:noFill/>
+          </a:ln>
+        </p:spPr>
+        <p:style>
+          <a:lnRef idx="1">
+            <a:schemeClr val="accent1"/>
+          </a:lnRef>
+          <a:fillRef idx="3">
+            <a:schemeClr val="accent1"/>
+          </a:fillRef>
+          <a:effectRef idx="2">
+            <a:schemeClr val="accent1"/>
+          </a:effectRef>
+          <a:fontRef idx="minor">
+            <a:schemeClr val="lt1"/>
+          </a:fontRef>
+        </p:style>
+        <p:txBody>
+          <a:bodyPr rtlCol="0" anchor="ctr"/>
+          <a:lstStyle/>
+          <a:p>
+            <a:pPr algn="ctr"/>
+          </a:p>
+        </p:txBody>
+      </p:sp>
+      <p:sp>
+        <p:nvSpPr>
+          <p:cNvPr id="12" name="TextBox 11"/>
           <p:cNvSpPr txBox="1"/>
           <p:nvPr/>
         </p:nvSpPr>
         <p:spPr>
           <a:xfrm>
-            <a:off x="502920" y="6446520"/>
-            <a:ext cx="7315200" cy="320040"/>
+            <a:off x="502920" y="6455664"/>
+            <a:ext cx="10652760" cy="292608"/>
           </a:xfrm>
           <a:prstGeom prst="rect">
             <a:avLst/>
@@ -8551,35 +10813,44 @@
                 <a:solidFill>
                   <a:srgbClr val="64748B"/>
                 </a:solidFill>
-                <a:latin typeface="Calibri"/>
-              </a:rPr>
-              <a:t>RCG Principal Engineer · Part 2 · Agentic Development Strategy</a:t>
-            </a:r>
-          </a:p>
-        </p:txBody>
-      </p:sp>
-      <p:sp>
-        <p:nvSpPr>
-          <p:cNvPr id="10" name="Rounded Rectangle 9"/>
-          <p:cNvSpPr/>
-          <p:nvPr/>
-        </p:nvSpPr>
-        <p:spPr>
-          <a:xfrm>
-            <a:off x="4709160" y="1325880"/>
-            <a:ext cx="7178040" cy="4892040"/>
+                <a:latin typeface="Segoe UI"/>
+              </a:rPr>
+              <a:t>RCG Principal Engineer  ·  Part 2  ·  Agentic Development Strategy</a:t>
+            </a:r>
+          </a:p>
+        </p:txBody>
+      </p:sp>
+      <p:sp>
+        <p:nvSpPr>
+          <p:cNvPr id="13" name="Rounded Rectangle 12"/>
+          <p:cNvSpPr/>
+          <p:nvPr/>
+        </p:nvSpPr>
+        <p:spPr>
+          <a:xfrm>
+            <a:off x="4709160" y="1536192"/>
+            <a:ext cx="7178040" cy="4709160"/>
           </a:xfrm>
           <a:prstGeom prst="roundRect">
-            <a:avLst/>
+            <a:avLst>
+              <a:gd name="adj" fmla="val 4500"/>
+            </a:avLst>
           </a:prstGeom>
           <a:solidFill>
             <a:srgbClr val="FFFFFF"/>
           </a:solidFill>
-          <a:ln w="15875">
+          <a:ln w="12700">
             <a:solidFill>
-              <a:srgbClr val="CBE8F5"/>
+              <a:srgbClr val="D8ECF7"/>
             </a:solidFill>
           </a:ln>
+          <a:effectLst>
+            <a:outerShdw blurRad="146304" dist="54864" dir="5400000" rotWithShape="0">
+              <a:srgbClr val="1B3A4B">
+                <a:alpha val="22000"/>
+              </a:srgbClr>
+            </a:outerShdw>
+          </a:effectLst>
         </p:spPr>
         <p:style>
           <a:lnRef idx="1">
@@ -8605,7 +10876,7 @@
       </p:sp>
       <p:pic>
         <p:nvPicPr>
-          <p:cNvPr id="11" name="Picture 10" descr="slide-06-sox-evidence.png"/>
+          <p:cNvPr id="14" name="Picture 13" descr="slide-06-sox-evidence.png"/>
           <p:cNvPicPr>
             <a:picLocks noChangeAspect="1"/>
           </p:cNvPicPr>
@@ -8619,14 +10890,68 @@
         </p:blipFill>
         <p:spPr>
           <a:xfrm>
-            <a:off x="4782312" y="1399032"/>
-            <a:ext cx="7031736" cy="4745736"/>
+            <a:off x="4791456" y="1618488"/>
+            <a:ext cx="7013448" cy="4544568"/>
           </a:xfrm>
           <a:prstGeom prst="rect">
             <a:avLst/>
           </a:prstGeom>
         </p:spPr>
       </p:pic>
+      <p:sp>
+        <p:nvSpPr>
+          <p:cNvPr id="15" name="Rounded Rectangle 14"/>
+          <p:cNvSpPr/>
+          <p:nvPr/>
+        </p:nvSpPr>
+        <p:spPr>
+          <a:xfrm>
+            <a:off x="4873752" y="1353312"/>
+            <a:ext cx="1554480" cy="365760"/>
+          </a:xfrm>
+          <a:prstGeom prst="roundRect">
+            <a:avLst>
+              <a:gd name="adj" fmla="val 50000"/>
+            </a:avLst>
+          </a:prstGeom>
+          <a:solidFill>
+            <a:srgbClr val="004C73"/>
+          </a:solidFill>
+          <a:ln>
+            <a:noFill/>
+          </a:ln>
+        </p:spPr>
+        <p:style>
+          <a:lnRef idx="1">
+            <a:schemeClr val="accent1"/>
+          </a:lnRef>
+          <a:fillRef idx="3">
+            <a:schemeClr val="accent1"/>
+          </a:fillRef>
+          <a:effectRef idx="2">
+            <a:schemeClr val="accent1"/>
+          </a:effectRef>
+          <a:fontRef idx="minor">
+            <a:schemeClr val="lt1"/>
+          </a:fontRef>
+        </p:style>
+        <p:txBody>
+          <a:bodyPr rtlCol="0" anchor="ctr" lIns="0" rIns="0" tIns="0" bIns="0"/>
+          <a:lstStyle/>
+          <a:p>
+            <a:pPr algn="ctr"/>
+            <a:r>
+              <a:rPr sz="1000" b="1">
+                <a:solidFill>
+                  <a:srgbClr val="FFFFFF"/>
+                </a:solidFill>
+                <a:latin typeface="Segoe UI"/>
+              </a:rPr>
+              <a:t>LIVE OUTPUT</a:t>
+            </a:r>
+          </a:p>
+        </p:txBody>
+      </p:sp>
     </p:spTree>
   </p:cSld>
   <p:clrMapOvr>
@@ -8665,10 +10990,10 @@
                 <a:srgbClr val="FFFFFF"/>
               </a:gs>
               <a:gs pos="100000">
-                <a:srgbClr val="E8F4FC"/>
+                <a:srgbClr val="F1F7FB"/>
               </a:gs>
             </a:gsLst>
-            <a:lin scaled="0" ang="15000000"/>
+            <a:lin scaled="0" ang="14700000"/>
           </a:gradFill>
           <a:ln>
             <a:noFill/>
@@ -8698,29 +11023,21 @@
       </p:sp>
       <p:sp>
         <p:nvSpPr>
-          <p:cNvPr id="3" name="Rectangle 2"/>
-          <p:cNvSpPr/>
-          <p:nvPr/>
-        </p:nvSpPr>
-        <p:spPr>
-          <a:xfrm>
-            <a:off x="0" y="5303520"/>
-            <a:ext cx="12191695" cy="1554480"/>
-          </a:xfrm>
-          <a:prstGeom prst="rect">
+          <p:cNvPr id="3" name="Oval 2"/>
+          <p:cNvSpPr/>
+          <p:nvPr/>
+        </p:nvSpPr>
+        <p:spPr>
+          <a:xfrm>
+            <a:off x="9692640" y="4480560"/>
+            <a:ext cx="4754880" cy="4754880"/>
+          </a:xfrm>
+          <a:prstGeom prst="ellipse">
             <a:avLst/>
           </a:prstGeom>
-          <a:gradFill rotWithShape="1">
-            <a:gsLst>
-              <a:gs pos="0">
-                <a:srgbClr val="90E0EF"/>
-              </a:gs>
-              <a:gs pos="100000">
-                <a:srgbClr val="E8F4FC"/>
-              </a:gs>
-            </a:gsLst>
-            <a:lin scaled="0" ang="0"/>
-          </a:gradFill>
+          <a:solidFill>
+            <a:srgbClr val="90E0EF"/>
+          </a:solidFill>
           <a:ln>
             <a:noFill/>
           </a:ln>
@@ -8756,7 +11073,7 @@
         <p:spPr>
           <a:xfrm>
             <a:off x="0" y="0"/>
-            <a:ext cx="12191695" cy="109728"/>
+            <a:ext cx="12191695" cy="73152"/>
           </a:xfrm>
           <a:prstGeom prst="rect">
             <a:avLst/>
@@ -8800,32 +11117,41 @@
       </p:sp>
       <p:sp>
         <p:nvSpPr>
-          <p:cNvPr id="5" name="Rectangle 4"/>
-          <p:cNvSpPr/>
-          <p:nvPr/>
-        </p:nvSpPr>
-        <p:spPr>
-          <a:xfrm>
-            <a:off x="0" y="109728"/>
-            <a:ext cx="12191695" cy="960120"/>
-          </a:xfrm>
-          <a:prstGeom prst="rect">
-            <a:avLst/>
+          <p:cNvPr id="5" name="Rounded Rectangle 4"/>
+          <p:cNvSpPr/>
+          <p:nvPr/>
+        </p:nvSpPr>
+        <p:spPr>
+          <a:xfrm>
+            <a:off x="365760" y="292608"/>
+            <a:ext cx="11460175" cy="932688"/>
+          </a:xfrm>
+          <a:prstGeom prst="roundRect">
+            <a:avLst>
+              <a:gd name="adj" fmla="val 12000"/>
+            </a:avLst>
           </a:prstGeom>
           <a:gradFill rotWithShape="1">
             <a:gsLst>
               <a:gs pos="0">
-                <a:srgbClr val="005F8C"/>
+                <a:srgbClr val="004C73"/>
               </a:gs>
               <a:gs pos="100000">
                 <a:srgbClr val="0096C7"/>
               </a:gs>
             </a:gsLst>
-            <a:lin scaled="0" ang="0"/>
+            <a:lin scaled="0" ang="21120000"/>
           </a:gradFill>
           <a:ln>
             <a:noFill/>
           </a:ln>
+          <a:effectLst>
+            <a:outerShdw blurRad="128016" dist="45720" dir="5400000" rotWithShape="0">
+              <a:srgbClr val="1B3A4B">
+                <a:alpha val="26000"/>
+              </a:srgbClr>
+            </a:outerShdw>
+          </a:effectLst>
         </p:spPr>
         <p:style>
           <a:lnRef idx="1">
@@ -8851,14 +11177,66 @@
       </p:sp>
       <p:sp>
         <p:nvSpPr>
-          <p:cNvPr id="6" name="TextBox 5"/>
+          <p:cNvPr id="6" name="Oval 5"/>
+          <p:cNvSpPr/>
+          <p:nvPr/>
+        </p:nvSpPr>
+        <p:spPr>
+          <a:xfrm>
+            <a:off x="566928" y="438912"/>
+            <a:ext cx="658368" cy="658368"/>
+          </a:xfrm>
+          <a:prstGeom prst="ellipse">
+            <a:avLst/>
+          </a:prstGeom>
+          <a:solidFill>
+            <a:srgbClr val="FF7A45"/>
+          </a:solidFill>
+          <a:ln>
+            <a:noFill/>
+          </a:ln>
+        </p:spPr>
+        <p:style>
+          <a:lnRef idx="1">
+            <a:schemeClr val="accent1"/>
+          </a:lnRef>
+          <a:fillRef idx="3">
+            <a:schemeClr val="accent1"/>
+          </a:fillRef>
+          <a:effectRef idx="2">
+            <a:schemeClr val="accent1"/>
+          </a:effectRef>
+          <a:fontRef idx="minor">
+            <a:schemeClr val="lt1"/>
+          </a:fontRef>
+        </p:style>
+        <p:txBody>
+          <a:bodyPr rtlCol="0" anchor="ctr" wrap="none" lIns="0" rIns="0" tIns="0" bIns="0"/>
+          <a:lstStyle/>
+          <a:p>
+            <a:pPr algn="ctr"/>
+            <a:r>
+              <a:rPr sz="2000" b="1">
+                <a:solidFill>
+                  <a:srgbClr val="FFFFFF"/>
+                </a:solidFill>
+                <a:latin typeface="Segoe UI"/>
+              </a:rPr>
+              <a:t>7</a:t>
+            </a:r>
+          </a:p>
+        </p:txBody>
+      </p:sp>
+      <p:sp>
+        <p:nvSpPr>
+          <p:cNvPr id="7" name="TextBox 6"/>
           <p:cNvSpPr txBox="1"/>
           <p:nvPr/>
         </p:nvSpPr>
         <p:spPr>
           <a:xfrm>
-            <a:off x="502920" y="256032"/>
-            <a:ext cx="9601200" cy="685800"/>
+            <a:off x="1444752" y="384048"/>
+            <a:ext cx="9052560" cy="777240"/>
           </a:xfrm>
           <a:prstGeom prst="rect">
             <a:avLst/>
@@ -8866,17 +11244,17 @@
           <a:noFill/>
         </p:spPr>
         <p:txBody>
-          <a:bodyPr wrap="square">
+          <a:bodyPr wrap="square" anchor="ctr">
             <a:spAutoFit/>
           </a:bodyPr>
           <a:lstStyle/>
           <a:p>
             <a:r>
-              <a:rPr sz="2800" b="1">
+              <a:rPr sz="2500" b="1">
                 <a:solidFill>
                   <a:srgbClr val="FFFFFF"/>
                 </a:solidFill>
-                <a:latin typeface="Calibri"/>
+                <a:latin typeface="Segoe UI Semibold"/>
               </a:rPr>
               <a:t>Measurement — refuse to fake a number</a:t>
             </a:r>
@@ -8885,17 +11263,19 @@
       </p:sp>
       <p:sp>
         <p:nvSpPr>
-          <p:cNvPr id="7" name="Rounded Rectangle 6"/>
-          <p:cNvSpPr/>
-          <p:nvPr/>
-        </p:nvSpPr>
-        <p:spPr>
-          <a:xfrm>
-            <a:off x="10835640" y="320040"/>
-            <a:ext cx="960120" cy="411480"/>
+          <p:cNvPr id="8" name="Rounded Rectangle 7"/>
+          <p:cNvSpPr/>
+          <p:nvPr/>
+        </p:nvSpPr>
+        <p:spPr>
+          <a:xfrm>
+            <a:off x="10561320" y="457200"/>
+            <a:ext cx="1051560" cy="384048"/>
           </a:xfrm>
           <a:prstGeom prst="roundRect">
-            <a:avLst/>
+            <a:avLst>
+              <a:gd name="adj" fmla="val 50000"/>
+            </a:avLst>
           </a:prstGeom>
           <a:solidFill>
             <a:srgbClr val="FFFFFF"/>
@@ -8919,32 +11299,77 @@
           </a:fontRef>
         </p:style>
         <p:txBody>
+          <a:bodyPr rtlCol="0" anchor="ctr" lIns="0" rIns="0" tIns="0" bIns="0"/>
+          <a:lstStyle/>
+          <a:p>
+            <a:pPr algn="ctr"/>
+            <a:r>
+              <a:rPr sz="1200" b="1">
+                <a:solidFill>
+                  <a:srgbClr val="004C73"/>
+                </a:solidFill>
+                <a:latin typeface="Segoe UI"/>
+              </a:rPr>
+              <a:t>7 / 12</a:t>
+            </a:r>
+          </a:p>
+        </p:txBody>
+      </p:sp>
+      <p:sp>
+        <p:nvSpPr>
+          <p:cNvPr id="9" name="Rounded Rectangle 8"/>
+          <p:cNvSpPr/>
+          <p:nvPr/>
+        </p:nvSpPr>
+        <p:spPr>
+          <a:xfrm>
+            <a:off x="502920" y="1481328"/>
+            <a:ext cx="54864" cy="4709160"/>
+          </a:xfrm>
+          <a:prstGeom prst="roundRect">
+            <a:avLst>
+              <a:gd name="adj" fmla="val 50000"/>
+            </a:avLst>
+          </a:prstGeom>
+          <a:solidFill>
+            <a:srgbClr val="FF7A45"/>
+          </a:solidFill>
+          <a:ln>
+            <a:noFill/>
+          </a:ln>
+        </p:spPr>
+        <p:style>
+          <a:lnRef idx="1">
+            <a:schemeClr val="accent1"/>
+          </a:lnRef>
+          <a:fillRef idx="3">
+            <a:schemeClr val="accent1"/>
+          </a:fillRef>
+          <a:effectRef idx="2">
+            <a:schemeClr val="accent1"/>
+          </a:effectRef>
+          <a:fontRef idx="minor">
+            <a:schemeClr val="lt1"/>
+          </a:fontRef>
+        </p:style>
+        <p:txBody>
           <a:bodyPr rtlCol="0" anchor="ctr"/>
           <a:lstStyle/>
           <a:p>
             <a:pPr algn="ctr"/>
-            <a:r>
-              <a:rPr sz="1100" b="1">
-                <a:solidFill>
-                  <a:srgbClr val="FFFFFF"/>
-                </a:solidFill>
-                <a:latin typeface="Calibri"/>
-              </a:rPr>
-              <a:t>7/12</a:t>
-            </a:r>
-          </a:p>
-        </p:txBody>
-      </p:sp>
-      <p:sp>
-        <p:nvSpPr>
-          <p:cNvPr id="8" name="TextBox 7"/>
+          </a:p>
+        </p:txBody>
+      </p:sp>
+      <p:sp>
+        <p:nvSpPr>
+          <p:cNvPr id="10" name="TextBox 9"/>
           <p:cNvSpPr txBox="1"/>
           <p:nvPr/>
         </p:nvSpPr>
         <p:spPr>
           <a:xfrm>
-            <a:off x="502920" y="1325880"/>
-            <a:ext cx="3977639" cy="5120640"/>
+            <a:off x="749808" y="1417320"/>
+            <a:ext cx="3703320" cy="4892040"/>
           </a:xfrm>
           <a:prstGeom prst="rect">
             <a:avLst/>
@@ -8959,10 +11384,10 @@
           <a:p>
             <a:pPr>
               <a:lnSpc>
-                <a:spcPct val="115000"/>
+                <a:spcPct val="118000"/>
               </a:lnSpc>
               <a:spcAft>
-                <a:spcPts val="1400"/>
+                <a:spcPts val="1600"/>
               </a:spcAft>
             </a:pPr>
             <a:r>
@@ -8970,16 +11395,16 @@
                 <a:solidFill>
                   <a:srgbClr val="0096C7"/>
                 </a:solidFill>
-                <a:latin typeface="Calibri"/>
-              </a:rPr>
-              <a:t>●  </a:t>
+                <a:latin typeface="Segoe UI Semibold"/>
+              </a:rPr>
+              <a:t>01  </a:t>
             </a:r>
             <a:r>
               <a:rPr sz="1500" b="0">
                 <a:solidFill>
                   <a:srgbClr val="334155"/>
                 </a:solidFill>
-                <a:latin typeface="Calibri"/>
+                <a:latin typeface="Segoe UI"/>
               </a:rPr>
               <a:t>Adoption + rework ratio + cost per merged PR — not self-reported speedup</a:t>
             </a:r>
@@ -8987,10 +11412,10 @@
           <a:p>
             <a:pPr>
               <a:lnSpc>
-                <a:spcPct val="115000"/>
+                <a:spcPct val="118000"/>
               </a:lnSpc>
               <a:spcAft>
-                <a:spcPts val="1400"/>
+                <a:spcPts val="1600"/>
               </a:spcAft>
             </a:pPr>
             <a:r>
@@ -8998,16 +11423,16 @@
                 <a:solidFill>
                   <a:srgbClr val="0096C7"/>
                 </a:solidFill>
-                <a:latin typeface="Calibri"/>
-              </a:rPr>
-              <a:t>●  </a:t>
+                <a:latin typeface="Segoe UI Semibold"/>
+              </a:rPr>
+              <a:t>02  </a:t>
             </a:r>
             <a:r>
               <a:rPr sz="1500" b="0">
                 <a:solidFill>
                   <a:srgbClr val="334155"/>
                 </a:solidFill>
-                <a:latin typeface="Calibri"/>
+                <a:latin typeface="Segoe UI"/>
               </a:rPr>
               <a:t>Safety panel: not instrumented — enforcement real, telemetry pending</a:t>
             </a:r>
@@ -9015,10 +11440,10 @@
           <a:p>
             <a:pPr>
               <a:lnSpc>
-                <a:spcPct val="115000"/>
+                <a:spcPct val="118000"/>
               </a:lnSpc>
               <a:spcAft>
-                <a:spcPts val="1400"/>
+                <a:spcPts val="1600"/>
               </a:spcAft>
             </a:pPr>
             <a:r>
@@ -9026,16 +11451,16 @@
                 <a:solidFill>
                   <a:srgbClr val="0096C7"/>
                 </a:solidFill>
-                <a:latin typeface="Calibri"/>
-              </a:rPr>
-              <a:t>●  </a:t>
+                <a:latin typeface="Segoe UI Semibold"/>
+              </a:rPr>
+              <a:t>03  </a:t>
             </a:r>
             <a:r>
               <a:rPr sz="1500" b="0">
                 <a:solidFill>
                   <a:srgbClr val="334155"/>
                 </a:solidFill>
-                <a:latin typeface="Calibri"/>
+                <a:latin typeface="Segoe UI"/>
               </a:rPr>
               <a:t>Guest agent: binary gates — zero hallucinated prices, no oversell</a:t>
             </a:r>
@@ -9044,14 +11469,57 @@
       </p:sp>
       <p:sp>
         <p:nvSpPr>
-          <p:cNvPr id="9" name="TextBox 8"/>
+          <p:cNvPr id="11" name="Rectangle 10"/>
+          <p:cNvSpPr/>
+          <p:nvPr/>
+        </p:nvSpPr>
+        <p:spPr>
+          <a:xfrm>
+            <a:off x="502920" y="6382512"/>
+            <a:ext cx="11183112" cy="12700"/>
+          </a:xfrm>
+          <a:prstGeom prst="rect">
+            <a:avLst/>
+          </a:prstGeom>
+          <a:solidFill>
+            <a:srgbClr val="D8ECF7"/>
+          </a:solidFill>
+          <a:ln>
+            <a:noFill/>
+          </a:ln>
+        </p:spPr>
+        <p:style>
+          <a:lnRef idx="1">
+            <a:schemeClr val="accent1"/>
+          </a:lnRef>
+          <a:fillRef idx="3">
+            <a:schemeClr val="accent1"/>
+          </a:fillRef>
+          <a:effectRef idx="2">
+            <a:schemeClr val="accent1"/>
+          </a:effectRef>
+          <a:fontRef idx="minor">
+            <a:schemeClr val="lt1"/>
+          </a:fontRef>
+        </p:style>
+        <p:txBody>
+          <a:bodyPr rtlCol="0" anchor="ctr"/>
+          <a:lstStyle/>
+          <a:p>
+            <a:pPr algn="ctr"/>
+          </a:p>
+        </p:txBody>
+      </p:sp>
+      <p:sp>
+        <p:nvSpPr>
+          <p:cNvPr id="12" name="TextBox 11"/>
           <p:cNvSpPr txBox="1"/>
           <p:nvPr/>
         </p:nvSpPr>
         <p:spPr>
           <a:xfrm>
-            <a:off x="502920" y="6446520"/>
-            <a:ext cx="7315200" cy="320040"/>
+            <a:off x="502920" y="6455664"/>
+            <a:ext cx="10652760" cy="292608"/>
           </a:xfrm>
           <a:prstGeom prst="rect">
             <a:avLst/>
@@ -9069,35 +11537,44 @@
                 <a:solidFill>
                   <a:srgbClr val="64748B"/>
                 </a:solidFill>
-                <a:latin typeface="Calibri"/>
-              </a:rPr>
-              <a:t>RCG Principal Engineer · Part 2 · Agentic Development Strategy</a:t>
-            </a:r>
-          </a:p>
-        </p:txBody>
-      </p:sp>
-      <p:sp>
-        <p:nvSpPr>
-          <p:cNvPr id="10" name="Rounded Rectangle 9"/>
-          <p:cNvSpPr/>
-          <p:nvPr/>
-        </p:nvSpPr>
-        <p:spPr>
-          <a:xfrm>
-            <a:off x="4709160" y="1325880"/>
-            <a:ext cx="7178040" cy="2359152"/>
+                <a:latin typeface="Segoe UI"/>
+              </a:rPr>
+              <a:t>RCG Principal Engineer  ·  Part 2  ·  Agentic Development Strategy</a:t>
+            </a:r>
+          </a:p>
+        </p:txBody>
+      </p:sp>
+      <p:sp>
+        <p:nvSpPr>
+          <p:cNvPr id="13" name="Rounded Rectangle 12"/>
+          <p:cNvSpPr/>
+          <p:nvPr/>
+        </p:nvSpPr>
+        <p:spPr>
+          <a:xfrm>
+            <a:off x="4709160" y="1536192"/>
+            <a:ext cx="7178040" cy="2240280"/>
           </a:xfrm>
           <a:prstGeom prst="roundRect">
-            <a:avLst/>
+            <a:avLst>
+              <a:gd name="adj" fmla="val 4500"/>
+            </a:avLst>
           </a:prstGeom>
           <a:solidFill>
             <a:srgbClr val="FFFFFF"/>
           </a:solidFill>
-          <a:ln w="15875">
+          <a:ln w="12700">
             <a:solidFill>
-              <a:srgbClr val="CBE8F5"/>
+              <a:srgbClr val="D8ECF7"/>
             </a:solidFill>
           </a:ln>
+          <a:effectLst>
+            <a:outerShdw blurRad="146304" dist="54864" dir="5400000" rotWithShape="0">
+              <a:srgbClr val="1B3A4B">
+                <a:alpha val="22000"/>
+              </a:srgbClr>
+            </a:outerShdw>
+          </a:effectLst>
         </p:spPr>
         <p:style>
           <a:lnRef idx="1">
@@ -9123,7 +11600,7 @@
       </p:sp>
       <p:pic>
         <p:nvPicPr>
-          <p:cNvPr id="11" name="Picture 10" descr="slide-07-titan-dashboard.png"/>
+          <p:cNvPr id="14" name="Picture 13" descr="slide-07-titan-dashboard.png"/>
           <p:cNvPicPr>
             <a:picLocks noChangeAspect="1"/>
           </p:cNvPicPr>
@@ -9137,8 +11614,8 @@
         </p:blipFill>
         <p:spPr>
           <a:xfrm>
-            <a:off x="4782312" y="1399032"/>
-            <a:ext cx="7031736" cy="2212848"/>
+            <a:off x="4791456" y="1618488"/>
+            <a:ext cx="7013448" cy="2075688"/>
           </a:xfrm>
           <a:prstGeom prst="rect">
             <a:avLst/>
@@ -9147,26 +11624,89 @@
       </p:pic>
       <p:sp>
         <p:nvSpPr>
-          <p:cNvPr id="12" name="Rounded Rectangle 11"/>
-          <p:cNvSpPr/>
-          <p:nvPr/>
-        </p:nvSpPr>
-        <p:spPr>
-          <a:xfrm>
-            <a:off x="4709160" y="3849624"/>
-            <a:ext cx="7178040" cy="2359152"/>
+          <p:cNvPr id="15" name="Rounded Rectangle 14"/>
+          <p:cNvSpPr/>
+          <p:nvPr/>
+        </p:nvSpPr>
+        <p:spPr>
+          <a:xfrm>
+            <a:off x="4873752" y="1353312"/>
+            <a:ext cx="1554480" cy="365760"/>
           </a:xfrm>
           <a:prstGeom prst="roundRect">
-            <a:avLst/>
+            <a:avLst>
+              <a:gd name="adj" fmla="val 50000"/>
+            </a:avLst>
+          </a:prstGeom>
+          <a:solidFill>
+            <a:srgbClr val="004C73"/>
+          </a:solidFill>
+          <a:ln>
+            <a:noFill/>
+          </a:ln>
+        </p:spPr>
+        <p:style>
+          <a:lnRef idx="1">
+            <a:schemeClr val="accent1"/>
+          </a:lnRef>
+          <a:fillRef idx="3">
+            <a:schemeClr val="accent1"/>
+          </a:fillRef>
+          <a:effectRef idx="2">
+            <a:schemeClr val="accent1"/>
+          </a:effectRef>
+          <a:fontRef idx="minor">
+            <a:schemeClr val="lt1"/>
+          </a:fontRef>
+        </p:style>
+        <p:txBody>
+          <a:bodyPr rtlCol="0" anchor="ctr" lIns="0" rIns="0" tIns="0" bIns="0"/>
+          <a:lstStyle/>
+          <a:p>
+            <a:pPr algn="ctr"/>
+            <a:r>
+              <a:rPr sz="1000" b="1">
+                <a:solidFill>
+                  <a:srgbClr val="FFFFFF"/>
+                </a:solidFill>
+                <a:latin typeface="Segoe UI"/>
+              </a:rPr>
+              <a:t>LIVE OUTPUT — 1/2</a:t>
+            </a:r>
+          </a:p>
+        </p:txBody>
+      </p:sp>
+      <p:sp>
+        <p:nvSpPr>
+          <p:cNvPr id="16" name="Rounded Rectangle 15"/>
+          <p:cNvSpPr/>
+          <p:nvPr/>
+        </p:nvSpPr>
+        <p:spPr>
+          <a:xfrm>
+            <a:off x="4709160" y="4005072"/>
+            <a:ext cx="7178040" cy="2240280"/>
+          </a:xfrm>
+          <a:prstGeom prst="roundRect">
+            <a:avLst>
+              <a:gd name="adj" fmla="val 4500"/>
+            </a:avLst>
           </a:prstGeom>
           <a:solidFill>
             <a:srgbClr val="FFFFFF"/>
           </a:solidFill>
-          <a:ln w="15875">
+          <a:ln w="12700">
             <a:solidFill>
-              <a:srgbClr val="CBE8F5"/>
+              <a:srgbClr val="D8ECF7"/>
             </a:solidFill>
           </a:ln>
+          <a:effectLst>
+            <a:outerShdw blurRad="146304" dist="54864" dir="5400000" rotWithShape="0">
+              <a:srgbClr val="1B3A4B">
+                <a:alpha val="22000"/>
+              </a:srgbClr>
+            </a:outerShdw>
+          </a:effectLst>
         </p:spPr>
         <p:style>
           <a:lnRef idx="1">
@@ -9192,7 +11732,7 @@
       </p:sp>
       <p:pic>
         <p:nvPicPr>
-          <p:cNvPr id="13" name="Picture 12" descr="slide-07-vitest.png"/>
+          <p:cNvPr id="17" name="Picture 16" descr="slide-07-vitest.png"/>
           <p:cNvPicPr>
             <a:picLocks noChangeAspect="1"/>
           </p:cNvPicPr>
@@ -9206,14 +11746,68 @@
         </p:blipFill>
         <p:spPr>
           <a:xfrm>
-            <a:off x="4782312" y="3922776"/>
-            <a:ext cx="7031736" cy="2212848"/>
+            <a:off x="4791456" y="4087368"/>
+            <a:ext cx="7013448" cy="2075688"/>
           </a:xfrm>
           <a:prstGeom prst="rect">
             <a:avLst/>
           </a:prstGeom>
         </p:spPr>
       </p:pic>
+      <p:sp>
+        <p:nvSpPr>
+          <p:cNvPr id="18" name="Rounded Rectangle 17"/>
+          <p:cNvSpPr/>
+          <p:nvPr/>
+        </p:nvSpPr>
+        <p:spPr>
+          <a:xfrm>
+            <a:off x="4873752" y="3822192"/>
+            <a:ext cx="1554480" cy="365760"/>
+          </a:xfrm>
+          <a:prstGeom prst="roundRect">
+            <a:avLst>
+              <a:gd name="adj" fmla="val 50000"/>
+            </a:avLst>
+          </a:prstGeom>
+          <a:solidFill>
+            <a:srgbClr val="004C73"/>
+          </a:solidFill>
+          <a:ln>
+            <a:noFill/>
+          </a:ln>
+        </p:spPr>
+        <p:style>
+          <a:lnRef idx="1">
+            <a:schemeClr val="accent1"/>
+          </a:lnRef>
+          <a:fillRef idx="3">
+            <a:schemeClr val="accent1"/>
+          </a:fillRef>
+          <a:effectRef idx="2">
+            <a:schemeClr val="accent1"/>
+          </a:effectRef>
+          <a:fontRef idx="minor">
+            <a:schemeClr val="lt1"/>
+          </a:fontRef>
+        </p:style>
+        <p:txBody>
+          <a:bodyPr rtlCol="0" anchor="ctr" lIns="0" rIns="0" tIns="0" bIns="0"/>
+          <a:lstStyle/>
+          <a:p>
+            <a:pPr algn="ctr"/>
+            <a:r>
+              <a:rPr sz="1000" b="1">
+                <a:solidFill>
+                  <a:srgbClr val="FFFFFF"/>
+                </a:solidFill>
+                <a:latin typeface="Segoe UI"/>
+              </a:rPr>
+              <a:t>LIVE OUTPUT — 2/2</a:t>
+            </a:r>
+          </a:p>
+        </p:txBody>
+      </p:sp>
     </p:spTree>
   </p:cSld>
   <p:clrMapOvr>
@@ -9252,10 +11846,10 @@
                 <a:srgbClr val="FFFFFF"/>
               </a:gs>
               <a:gs pos="100000">
-                <a:srgbClr val="E8F4FC"/>
+                <a:srgbClr val="F1F7FB"/>
               </a:gs>
             </a:gsLst>
-            <a:lin scaled="0" ang="15000000"/>
+            <a:lin scaled="0" ang="14700000"/>
           </a:gradFill>
           <a:ln>
             <a:noFill/>
@@ -9285,29 +11879,21 @@
       </p:sp>
       <p:sp>
         <p:nvSpPr>
-          <p:cNvPr id="3" name="Rectangle 2"/>
-          <p:cNvSpPr/>
-          <p:nvPr/>
-        </p:nvSpPr>
-        <p:spPr>
-          <a:xfrm>
-            <a:off x="0" y="5303520"/>
-            <a:ext cx="12191695" cy="1554480"/>
-          </a:xfrm>
-          <a:prstGeom prst="rect">
+          <p:cNvPr id="3" name="Oval 2"/>
+          <p:cNvSpPr/>
+          <p:nvPr/>
+        </p:nvSpPr>
+        <p:spPr>
+          <a:xfrm>
+            <a:off x="9692640" y="4480560"/>
+            <a:ext cx="4754880" cy="4754880"/>
+          </a:xfrm>
+          <a:prstGeom prst="ellipse">
             <a:avLst/>
           </a:prstGeom>
-          <a:gradFill rotWithShape="1">
-            <a:gsLst>
-              <a:gs pos="0">
-                <a:srgbClr val="90E0EF"/>
-              </a:gs>
-              <a:gs pos="100000">
-                <a:srgbClr val="E8F4FC"/>
-              </a:gs>
-            </a:gsLst>
-            <a:lin scaled="0" ang="0"/>
-          </a:gradFill>
+          <a:solidFill>
+            <a:srgbClr val="90E0EF"/>
+          </a:solidFill>
           <a:ln>
             <a:noFill/>
           </a:ln>
@@ -9343,7 +11929,7 @@
         <p:spPr>
           <a:xfrm>
             <a:off x="0" y="0"/>
-            <a:ext cx="12191695" cy="109728"/>
+            <a:ext cx="12191695" cy="73152"/>
           </a:xfrm>
           <a:prstGeom prst="rect">
             <a:avLst/>
@@ -9387,32 +11973,41 @@
       </p:sp>
       <p:sp>
         <p:nvSpPr>
-          <p:cNvPr id="5" name="Rectangle 4"/>
-          <p:cNvSpPr/>
-          <p:nvPr/>
-        </p:nvSpPr>
-        <p:spPr>
-          <a:xfrm>
-            <a:off x="0" y="109728"/>
-            <a:ext cx="12191695" cy="960120"/>
-          </a:xfrm>
-          <a:prstGeom prst="rect">
-            <a:avLst/>
+          <p:cNvPr id="5" name="Rounded Rectangle 4"/>
+          <p:cNvSpPr/>
+          <p:nvPr/>
+        </p:nvSpPr>
+        <p:spPr>
+          <a:xfrm>
+            <a:off x="365760" y="292608"/>
+            <a:ext cx="11460175" cy="932688"/>
+          </a:xfrm>
+          <a:prstGeom prst="roundRect">
+            <a:avLst>
+              <a:gd name="adj" fmla="val 12000"/>
+            </a:avLst>
           </a:prstGeom>
           <a:gradFill rotWithShape="1">
             <a:gsLst>
               <a:gs pos="0">
-                <a:srgbClr val="005F8C"/>
+                <a:srgbClr val="004C73"/>
               </a:gs>
               <a:gs pos="100000">
                 <a:srgbClr val="0096C7"/>
               </a:gs>
             </a:gsLst>
-            <a:lin scaled="0" ang="0"/>
+            <a:lin scaled="0" ang="21120000"/>
           </a:gradFill>
           <a:ln>
             <a:noFill/>
           </a:ln>
+          <a:effectLst>
+            <a:outerShdw blurRad="128016" dist="45720" dir="5400000" rotWithShape="0">
+              <a:srgbClr val="1B3A4B">
+                <a:alpha val="26000"/>
+              </a:srgbClr>
+            </a:outerShdw>
+          </a:effectLst>
         </p:spPr>
         <p:style>
           <a:lnRef idx="1">
@@ -9438,14 +12033,66 @@
       </p:sp>
       <p:sp>
         <p:nvSpPr>
-          <p:cNvPr id="6" name="TextBox 5"/>
+          <p:cNvPr id="6" name="Oval 5"/>
+          <p:cNvSpPr/>
+          <p:nvPr/>
+        </p:nvSpPr>
+        <p:spPr>
+          <a:xfrm>
+            <a:off x="566928" y="438912"/>
+            <a:ext cx="658368" cy="658368"/>
+          </a:xfrm>
+          <a:prstGeom prst="ellipse">
+            <a:avLst/>
+          </a:prstGeom>
+          <a:solidFill>
+            <a:srgbClr val="FF7A45"/>
+          </a:solidFill>
+          <a:ln>
+            <a:noFill/>
+          </a:ln>
+        </p:spPr>
+        <p:style>
+          <a:lnRef idx="1">
+            <a:schemeClr val="accent1"/>
+          </a:lnRef>
+          <a:fillRef idx="3">
+            <a:schemeClr val="accent1"/>
+          </a:fillRef>
+          <a:effectRef idx="2">
+            <a:schemeClr val="accent1"/>
+          </a:effectRef>
+          <a:fontRef idx="minor">
+            <a:schemeClr val="lt1"/>
+          </a:fontRef>
+        </p:style>
+        <p:txBody>
+          <a:bodyPr rtlCol="0" anchor="ctr" wrap="none" lIns="0" rIns="0" tIns="0" bIns="0"/>
+          <a:lstStyle/>
+          <a:p>
+            <a:pPr algn="ctr"/>
+            <a:r>
+              <a:rPr sz="2000" b="1">
+                <a:solidFill>
+                  <a:srgbClr val="FFFFFF"/>
+                </a:solidFill>
+                <a:latin typeface="Segoe UI"/>
+              </a:rPr>
+              <a:t>8</a:t>
+            </a:r>
+          </a:p>
+        </p:txBody>
+      </p:sp>
+      <p:sp>
+        <p:nvSpPr>
+          <p:cNvPr id="7" name="TextBox 6"/>
           <p:cNvSpPr txBox="1"/>
           <p:nvPr/>
         </p:nvSpPr>
         <p:spPr>
           <a:xfrm>
-            <a:off x="502920" y="256032"/>
-            <a:ext cx="9601200" cy="685800"/>
+            <a:off x="1444752" y="384048"/>
+            <a:ext cx="9052560" cy="777240"/>
           </a:xfrm>
           <a:prstGeom prst="rect">
             <a:avLst/>
@@ -9453,17 +12100,17 @@
           <a:noFill/>
         </p:spPr>
         <p:txBody>
-          <a:bodyPr wrap="square">
+          <a:bodyPr wrap="square" anchor="ctr">
             <a:spAutoFit/>
           </a:bodyPr>
           <a:lstStyle/>
           <a:p>
             <a:r>
-              <a:rPr sz="2800" b="1">
+              <a:rPr sz="2500" b="1">
                 <a:solidFill>
                   <a:srgbClr val="FFFFFF"/>
                 </a:solidFill>
-                <a:latin typeface="Calibri"/>
+                <a:latin typeface="Segoe UI Semibold"/>
               </a:rPr>
               <a:t>Worked example — cruise planner architecture</a:t>
             </a:r>
@@ -9472,17 +12119,19 @@
       </p:sp>
       <p:sp>
         <p:nvSpPr>
-          <p:cNvPr id="7" name="Rounded Rectangle 6"/>
-          <p:cNvSpPr/>
-          <p:nvPr/>
-        </p:nvSpPr>
-        <p:spPr>
-          <a:xfrm>
-            <a:off x="10835640" y="320040"/>
-            <a:ext cx="960120" cy="411480"/>
+          <p:cNvPr id="8" name="Rounded Rectangle 7"/>
+          <p:cNvSpPr/>
+          <p:nvPr/>
+        </p:nvSpPr>
+        <p:spPr>
+          <a:xfrm>
+            <a:off x="10561320" y="457200"/>
+            <a:ext cx="1051560" cy="384048"/>
           </a:xfrm>
           <a:prstGeom prst="roundRect">
-            <a:avLst/>
+            <a:avLst>
+              <a:gd name="adj" fmla="val 50000"/>
+            </a:avLst>
           </a:prstGeom>
           <a:solidFill>
             <a:srgbClr val="FFFFFF"/>
@@ -9506,32 +12155,77 @@
           </a:fontRef>
         </p:style>
         <p:txBody>
+          <a:bodyPr rtlCol="0" anchor="ctr" lIns="0" rIns="0" tIns="0" bIns="0"/>
+          <a:lstStyle/>
+          <a:p>
+            <a:pPr algn="ctr"/>
+            <a:r>
+              <a:rPr sz="1200" b="1">
+                <a:solidFill>
+                  <a:srgbClr val="004C73"/>
+                </a:solidFill>
+                <a:latin typeface="Segoe UI"/>
+              </a:rPr>
+              <a:t>8 / 12</a:t>
+            </a:r>
+          </a:p>
+        </p:txBody>
+      </p:sp>
+      <p:sp>
+        <p:nvSpPr>
+          <p:cNvPr id="9" name="Rounded Rectangle 8"/>
+          <p:cNvSpPr/>
+          <p:nvPr/>
+        </p:nvSpPr>
+        <p:spPr>
+          <a:xfrm>
+            <a:off x="502920" y="1481328"/>
+            <a:ext cx="54864" cy="4709160"/>
+          </a:xfrm>
+          <a:prstGeom prst="roundRect">
+            <a:avLst>
+              <a:gd name="adj" fmla="val 50000"/>
+            </a:avLst>
+          </a:prstGeom>
+          <a:solidFill>
+            <a:srgbClr val="FF7A45"/>
+          </a:solidFill>
+          <a:ln>
+            <a:noFill/>
+          </a:ln>
+        </p:spPr>
+        <p:style>
+          <a:lnRef idx="1">
+            <a:schemeClr val="accent1"/>
+          </a:lnRef>
+          <a:fillRef idx="3">
+            <a:schemeClr val="accent1"/>
+          </a:fillRef>
+          <a:effectRef idx="2">
+            <a:schemeClr val="accent1"/>
+          </a:effectRef>
+          <a:fontRef idx="minor">
+            <a:schemeClr val="lt1"/>
+          </a:fontRef>
+        </p:style>
+        <p:txBody>
           <a:bodyPr rtlCol="0" anchor="ctr"/>
           <a:lstStyle/>
           <a:p>
             <a:pPr algn="ctr"/>
-            <a:r>
-              <a:rPr sz="1100" b="1">
-                <a:solidFill>
-                  <a:srgbClr val="FFFFFF"/>
-                </a:solidFill>
-                <a:latin typeface="Calibri"/>
-              </a:rPr>
-              <a:t>8/12</a:t>
-            </a:r>
-          </a:p>
-        </p:txBody>
-      </p:sp>
-      <p:sp>
-        <p:nvSpPr>
-          <p:cNvPr id="8" name="TextBox 7"/>
+          </a:p>
+        </p:txBody>
+      </p:sp>
+      <p:sp>
+        <p:nvSpPr>
+          <p:cNvPr id="10" name="TextBox 9"/>
           <p:cNvSpPr txBox="1"/>
           <p:nvPr/>
         </p:nvSpPr>
         <p:spPr>
           <a:xfrm>
-            <a:off x="502920" y="1325880"/>
-            <a:ext cx="3977639" cy="5120640"/>
+            <a:off x="749808" y="1417320"/>
+            <a:ext cx="3703320" cy="4892040"/>
           </a:xfrm>
           <a:prstGeom prst="rect">
             <a:avLst/>
@@ -9546,10 +12240,10 @@
           <a:p>
             <a:pPr>
               <a:lnSpc>
-                <a:spcPct val="115000"/>
+                <a:spcPct val="118000"/>
               </a:lnSpc>
               <a:spcAft>
-                <a:spcPts val="1400"/>
+                <a:spcPts val="1600"/>
               </a:spcAft>
             </a:pPr>
             <a:r>
@@ -9557,16 +12251,16 @@
                 <a:solidFill>
                   <a:srgbClr val="0096C7"/>
                 </a:solidFill>
-                <a:latin typeface="Calibri"/>
-              </a:rPr>
-              <a:t>●  </a:t>
+                <a:latin typeface="Segoe UI Semibold"/>
+              </a:rPr>
+              <a:t>01  </a:t>
             </a:r>
             <a:r>
               <a:rPr sz="1500" b="0">
                 <a:solidFill>
                   <a:srgbClr val="334155"/>
                 </a:solidFill>
-                <a:latin typeface="Calibri"/>
+                <a:latin typeface="Segoe UI"/>
               </a:rPr>
               <a:t>Orchestration layer, not a chatbot — typed tool schemas</a:t>
             </a:r>
@@ -9574,10 +12268,10 @@
           <a:p>
             <a:pPr>
               <a:lnSpc>
-                <a:spcPct val="115000"/>
+                <a:spcPct val="118000"/>
               </a:lnSpc>
               <a:spcAft>
-                <a:spcPts val="1400"/>
+                <a:spcPts val="1600"/>
               </a:spcAft>
             </a:pPr>
             <a:r>
@@ -9585,16 +12279,16 @@
                 <a:solidFill>
                   <a:srgbClr val="0096C7"/>
                 </a:solidFill>
-                <a:latin typeface="Calibri"/>
-              </a:rPr>
-              <a:t>●  </a:t>
+                <a:latin typeface="Segoe UI Semibold"/>
+              </a:rPr>
+              <a:t>02  </a:t>
             </a:r>
             <a:r>
               <a:rPr sz="1500" b="0">
                 <a:solidFill>
                   <a:srgbClr val="334155"/>
                 </a:solidFill>
-                <a:latin typeface="Calibri"/>
+                <a:latin typeface="Segoe UI"/>
               </a:rPr>
               <a:t>Evidence objects carry price, availability, validity window</a:t>
             </a:r>
@@ -9602,10 +12296,10 @@
           <a:p>
             <a:pPr>
               <a:lnSpc>
-                <a:spcPct val="115000"/>
+                <a:spcPct val="118000"/>
               </a:lnSpc>
               <a:spcAft>
-                <a:spcPts val="1400"/>
+                <a:spcPts val="1600"/>
               </a:spcAft>
             </a:pPr>
             <a:r>
@@ -9613,16 +12307,16 @@
                 <a:solidFill>
                   <a:srgbClr val="0096C7"/>
                 </a:solidFill>
-                <a:latin typeface="Calibri"/>
-              </a:rPr>
-              <a:t>●  </a:t>
+                <a:latin typeface="Segoe UI Semibold"/>
+              </a:rPr>
+              <a:t>03  </a:t>
             </a:r>
             <a:r>
               <a:rPr sz="1500" b="0">
                 <a:solidFill>
                   <a:srgbClr val="334155"/>
                 </a:solidFill>
-                <a:latin typeface="Calibri"/>
+                <a:latin typeface="Segoe UI"/>
               </a:rPr>
               <a:t>Auth at commitment boundary; checkout owns payment</a:t>
             </a:r>
@@ -9631,14 +12325,57 @@
       </p:sp>
       <p:sp>
         <p:nvSpPr>
-          <p:cNvPr id="9" name="TextBox 8"/>
+          <p:cNvPr id="11" name="Rectangle 10"/>
+          <p:cNvSpPr/>
+          <p:nvPr/>
+        </p:nvSpPr>
+        <p:spPr>
+          <a:xfrm>
+            <a:off x="502920" y="6382512"/>
+            <a:ext cx="11183112" cy="12700"/>
+          </a:xfrm>
+          <a:prstGeom prst="rect">
+            <a:avLst/>
+          </a:prstGeom>
+          <a:solidFill>
+            <a:srgbClr val="D8ECF7"/>
+          </a:solidFill>
+          <a:ln>
+            <a:noFill/>
+          </a:ln>
+        </p:spPr>
+        <p:style>
+          <a:lnRef idx="1">
+            <a:schemeClr val="accent1"/>
+          </a:lnRef>
+          <a:fillRef idx="3">
+            <a:schemeClr val="accent1"/>
+          </a:fillRef>
+          <a:effectRef idx="2">
+            <a:schemeClr val="accent1"/>
+          </a:effectRef>
+          <a:fontRef idx="minor">
+            <a:schemeClr val="lt1"/>
+          </a:fontRef>
+        </p:style>
+        <p:txBody>
+          <a:bodyPr rtlCol="0" anchor="ctr"/>
+          <a:lstStyle/>
+          <a:p>
+            <a:pPr algn="ctr"/>
+          </a:p>
+        </p:txBody>
+      </p:sp>
+      <p:sp>
+        <p:nvSpPr>
+          <p:cNvPr id="12" name="TextBox 11"/>
           <p:cNvSpPr txBox="1"/>
           <p:nvPr/>
         </p:nvSpPr>
         <p:spPr>
           <a:xfrm>
-            <a:off x="502920" y="6446520"/>
-            <a:ext cx="7315200" cy="320040"/>
+            <a:off x="502920" y="6455664"/>
+            <a:ext cx="10652760" cy="292608"/>
           </a:xfrm>
           <a:prstGeom prst="rect">
             <a:avLst/>
@@ -9656,35 +12393,44 @@
                 <a:solidFill>
                   <a:srgbClr val="64748B"/>
                 </a:solidFill>
-                <a:latin typeface="Calibri"/>
-              </a:rPr>
-              <a:t>RCG Principal Engineer · Part 2 · Agentic Development Strategy</a:t>
-            </a:r>
-          </a:p>
-        </p:txBody>
-      </p:sp>
-      <p:sp>
-        <p:nvSpPr>
-          <p:cNvPr id="10" name="Rounded Rectangle 9"/>
-          <p:cNvSpPr/>
-          <p:nvPr/>
-        </p:nvSpPr>
-        <p:spPr>
-          <a:xfrm>
-            <a:off x="4709160" y="1325880"/>
-            <a:ext cx="7178040" cy="4892040"/>
+                <a:latin typeface="Segoe UI"/>
+              </a:rPr>
+              <a:t>RCG Principal Engineer  ·  Part 2  ·  Agentic Development Strategy</a:t>
+            </a:r>
+          </a:p>
+        </p:txBody>
+      </p:sp>
+      <p:sp>
+        <p:nvSpPr>
+          <p:cNvPr id="13" name="Rounded Rectangle 12"/>
+          <p:cNvSpPr/>
+          <p:nvPr/>
+        </p:nvSpPr>
+        <p:spPr>
+          <a:xfrm>
+            <a:off x="4709160" y="1536192"/>
+            <a:ext cx="7178040" cy="4709160"/>
           </a:xfrm>
           <a:prstGeom prst="roundRect">
-            <a:avLst/>
+            <a:avLst>
+              <a:gd name="adj" fmla="val 4500"/>
+            </a:avLst>
           </a:prstGeom>
           <a:solidFill>
             <a:srgbClr val="FFFFFF"/>
           </a:solidFill>
-          <a:ln w="15875">
+          <a:ln w="12700">
             <a:solidFill>
-              <a:srgbClr val="CBE8F5"/>
+              <a:srgbClr val="D8ECF7"/>
             </a:solidFill>
           </a:ln>
+          <a:effectLst>
+            <a:outerShdw blurRad="146304" dist="54864" dir="5400000" rotWithShape="0">
+              <a:srgbClr val="1B3A4B">
+                <a:alpha val="22000"/>
+              </a:srgbClr>
+            </a:outerShdw>
+          </a:effectLst>
         </p:spPr>
         <p:style>
           <a:lnRef idx="1">
@@ -9710,7 +12456,7 @@
       </p:sp>
       <p:pic>
         <p:nvPicPr>
-          <p:cNvPr id="11" name="Picture 10" descr="slide-08-architecture.png"/>
+          <p:cNvPr id="14" name="Picture 13" descr="slide-08-architecture.png"/>
           <p:cNvPicPr>
             <a:picLocks noChangeAspect="1"/>
           </p:cNvPicPr>
@@ -9724,14 +12470,68 @@
         </p:blipFill>
         <p:spPr>
           <a:xfrm>
-            <a:off x="4782312" y="1399032"/>
-            <a:ext cx="7031736" cy="4745736"/>
+            <a:off x="4791456" y="1618488"/>
+            <a:ext cx="7013448" cy="4544568"/>
           </a:xfrm>
           <a:prstGeom prst="rect">
             <a:avLst/>
           </a:prstGeom>
         </p:spPr>
       </p:pic>
+      <p:sp>
+        <p:nvSpPr>
+          <p:cNvPr id="15" name="Rounded Rectangle 14"/>
+          <p:cNvSpPr/>
+          <p:nvPr/>
+        </p:nvSpPr>
+        <p:spPr>
+          <a:xfrm>
+            <a:off x="4873752" y="1353312"/>
+            <a:ext cx="1554480" cy="365760"/>
+          </a:xfrm>
+          <a:prstGeom prst="roundRect">
+            <a:avLst>
+              <a:gd name="adj" fmla="val 50000"/>
+            </a:avLst>
+          </a:prstGeom>
+          <a:solidFill>
+            <a:srgbClr val="004C73"/>
+          </a:solidFill>
+          <a:ln>
+            <a:noFill/>
+          </a:ln>
+        </p:spPr>
+        <p:style>
+          <a:lnRef idx="1">
+            <a:schemeClr val="accent1"/>
+          </a:lnRef>
+          <a:fillRef idx="3">
+            <a:schemeClr val="accent1"/>
+          </a:fillRef>
+          <a:effectRef idx="2">
+            <a:schemeClr val="accent1"/>
+          </a:effectRef>
+          <a:fontRef idx="minor">
+            <a:schemeClr val="lt1"/>
+          </a:fontRef>
+        </p:style>
+        <p:txBody>
+          <a:bodyPr rtlCol="0" anchor="ctr" lIns="0" rIns="0" tIns="0" bIns="0"/>
+          <a:lstStyle/>
+          <a:p>
+            <a:pPr algn="ctr"/>
+            <a:r>
+              <a:rPr sz="1000" b="1">
+                <a:solidFill>
+                  <a:srgbClr val="FFFFFF"/>
+                </a:solidFill>
+                <a:latin typeface="Segoe UI"/>
+              </a:rPr>
+              <a:t>LIVE OUTPUT</a:t>
+            </a:r>
+          </a:p>
+        </p:txBody>
+      </p:sp>
     </p:spTree>
   </p:cSld>
   <p:clrMapOvr>
